--- a/layout options/status and trends alternate 5sep2019.pptx
+++ b/layout options/status and trends alternate 5sep2019.pptx
@@ -2,7 +2,7 @@
 <file path=ppt/presentation.xml><?xml version="1.0" encoding="utf-8"?>
 <p:presentation xmlns:a="http://schemas.openxmlformats.org/drawingml/2006/main" xmlns:r="http://schemas.openxmlformats.org/officeDocument/2006/relationships" xmlns:p="http://schemas.openxmlformats.org/presentationml/2006/main" saveSubsetFonts="1">
   <p:sldMasterIdLst>
-    <p:sldMasterId id="2147483672" r:id="rId4"/>
+    <p:sldMasterId id="2147483684" r:id="rId4"/>
   </p:sldMasterIdLst>
   <p:notesMasterIdLst>
     <p:notesMasterId r:id="rId12"/>
@@ -16,8 +16,8 @@
     <p:sldId id="274" r:id="rId10"/>
     <p:sldId id="277" r:id="rId11"/>
   </p:sldIdLst>
-  <p:sldSz cx="16256000" cy="9144000"/>
-  <p:notesSz cx="6858000" cy="9144000"/>
+  <p:sldSz cx="10058400" cy="7772400"/>
+  <p:notesSz cx="9144000" cy="6858000"/>
   <p:defaultTextStyle>
     <a:defPPr>
       <a:defRPr lang="en-US"/>
@@ -124,13 +124,903 @@
 <file path=ppt/revisionInfo.xml><?xml version="1.0" encoding="utf-8"?>
 <p1510:revInfo xmlns:a="http://schemas.openxmlformats.org/drawingml/2006/main" xmlns:r="http://schemas.openxmlformats.org/officeDocument/2006/relationships" xmlns:p1510="http://schemas.microsoft.com/office/powerpoint/2015/10/main">
   <p1510:revLst>
-    <p1510:client id="{9D7DB16A-EAE9-460C-999F-5786EC138850}" v="11" dt="2019-09-05T15:07:19.082"/>
+    <p1510:client id="{9D7DB16A-EAE9-460C-999F-5786EC138850}" v="48" dt="2019-09-10T22:50:31.680"/>
   </p1510:revLst>
 </p1510:revInfo>
 </file>
 
 <file path=ppt/changesInfos/changesInfo1.xml><?xml version="1.0" encoding="utf-8"?>
 <pc:chgInfo xmlns:a="http://schemas.openxmlformats.org/drawingml/2006/main" xmlns:r="http://schemas.openxmlformats.org/officeDocument/2006/relationships" xmlns:ac="http://schemas.microsoft.com/office/drawing/2013/main/command" xmlns:pc="http://schemas.microsoft.com/office/powerpoint/2013/main/command">
+  <pc:docChgLst>
+    <pc:chgData name="Hartman, Rosemary@DWR" userId="984f44d5-4180-46ad-9b77-e367b17d9727" providerId="ADAL" clId="{9D7DB16A-EAE9-460C-999F-5786EC138850}"/>
+    <pc:docChg chg="undo custSel modSld">
+      <pc:chgData name="Hartman, Rosemary@DWR" userId="984f44d5-4180-46ad-9b77-e367b17d9727" providerId="ADAL" clId="{9D7DB16A-EAE9-460C-999F-5786EC138850}" dt="2019-09-10T22:50:35.537" v="607" actId="1076"/>
+      <pc:docMkLst>
+        <pc:docMk/>
+      </pc:docMkLst>
+      <pc:sldChg chg="modSp">
+        <pc:chgData name="Hartman, Rosemary@DWR" userId="984f44d5-4180-46ad-9b77-e367b17d9727" providerId="ADAL" clId="{9D7DB16A-EAE9-460C-999F-5786EC138850}" dt="2019-09-10T21:59:18.189" v="212" actId="255"/>
+        <pc:sldMkLst>
+          <pc:docMk/>
+          <pc:sldMk cId="1998075012" sldId="256"/>
+        </pc:sldMkLst>
+        <pc:spChg chg="mod">
+          <ac:chgData name="Hartman, Rosemary@DWR" userId="984f44d5-4180-46ad-9b77-e367b17d9727" providerId="ADAL" clId="{9D7DB16A-EAE9-460C-999F-5786EC138850}" dt="2019-09-10T21:57:54.457" v="188" actId="255"/>
+          <ac:spMkLst>
+            <pc:docMk/>
+            <pc:sldMk cId="1998075012" sldId="256"/>
+            <ac:spMk id="2" creationId="{9684B250-0696-449F-B9C0-D5D3CDC312FF}"/>
+          </ac:spMkLst>
+        </pc:spChg>
+        <pc:spChg chg="mod">
+          <ac:chgData name="Hartman, Rosemary@DWR" userId="984f44d5-4180-46ad-9b77-e367b17d9727" providerId="ADAL" clId="{9D7DB16A-EAE9-460C-999F-5786EC138850}" dt="2019-09-10T21:56:49.325" v="178" actId="27636"/>
+          <ac:spMkLst>
+            <pc:docMk/>
+            <pc:sldMk cId="1998075012" sldId="256"/>
+            <ac:spMk id="3" creationId="{61179B21-AFC1-4EF2-A5C6-8A63DE3DE438}"/>
+          </ac:spMkLst>
+        </pc:spChg>
+        <pc:spChg chg="mod">
+          <ac:chgData name="Hartman, Rosemary@DWR" userId="984f44d5-4180-46ad-9b77-e367b17d9727" providerId="ADAL" clId="{9D7DB16A-EAE9-460C-999F-5786EC138850}" dt="2019-09-10T21:57:24.857" v="185" actId="1076"/>
+          <ac:spMkLst>
+            <pc:docMk/>
+            <pc:sldMk cId="1998075012" sldId="256"/>
+            <ac:spMk id="8" creationId="{1235C428-DADA-4DBE-9F55-E73B3390AF62}"/>
+          </ac:spMkLst>
+        </pc:spChg>
+        <pc:spChg chg="mod">
+          <ac:chgData name="Hartman, Rosemary@DWR" userId="984f44d5-4180-46ad-9b77-e367b17d9727" providerId="ADAL" clId="{9D7DB16A-EAE9-460C-999F-5786EC138850}" dt="2019-09-10T21:59:12.183" v="211" actId="255"/>
+          <ac:spMkLst>
+            <pc:docMk/>
+            <pc:sldMk cId="1998075012" sldId="256"/>
+            <ac:spMk id="10" creationId="{09DF7A45-74E2-42E6-ADD8-A641081F2B05}"/>
+          </ac:spMkLst>
+        </pc:spChg>
+        <pc:spChg chg="mod">
+          <ac:chgData name="Hartman, Rosemary@DWR" userId="984f44d5-4180-46ad-9b77-e367b17d9727" providerId="ADAL" clId="{9D7DB16A-EAE9-460C-999F-5786EC138850}" dt="2019-09-10T21:59:18.189" v="212" actId="255"/>
+          <ac:spMkLst>
+            <pc:docMk/>
+            <pc:sldMk cId="1998075012" sldId="256"/>
+            <ac:spMk id="26" creationId="{3B3BB663-3AE5-430D-90F4-8CEF6BD89BCE}"/>
+          </ac:spMkLst>
+        </pc:spChg>
+        <pc:spChg chg="mod">
+          <ac:chgData name="Hartman, Rosemary@DWR" userId="984f44d5-4180-46ad-9b77-e367b17d9727" providerId="ADAL" clId="{9D7DB16A-EAE9-460C-999F-5786EC138850}" dt="2019-09-10T21:59:18.189" v="212" actId="255"/>
+          <ac:spMkLst>
+            <pc:docMk/>
+            <pc:sldMk cId="1998075012" sldId="256"/>
+            <ac:spMk id="28" creationId="{B9E9807A-8D05-4948-AF07-AFCCFFD3D08F}"/>
+          </ac:spMkLst>
+        </pc:spChg>
+        <pc:spChg chg="mod">
+          <ac:chgData name="Hartman, Rosemary@DWR" userId="984f44d5-4180-46ad-9b77-e367b17d9727" providerId="ADAL" clId="{9D7DB16A-EAE9-460C-999F-5786EC138850}" dt="2019-09-10T21:59:18.189" v="212" actId="255"/>
+          <ac:spMkLst>
+            <pc:docMk/>
+            <pc:sldMk cId="1998075012" sldId="256"/>
+            <ac:spMk id="30" creationId="{FDEC11B6-765A-42ED-824D-C20E8E4BE111}"/>
+          </ac:spMkLst>
+        </pc:spChg>
+        <pc:picChg chg="mod">
+          <ac:chgData name="Hartman, Rosemary@DWR" userId="984f44d5-4180-46ad-9b77-e367b17d9727" providerId="ADAL" clId="{9D7DB16A-EAE9-460C-999F-5786EC138850}" dt="2019-09-10T21:57:21.776" v="184" actId="1076"/>
+          <ac:picMkLst>
+            <pc:docMk/>
+            <pc:sldMk cId="1998075012" sldId="256"/>
+            <ac:picMk id="2050" creationId="{03A51036-EC6F-4390-BEE7-5000D94BB401}"/>
+          </ac:picMkLst>
+        </pc:picChg>
+      </pc:sldChg>
+      <pc:sldChg chg="addSp delSp modSp">
+        <pc:chgData name="Hartman, Rosemary@DWR" userId="984f44d5-4180-46ad-9b77-e367b17d9727" providerId="ADAL" clId="{9D7DB16A-EAE9-460C-999F-5786EC138850}" dt="2019-09-10T22:48:57.945" v="605" actId="1076"/>
+        <pc:sldMkLst>
+          <pc:docMk/>
+          <pc:sldMk cId="1361116964" sldId="270"/>
+        </pc:sldMkLst>
+        <pc:spChg chg="mod">
+          <ac:chgData name="Hartman, Rosemary@DWR" userId="984f44d5-4180-46ad-9b77-e367b17d9727" providerId="ADAL" clId="{9D7DB16A-EAE9-460C-999F-5786EC138850}" dt="2019-09-10T21:34:13.956" v="17" actId="1076"/>
+          <ac:spMkLst>
+            <pc:docMk/>
+            <pc:sldMk cId="1361116964" sldId="270"/>
+            <ac:spMk id="2" creationId="{481959CD-523A-4ED7-819D-B152E314B4E7}"/>
+          </ac:spMkLst>
+        </pc:spChg>
+        <pc:spChg chg="add mod">
+          <ac:chgData name="Hartman, Rosemary@DWR" userId="984f44d5-4180-46ad-9b77-e367b17d9727" providerId="ADAL" clId="{9D7DB16A-EAE9-460C-999F-5786EC138850}" dt="2019-09-10T21:54:46.050" v="148" actId="14100"/>
+          <ac:spMkLst>
+            <pc:docMk/>
+            <pc:sldMk cId="1361116964" sldId="270"/>
+            <ac:spMk id="7" creationId="{7DD6A998-369D-4E0F-885B-593DBBCE4698}"/>
+          </ac:spMkLst>
+        </pc:spChg>
+        <pc:spChg chg="add mod">
+          <ac:chgData name="Hartman, Rosemary@DWR" userId="984f44d5-4180-46ad-9b77-e367b17d9727" providerId="ADAL" clId="{9D7DB16A-EAE9-460C-999F-5786EC138850}" dt="2019-09-10T21:55:27.482" v="152" actId="1076"/>
+          <ac:spMkLst>
+            <pc:docMk/>
+            <pc:sldMk cId="1361116964" sldId="270"/>
+            <ac:spMk id="8" creationId="{C7B4A30A-E2E5-45B2-8DAC-2B331E28073D}"/>
+          </ac:spMkLst>
+        </pc:spChg>
+        <pc:spChg chg="mod">
+          <ac:chgData name="Hartman, Rosemary@DWR" userId="984f44d5-4180-46ad-9b77-e367b17d9727" providerId="ADAL" clId="{9D7DB16A-EAE9-460C-999F-5786EC138850}" dt="2019-09-10T21:35:17.542" v="27" actId="255"/>
+          <ac:spMkLst>
+            <pc:docMk/>
+            <pc:sldMk cId="1361116964" sldId="270"/>
+            <ac:spMk id="10" creationId="{58215EFE-FED6-4678-939D-C7071C4EF586}"/>
+          </ac:spMkLst>
+        </pc:spChg>
+        <pc:spChg chg="mod">
+          <ac:chgData name="Hartman, Rosemary@DWR" userId="984f44d5-4180-46ad-9b77-e367b17d9727" providerId="ADAL" clId="{9D7DB16A-EAE9-460C-999F-5786EC138850}" dt="2019-09-10T22:48:29.984" v="592" actId="1076"/>
+          <ac:spMkLst>
+            <pc:docMk/>
+            <pc:sldMk cId="1361116964" sldId="270"/>
+            <ac:spMk id="13" creationId="{ECD2CB00-6B5D-4BC0-9F82-0DCDCEFAB5FF}"/>
+          </ac:spMkLst>
+        </pc:spChg>
+        <pc:spChg chg="add mod">
+          <ac:chgData name="Hartman, Rosemary@DWR" userId="984f44d5-4180-46ad-9b77-e367b17d9727" providerId="ADAL" clId="{9D7DB16A-EAE9-460C-999F-5786EC138850}" dt="2019-09-10T21:53:50.333" v="115" actId="208"/>
+          <ac:spMkLst>
+            <pc:docMk/>
+            <pc:sldMk cId="1361116964" sldId="270"/>
+            <ac:spMk id="16" creationId="{87A3A34E-F8C6-4E75-B0D9-A389732471A8}"/>
+          </ac:spMkLst>
+        </pc:spChg>
+        <pc:spChg chg="add mod">
+          <ac:chgData name="Hartman, Rosemary@DWR" userId="984f44d5-4180-46ad-9b77-e367b17d9727" providerId="ADAL" clId="{9D7DB16A-EAE9-460C-999F-5786EC138850}" dt="2019-09-10T21:53:28.202" v="114" actId="208"/>
+          <ac:spMkLst>
+            <pc:docMk/>
+            <pc:sldMk cId="1361116964" sldId="270"/>
+            <ac:spMk id="17" creationId="{BB7D5BFC-EF3C-4B6C-8482-3059EFB15EF5}"/>
+          </ac:spMkLst>
+        </pc:spChg>
+        <pc:spChg chg="mod">
+          <ac:chgData name="Hartman, Rosemary@DWR" userId="984f44d5-4180-46ad-9b77-e367b17d9727" providerId="ADAL" clId="{9D7DB16A-EAE9-460C-999F-5786EC138850}" dt="2019-09-10T21:56:22.158" v="167" actId="403"/>
+          <ac:spMkLst>
+            <pc:docMk/>
+            <pc:sldMk cId="1361116964" sldId="270"/>
+            <ac:spMk id="19" creationId="{93CA7E69-9849-481A-972D-0A421B7CAF5E}"/>
+          </ac:spMkLst>
+        </pc:spChg>
+        <pc:spChg chg="mod">
+          <ac:chgData name="Hartman, Rosemary@DWR" userId="984f44d5-4180-46ad-9b77-e367b17d9727" providerId="ADAL" clId="{9D7DB16A-EAE9-460C-999F-5786EC138850}" dt="2019-09-10T21:56:06.201" v="164" actId="1076"/>
+          <ac:spMkLst>
+            <pc:docMk/>
+            <pc:sldMk cId="1361116964" sldId="270"/>
+            <ac:spMk id="20" creationId="{41429D89-1B46-4039-80EB-BA87FFC2F9B6}"/>
+          </ac:spMkLst>
+        </pc:spChg>
+        <pc:spChg chg="mod">
+          <ac:chgData name="Hartman, Rosemary@DWR" userId="984f44d5-4180-46ad-9b77-e367b17d9727" providerId="ADAL" clId="{9D7DB16A-EAE9-460C-999F-5786EC138850}" dt="2019-09-10T21:55:45.185" v="157" actId="1076"/>
+          <ac:spMkLst>
+            <pc:docMk/>
+            <pc:sldMk cId="1361116964" sldId="270"/>
+            <ac:spMk id="21" creationId="{4A448C76-C9D5-4116-B87C-A3149D299CD0}"/>
+          </ac:spMkLst>
+        </pc:spChg>
+        <pc:spChg chg="mod">
+          <ac:chgData name="Hartman, Rosemary@DWR" userId="984f44d5-4180-46ad-9b77-e367b17d9727" providerId="ADAL" clId="{9D7DB16A-EAE9-460C-999F-5786EC138850}" dt="2019-09-10T21:56:04.153" v="163" actId="1076"/>
+          <ac:spMkLst>
+            <pc:docMk/>
+            <pc:sldMk cId="1361116964" sldId="270"/>
+            <ac:spMk id="22" creationId="{0CA1EF9C-12C6-423E-851E-1DF632AB30C8}"/>
+          </ac:spMkLst>
+        </pc:spChg>
+        <pc:spChg chg="mod">
+          <ac:chgData name="Hartman, Rosemary@DWR" userId="984f44d5-4180-46ad-9b77-e367b17d9727" providerId="ADAL" clId="{9D7DB16A-EAE9-460C-999F-5786EC138850}" dt="2019-09-10T22:48:37.600" v="593" actId="20577"/>
+          <ac:spMkLst>
+            <pc:docMk/>
+            <pc:sldMk cId="1361116964" sldId="270"/>
+            <ac:spMk id="23" creationId="{E6CBE8F5-B43C-45A5-9390-915E77A88028}"/>
+          </ac:spMkLst>
+        </pc:spChg>
+        <pc:spChg chg="add mod">
+          <ac:chgData name="Hartman, Rosemary@DWR" userId="984f44d5-4180-46ad-9b77-e367b17d9727" providerId="ADAL" clId="{9D7DB16A-EAE9-460C-999F-5786EC138850}" dt="2019-09-10T21:55:41.377" v="156" actId="1076"/>
+          <ac:spMkLst>
+            <pc:docMk/>
+            <pc:sldMk cId="1361116964" sldId="270"/>
+            <ac:spMk id="24" creationId="{42AAD0A6-482E-469B-BAFB-4A8C2DE69485}"/>
+          </ac:spMkLst>
+        </pc:spChg>
+        <pc:spChg chg="add mod">
+          <ac:chgData name="Hartman, Rosemary@DWR" userId="984f44d5-4180-46ad-9b77-e367b17d9727" providerId="ADAL" clId="{9D7DB16A-EAE9-460C-999F-5786EC138850}" dt="2019-09-10T21:56:15.489" v="165" actId="1076"/>
+          <ac:spMkLst>
+            <pc:docMk/>
+            <pc:sldMk cId="1361116964" sldId="270"/>
+            <ac:spMk id="25" creationId="{7120DF91-3E6A-4B3F-BC48-F52CD674EC54}"/>
+          </ac:spMkLst>
+        </pc:spChg>
+        <pc:spChg chg="add mod">
+          <ac:chgData name="Hartman, Rosemary@DWR" userId="984f44d5-4180-46ad-9b77-e367b17d9727" providerId="ADAL" clId="{9D7DB16A-EAE9-460C-999F-5786EC138850}" dt="2019-09-10T22:48:57.945" v="605" actId="1076"/>
+          <ac:spMkLst>
+            <pc:docMk/>
+            <pc:sldMk cId="1361116964" sldId="270"/>
+            <ac:spMk id="26" creationId="{8B4D2A53-3E2D-4DF9-AEF9-E2776EA610D8}"/>
+          </ac:spMkLst>
+        </pc:spChg>
+        <pc:picChg chg="mod">
+          <ac:chgData name="Hartman, Rosemary@DWR" userId="984f44d5-4180-46ad-9b77-e367b17d9727" providerId="ADAL" clId="{9D7DB16A-EAE9-460C-999F-5786EC138850}" dt="2019-09-10T21:34:15.820" v="18" actId="1076"/>
+          <ac:picMkLst>
+            <pc:docMk/>
+            <pc:sldMk cId="1361116964" sldId="270"/>
+            <ac:picMk id="4" creationId="{E239B59A-13B0-4C2D-9561-229E1A398742}"/>
+          </ac:picMkLst>
+        </pc:picChg>
+        <pc:picChg chg="mod">
+          <ac:chgData name="Hartman, Rosemary@DWR" userId="984f44d5-4180-46ad-9b77-e367b17d9727" providerId="ADAL" clId="{9D7DB16A-EAE9-460C-999F-5786EC138850}" dt="2019-09-10T22:48:26.817" v="591" actId="1076"/>
+          <ac:picMkLst>
+            <pc:docMk/>
+            <pc:sldMk cId="1361116964" sldId="270"/>
+            <ac:picMk id="5" creationId="{EF8E2702-9395-4072-99F4-C69925FA668A}"/>
+          </ac:picMkLst>
+        </pc:picChg>
+        <pc:picChg chg="add mod">
+          <ac:chgData name="Hartman, Rosemary@DWR" userId="984f44d5-4180-46ad-9b77-e367b17d9727" providerId="ADAL" clId="{9D7DB16A-EAE9-460C-999F-5786EC138850}" dt="2019-09-10T21:53:10.723" v="110" actId="1076"/>
+          <ac:picMkLst>
+            <pc:docMk/>
+            <pc:sldMk cId="1361116964" sldId="270"/>
+            <ac:picMk id="6" creationId="{F7E24920-91C9-4CEF-9DFC-A31F3A8C9F50}"/>
+          </ac:picMkLst>
+        </pc:picChg>
+        <pc:picChg chg="del">
+          <ac:chgData name="Hartman, Rosemary@DWR" userId="984f44d5-4180-46ad-9b77-e367b17d9727" providerId="ADAL" clId="{9D7DB16A-EAE9-460C-999F-5786EC138850}" dt="2019-09-10T21:50:57.734" v="77" actId="478"/>
+          <ac:picMkLst>
+            <pc:docMk/>
+            <pc:sldMk cId="1361116964" sldId="270"/>
+            <ac:picMk id="11" creationId="{D391B6D6-A86E-4196-BC69-68262B4CEFE4}"/>
+          </ac:picMkLst>
+        </pc:picChg>
+      </pc:sldChg>
+      <pc:sldChg chg="addSp delSp modSp">
+        <pc:chgData name="Hartman, Rosemary@DWR" userId="984f44d5-4180-46ad-9b77-e367b17d9727" providerId="ADAL" clId="{9D7DB16A-EAE9-460C-999F-5786EC138850}" dt="2019-09-10T22:03:32.834" v="284" actId="408"/>
+        <pc:sldMkLst>
+          <pc:docMk/>
+          <pc:sldMk cId="89526991" sldId="271"/>
+        </pc:sldMkLst>
+        <pc:spChg chg="del">
+          <ac:chgData name="Hartman, Rosemary@DWR" userId="984f44d5-4180-46ad-9b77-e367b17d9727" providerId="ADAL" clId="{9D7DB16A-EAE9-460C-999F-5786EC138850}" dt="2019-09-10T21:58:10.070" v="189" actId="478"/>
+          <ac:spMkLst>
+            <pc:docMk/>
+            <pc:sldMk cId="89526991" sldId="271"/>
+            <ac:spMk id="2" creationId="{9684B250-0696-449F-B9C0-D5D3CDC312FF}"/>
+          </ac:spMkLst>
+        </pc:spChg>
+        <pc:spChg chg="del">
+          <ac:chgData name="Hartman, Rosemary@DWR" userId="984f44d5-4180-46ad-9b77-e367b17d9727" providerId="ADAL" clId="{9D7DB16A-EAE9-460C-999F-5786EC138850}" dt="2019-09-10T21:58:15.989" v="191" actId="478"/>
+          <ac:spMkLst>
+            <pc:docMk/>
+            <pc:sldMk cId="89526991" sldId="271"/>
+            <ac:spMk id="3" creationId="{61179B21-AFC1-4EF2-A5C6-8A63DE3DE438}"/>
+          </ac:spMkLst>
+        </pc:spChg>
+        <pc:spChg chg="add del mod">
+          <ac:chgData name="Hartman, Rosemary@DWR" userId="984f44d5-4180-46ad-9b77-e367b17d9727" providerId="ADAL" clId="{9D7DB16A-EAE9-460C-999F-5786EC138850}" dt="2019-09-10T21:58:13.848" v="190" actId="478"/>
+          <ac:spMkLst>
+            <pc:docMk/>
+            <pc:sldMk cId="89526991" sldId="271"/>
+            <ac:spMk id="5" creationId="{A4310354-D76E-4507-8F8F-A29E306C6D04}"/>
+          </ac:spMkLst>
+        </pc:spChg>
+        <pc:spChg chg="add del mod">
+          <ac:chgData name="Hartman, Rosemary@DWR" userId="984f44d5-4180-46ad-9b77-e367b17d9727" providerId="ADAL" clId="{9D7DB16A-EAE9-460C-999F-5786EC138850}" dt="2019-09-10T21:58:24.248" v="194" actId="478"/>
+          <ac:spMkLst>
+            <pc:docMk/>
+            <pc:sldMk cId="89526991" sldId="271"/>
+            <ac:spMk id="8" creationId="{94890DF2-051D-4A13-B6C2-BA09FDCFC4E4}"/>
+          </ac:spMkLst>
+        </pc:spChg>
+        <pc:spChg chg="mod">
+          <ac:chgData name="Hartman, Rosemary@DWR" userId="984f44d5-4180-46ad-9b77-e367b17d9727" providerId="ADAL" clId="{9D7DB16A-EAE9-460C-999F-5786EC138850}" dt="2019-09-10T21:59:39.497" v="215" actId="14100"/>
+          <ac:spMkLst>
+            <pc:docMk/>
+            <pc:sldMk cId="89526991" sldId="271"/>
+            <ac:spMk id="10" creationId="{09DF7A45-74E2-42E6-ADD8-A641081F2B05}"/>
+          </ac:spMkLst>
+        </pc:spChg>
+        <pc:spChg chg="mod">
+          <ac:chgData name="Hartman, Rosemary@DWR" userId="984f44d5-4180-46ad-9b77-e367b17d9727" providerId="ADAL" clId="{9D7DB16A-EAE9-460C-999F-5786EC138850}" dt="2019-09-10T22:03:11.210" v="279" actId="408"/>
+          <ac:spMkLst>
+            <pc:docMk/>
+            <pc:sldMk cId="89526991" sldId="271"/>
+            <ac:spMk id="13" creationId="{EF5DC701-D2D0-4CD1-844D-9B0BEC4BA38B}"/>
+          </ac:spMkLst>
+        </pc:spChg>
+        <pc:spChg chg="mod">
+          <ac:chgData name="Hartman, Rosemary@DWR" userId="984f44d5-4180-46ad-9b77-e367b17d9727" providerId="ADAL" clId="{9D7DB16A-EAE9-460C-999F-5786EC138850}" dt="2019-09-10T22:03:19.510" v="281" actId="1076"/>
+          <ac:spMkLst>
+            <pc:docMk/>
+            <pc:sldMk cId="89526991" sldId="271"/>
+            <ac:spMk id="14" creationId="{1FADD14C-2003-42AC-9DF6-02DBABD35EE4}"/>
+          </ac:spMkLst>
+        </pc:spChg>
+        <pc:spChg chg="mod">
+          <ac:chgData name="Hartman, Rosemary@DWR" userId="984f44d5-4180-46ad-9b77-e367b17d9727" providerId="ADAL" clId="{9D7DB16A-EAE9-460C-999F-5786EC138850}" dt="2019-09-10T22:03:25.301" v="282" actId="1076"/>
+          <ac:spMkLst>
+            <pc:docMk/>
+            <pc:sldMk cId="89526991" sldId="271"/>
+            <ac:spMk id="16" creationId="{63C8EE9F-93BA-4F38-BEFC-A2F7B1407FCC}"/>
+          </ac:spMkLst>
+        </pc:spChg>
+        <pc:spChg chg="mod">
+          <ac:chgData name="Hartman, Rosemary@DWR" userId="984f44d5-4180-46ad-9b77-e367b17d9727" providerId="ADAL" clId="{9D7DB16A-EAE9-460C-999F-5786EC138850}" dt="2019-09-10T22:03:32.834" v="284" actId="408"/>
+          <ac:spMkLst>
+            <pc:docMk/>
+            <pc:sldMk cId="89526991" sldId="271"/>
+            <ac:spMk id="17" creationId="{E7055552-C7D4-43C3-A6C9-2705DCD3DF6E}"/>
+          </ac:spMkLst>
+        </pc:spChg>
+        <pc:spChg chg="add mod">
+          <ac:chgData name="Hartman, Rosemary@DWR" userId="984f44d5-4180-46ad-9b77-e367b17d9727" providerId="ADAL" clId="{9D7DB16A-EAE9-460C-999F-5786EC138850}" dt="2019-09-10T21:58:31.424" v="205" actId="20577"/>
+          <ac:spMkLst>
+            <pc:docMk/>
+            <pc:sldMk cId="89526991" sldId="271"/>
+            <ac:spMk id="18" creationId="{377AB46F-CDA5-4920-B5FB-39C4A0BF47A7}"/>
+          </ac:spMkLst>
+        </pc:spChg>
+        <pc:spChg chg="add">
+          <ac:chgData name="Hartman, Rosemary@DWR" userId="984f44d5-4180-46ad-9b77-e367b17d9727" providerId="ADAL" clId="{9D7DB16A-EAE9-460C-999F-5786EC138850}" dt="2019-09-10T21:58:17.214" v="192"/>
+          <ac:spMkLst>
+            <pc:docMk/>
+            <pc:sldMk cId="89526991" sldId="271"/>
+            <ac:spMk id="19" creationId="{693E9B4A-0F87-4BB6-BC1F-2BFCC67756A7}"/>
+          </ac:spMkLst>
+        </pc:spChg>
+        <pc:spChg chg="add del">
+          <ac:chgData name="Hartman, Rosemary@DWR" userId="984f44d5-4180-46ad-9b77-e367b17d9727" providerId="ADAL" clId="{9D7DB16A-EAE9-460C-999F-5786EC138850}" dt="2019-09-10T21:58:34.736" v="206" actId="478"/>
+          <ac:spMkLst>
+            <pc:docMk/>
+            <pc:sldMk cId="89526991" sldId="271"/>
+            <ac:spMk id="20" creationId="{2C629F49-6ECD-415F-8610-A2F635190B91}"/>
+          </ac:spMkLst>
+        </pc:spChg>
+        <pc:spChg chg="mod">
+          <ac:chgData name="Hartman, Rosemary@DWR" userId="984f44d5-4180-46ad-9b77-e367b17d9727" providerId="ADAL" clId="{9D7DB16A-EAE9-460C-999F-5786EC138850}" dt="2019-09-10T22:03:32.834" v="284" actId="408"/>
+          <ac:spMkLst>
+            <pc:docMk/>
+            <pc:sldMk cId="89526991" sldId="271"/>
+            <ac:spMk id="26" creationId="{3B3BB663-3AE5-430D-90F4-8CEF6BD89BCE}"/>
+          </ac:spMkLst>
+        </pc:spChg>
+        <pc:spChg chg="del mod">
+          <ac:chgData name="Hartman, Rosemary@DWR" userId="984f44d5-4180-46ad-9b77-e367b17d9727" providerId="ADAL" clId="{9D7DB16A-EAE9-460C-999F-5786EC138850}" dt="2019-09-10T22:03:15.069" v="280" actId="478"/>
+          <ac:spMkLst>
+            <pc:docMk/>
+            <pc:sldMk cId="89526991" sldId="271"/>
+            <ac:spMk id="27" creationId="{C362F15E-9505-41C4-9AD7-10CF4E211EE9}"/>
+          </ac:spMkLst>
+        </pc:spChg>
+        <pc:spChg chg="mod">
+          <ac:chgData name="Hartman, Rosemary@DWR" userId="984f44d5-4180-46ad-9b77-e367b17d9727" providerId="ADAL" clId="{9D7DB16A-EAE9-460C-999F-5786EC138850}" dt="2019-09-10T22:03:32.834" v="284" actId="408"/>
+          <ac:spMkLst>
+            <pc:docMk/>
+            <pc:sldMk cId="89526991" sldId="271"/>
+            <ac:spMk id="28" creationId="{B9E9807A-8D05-4948-AF07-AFCCFFD3D08F}"/>
+          </ac:spMkLst>
+        </pc:spChg>
+        <pc:picChg chg="mod">
+          <ac:chgData name="Hartman, Rosemary@DWR" userId="984f44d5-4180-46ad-9b77-e367b17d9727" providerId="ADAL" clId="{9D7DB16A-EAE9-460C-999F-5786EC138850}" dt="2019-09-10T21:58:22.220" v="193" actId="1076"/>
+          <ac:picMkLst>
+            <pc:docMk/>
+            <pc:sldMk cId="89526991" sldId="271"/>
+            <ac:picMk id="7" creationId="{472DC9B6-96A0-4F26-B84D-0A3AFD972706}"/>
+          </ac:picMkLst>
+        </pc:picChg>
+        <pc:picChg chg="mod">
+          <ac:chgData name="Hartman, Rosemary@DWR" userId="984f44d5-4180-46ad-9b77-e367b17d9727" providerId="ADAL" clId="{9D7DB16A-EAE9-460C-999F-5786EC138850}" dt="2019-09-10T21:58:48.720" v="209" actId="1076"/>
+          <ac:picMkLst>
+            <pc:docMk/>
+            <pc:sldMk cId="89526991" sldId="271"/>
+            <ac:picMk id="15" creationId="{F4F664CE-FD08-4C9F-B2DE-F85E8EC18F13}"/>
+          </ac:picMkLst>
+        </pc:picChg>
+      </pc:sldChg>
+      <pc:sldChg chg="addSp delSp modSp">
+        <pc:chgData name="Hartman, Rosemary@DWR" userId="984f44d5-4180-46ad-9b77-e367b17d9727" providerId="ADAL" clId="{9D7DB16A-EAE9-460C-999F-5786EC138850}" dt="2019-09-10T22:00:23.950" v="234" actId="255"/>
+        <pc:sldMkLst>
+          <pc:docMk/>
+          <pc:sldMk cId="1056247700" sldId="272"/>
+        </pc:sldMkLst>
+        <pc:spChg chg="del">
+          <ac:chgData name="Hartman, Rosemary@DWR" userId="984f44d5-4180-46ad-9b77-e367b17d9727" providerId="ADAL" clId="{9D7DB16A-EAE9-460C-999F-5786EC138850}" dt="2019-09-10T21:59:53.935" v="216" actId="478"/>
+          <ac:spMkLst>
+            <pc:docMk/>
+            <pc:sldMk cId="1056247700" sldId="272"/>
+            <ac:spMk id="2" creationId="{9684B250-0696-449F-B9C0-D5D3CDC312FF}"/>
+          </ac:spMkLst>
+        </pc:spChg>
+        <pc:spChg chg="del">
+          <ac:chgData name="Hartman, Rosemary@DWR" userId="984f44d5-4180-46ad-9b77-e367b17d9727" providerId="ADAL" clId="{9D7DB16A-EAE9-460C-999F-5786EC138850}" dt="2019-09-10T21:59:58.365" v="218" actId="478"/>
+          <ac:spMkLst>
+            <pc:docMk/>
+            <pc:sldMk cId="1056247700" sldId="272"/>
+            <ac:spMk id="3" creationId="{61179B21-AFC1-4EF2-A5C6-8A63DE3DE438}"/>
+          </ac:spMkLst>
+        </pc:spChg>
+        <pc:spChg chg="add del mod">
+          <ac:chgData name="Hartman, Rosemary@DWR" userId="984f44d5-4180-46ad-9b77-e367b17d9727" providerId="ADAL" clId="{9D7DB16A-EAE9-460C-999F-5786EC138850}" dt="2019-09-10T21:59:56.399" v="217" actId="478"/>
+          <ac:spMkLst>
+            <pc:docMk/>
+            <pc:sldMk cId="1056247700" sldId="272"/>
+            <ac:spMk id="7" creationId="{727D6E3A-EF87-43D6-8170-AD5A87669339}"/>
+          </ac:spMkLst>
+        </pc:spChg>
+        <pc:spChg chg="add del mod">
+          <ac:chgData name="Hartman, Rosemary@DWR" userId="984f44d5-4180-46ad-9b77-e367b17d9727" providerId="ADAL" clId="{9D7DB16A-EAE9-460C-999F-5786EC138850}" dt="2019-09-10T22:00:02.639" v="219" actId="478"/>
+          <ac:spMkLst>
+            <pc:docMk/>
+            <pc:sldMk cId="1056247700" sldId="272"/>
+            <ac:spMk id="9" creationId="{D8CDB981-7E6A-47F9-B3EA-26344D25D945}"/>
+          </ac:spMkLst>
+        </pc:spChg>
+        <pc:spChg chg="mod">
+          <ac:chgData name="Hartman, Rosemary@DWR" userId="984f44d5-4180-46ad-9b77-e367b17d9727" providerId="ADAL" clId="{9D7DB16A-EAE9-460C-999F-5786EC138850}" dt="2019-09-10T22:00:18.398" v="233" actId="1076"/>
+          <ac:spMkLst>
+            <pc:docMk/>
+            <pc:sldMk cId="1056247700" sldId="272"/>
+            <ac:spMk id="10" creationId="{09DF7A45-74E2-42E6-ADD8-A641081F2B05}"/>
+          </ac:spMkLst>
+        </pc:spChg>
+        <pc:spChg chg="mod">
+          <ac:chgData name="Hartman, Rosemary@DWR" userId="984f44d5-4180-46ad-9b77-e367b17d9727" providerId="ADAL" clId="{9D7DB16A-EAE9-460C-999F-5786EC138850}" dt="2019-09-10T22:00:23.950" v="234" actId="255"/>
+          <ac:spMkLst>
+            <pc:docMk/>
+            <pc:sldMk cId="1056247700" sldId="272"/>
+            <ac:spMk id="17" creationId="{E7055552-C7D4-43C3-A6C9-2705DCD3DF6E}"/>
+          </ac:spMkLst>
+        </pc:spChg>
+        <pc:spChg chg="add mod">
+          <ac:chgData name="Hartman, Rosemary@DWR" userId="984f44d5-4180-46ad-9b77-e367b17d9727" providerId="ADAL" clId="{9D7DB16A-EAE9-460C-999F-5786EC138850}" dt="2019-09-10T22:00:09.416" v="231" actId="20577"/>
+          <ac:spMkLst>
+            <pc:docMk/>
+            <pc:sldMk cId="1056247700" sldId="272"/>
+            <ac:spMk id="21" creationId="{D2015B4B-0802-4CA1-AFC8-3160D886DB95}"/>
+          </ac:spMkLst>
+        </pc:spChg>
+        <pc:spChg chg="add">
+          <ac:chgData name="Hartman, Rosemary@DWR" userId="984f44d5-4180-46ad-9b77-e367b17d9727" providerId="ADAL" clId="{9D7DB16A-EAE9-460C-999F-5786EC138850}" dt="2019-09-10T22:00:03.941" v="220"/>
+          <ac:spMkLst>
+            <pc:docMk/>
+            <pc:sldMk cId="1056247700" sldId="272"/>
+            <ac:spMk id="22" creationId="{BBDF106C-EE77-4E45-A4FC-9A83B000C0A0}"/>
+          </ac:spMkLst>
+        </pc:spChg>
+        <pc:spChg chg="mod">
+          <ac:chgData name="Hartman, Rosemary@DWR" userId="984f44d5-4180-46ad-9b77-e367b17d9727" providerId="ADAL" clId="{9D7DB16A-EAE9-460C-999F-5786EC138850}" dt="2019-09-10T22:00:23.950" v="234" actId="255"/>
+          <ac:spMkLst>
+            <pc:docMk/>
+            <pc:sldMk cId="1056247700" sldId="272"/>
+            <ac:spMk id="26" creationId="{3B3BB663-3AE5-430D-90F4-8CEF6BD89BCE}"/>
+          </ac:spMkLst>
+        </pc:spChg>
+        <pc:spChg chg="mod">
+          <ac:chgData name="Hartman, Rosemary@DWR" userId="984f44d5-4180-46ad-9b77-e367b17d9727" providerId="ADAL" clId="{9D7DB16A-EAE9-460C-999F-5786EC138850}" dt="2019-09-10T22:00:23.950" v="234" actId="255"/>
+          <ac:spMkLst>
+            <pc:docMk/>
+            <pc:sldMk cId="1056247700" sldId="272"/>
+            <ac:spMk id="28" creationId="{B9E9807A-8D05-4948-AF07-AFCCFFD3D08F}"/>
+          </ac:spMkLst>
+        </pc:spChg>
+        <pc:picChg chg="mod">
+          <ac:chgData name="Hartman, Rosemary@DWR" userId="984f44d5-4180-46ad-9b77-e367b17d9727" providerId="ADAL" clId="{9D7DB16A-EAE9-460C-999F-5786EC138850}" dt="2019-09-10T22:00:18.398" v="233" actId="1076"/>
+          <ac:picMkLst>
+            <pc:docMk/>
+            <pc:sldMk cId="1056247700" sldId="272"/>
+            <ac:picMk id="18" creationId="{1CB56194-4436-4137-87E3-89719825DFB9}"/>
+          </ac:picMkLst>
+        </pc:picChg>
+      </pc:sldChg>
+      <pc:sldChg chg="addSp delSp modSp">
+        <pc:chgData name="Hartman, Rosemary@DWR" userId="984f44d5-4180-46ad-9b77-e367b17d9727" providerId="ADAL" clId="{9D7DB16A-EAE9-460C-999F-5786EC138850}" dt="2019-09-10T22:02:20.693" v="274" actId="1076"/>
+        <pc:sldMkLst>
+          <pc:docMk/>
+          <pc:sldMk cId="3824117055" sldId="273"/>
+        </pc:sldMkLst>
+        <pc:spChg chg="del mod">
+          <ac:chgData name="Hartman, Rosemary@DWR" userId="984f44d5-4180-46ad-9b77-e367b17d9727" providerId="ADAL" clId="{9D7DB16A-EAE9-460C-999F-5786EC138850}" dt="2019-09-10T22:00:51.333" v="237" actId="478"/>
+          <ac:spMkLst>
+            <pc:docMk/>
+            <pc:sldMk cId="3824117055" sldId="273"/>
+            <ac:spMk id="2" creationId="{9684B250-0696-449F-B9C0-D5D3CDC312FF}"/>
+          </ac:spMkLst>
+        </pc:spChg>
+        <pc:spChg chg="del mod">
+          <ac:chgData name="Hartman, Rosemary@DWR" userId="984f44d5-4180-46ad-9b77-e367b17d9727" providerId="ADAL" clId="{9D7DB16A-EAE9-460C-999F-5786EC138850}" dt="2019-09-10T22:00:45.191" v="235" actId="478"/>
+          <ac:spMkLst>
+            <pc:docMk/>
+            <pc:sldMk cId="3824117055" sldId="273"/>
+            <ac:spMk id="3" creationId="{61179B21-AFC1-4EF2-A5C6-8A63DE3DE438}"/>
+          </ac:spMkLst>
+        </pc:spChg>
+        <pc:spChg chg="add del mod">
+          <ac:chgData name="Hartman, Rosemary@DWR" userId="984f44d5-4180-46ad-9b77-e367b17d9727" providerId="ADAL" clId="{9D7DB16A-EAE9-460C-999F-5786EC138850}" dt="2019-09-10T22:00:49.135" v="236" actId="478"/>
+          <ac:spMkLst>
+            <pc:docMk/>
+            <pc:sldMk cId="3824117055" sldId="273"/>
+            <ac:spMk id="5" creationId="{20CB61A9-D275-4F51-AA0B-8FAEF487CA5A}"/>
+          </ac:spMkLst>
+        </pc:spChg>
+        <pc:spChg chg="add del mod">
+          <ac:chgData name="Hartman, Rosemary@DWR" userId="984f44d5-4180-46ad-9b77-e367b17d9727" providerId="ADAL" clId="{9D7DB16A-EAE9-460C-999F-5786EC138850}" dt="2019-09-10T22:00:53.487" v="238" actId="478"/>
+          <ac:spMkLst>
+            <pc:docMk/>
+            <pc:sldMk cId="3824117055" sldId="273"/>
+            <ac:spMk id="9" creationId="{E631F7B3-DC8E-4929-9F35-E6AD5856E411}"/>
+          </ac:spMkLst>
+        </pc:spChg>
+        <pc:spChg chg="mod">
+          <ac:chgData name="Hartman, Rosemary@DWR" userId="984f44d5-4180-46ad-9b77-e367b17d9727" providerId="ADAL" clId="{9D7DB16A-EAE9-460C-999F-5786EC138850}" dt="2019-09-10T22:01:12.161" v="254" actId="14100"/>
+          <ac:spMkLst>
+            <pc:docMk/>
+            <pc:sldMk cId="3824117055" sldId="273"/>
+            <ac:spMk id="10" creationId="{09DF7A45-74E2-42E6-ADD8-A641081F2B05}"/>
+          </ac:spMkLst>
+        </pc:spChg>
+        <pc:spChg chg="mod">
+          <ac:chgData name="Hartman, Rosemary@DWR" userId="984f44d5-4180-46ad-9b77-e367b17d9727" providerId="ADAL" clId="{9D7DB16A-EAE9-460C-999F-5786EC138850}" dt="2019-09-10T22:01:59.266" v="267" actId="408"/>
+          <ac:spMkLst>
+            <pc:docMk/>
+            <pc:sldMk cId="3824117055" sldId="273"/>
+            <ac:spMk id="13" creationId="{EF5DC701-D2D0-4CD1-844D-9B0BEC4BA38B}"/>
+          </ac:spMkLst>
+        </pc:spChg>
+        <pc:spChg chg="mod">
+          <ac:chgData name="Hartman, Rosemary@DWR" userId="984f44d5-4180-46ad-9b77-e367b17d9727" providerId="ADAL" clId="{9D7DB16A-EAE9-460C-999F-5786EC138850}" dt="2019-09-10T22:01:59.266" v="267" actId="408"/>
+          <ac:spMkLst>
+            <pc:docMk/>
+            <pc:sldMk cId="3824117055" sldId="273"/>
+            <ac:spMk id="14" creationId="{1FADD14C-2003-42AC-9DF6-02DBABD35EE4}"/>
+          </ac:spMkLst>
+        </pc:spChg>
+        <pc:spChg chg="mod">
+          <ac:chgData name="Hartman, Rosemary@DWR" userId="984f44d5-4180-46ad-9b77-e367b17d9727" providerId="ADAL" clId="{9D7DB16A-EAE9-460C-999F-5786EC138850}" dt="2019-09-10T22:01:59.266" v="267" actId="408"/>
+          <ac:spMkLst>
+            <pc:docMk/>
+            <pc:sldMk cId="3824117055" sldId="273"/>
+            <ac:spMk id="16" creationId="{63C8EE9F-93BA-4F38-BEFC-A2F7B1407FCC}"/>
+          </ac:spMkLst>
+        </pc:spChg>
+        <pc:spChg chg="mod">
+          <ac:chgData name="Hartman, Rosemary@DWR" userId="984f44d5-4180-46ad-9b77-e367b17d9727" providerId="ADAL" clId="{9D7DB16A-EAE9-460C-999F-5786EC138850}" dt="2019-09-10T22:02:06.171" v="269" actId="408"/>
+          <ac:spMkLst>
+            <pc:docMk/>
+            <pc:sldMk cId="3824117055" sldId="273"/>
+            <ac:spMk id="17" creationId="{E7055552-C7D4-43C3-A6C9-2705DCD3DF6E}"/>
+          </ac:spMkLst>
+        </pc:spChg>
+        <pc:spChg chg="add mod">
+          <ac:chgData name="Hartman, Rosemary@DWR" userId="984f44d5-4180-46ad-9b77-e367b17d9727" providerId="ADAL" clId="{9D7DB16A-EAE9-460C-999F-5786EC138850}" dt="2019-09-10T22:01:01.623" v="251" actId="20577"/>
+          <ac:spMkLst>
+            <pc:docMk/>
+            <pc:sldMk cId="3824117055" sldId="273"/>
+            <ac:spMk id="19" creationId="{EE131A9A-FBEC-4437-8F83-F0505C8C1EB0}"/>
+          </ac:spMkLst>
+        </pc:spChg>
+        <pc:spChg chg="add mod">
+          <ac:chgData name="Hartman, Rosemary@DWR" userId="984f44d5-4180-46ad-9b77-e367b17d9727" providerId="ADAL" clId="{9D7DB16A-EAE9-460C-999F-5786EC138850}" dt="2019-09-10T22:02:17.375" v="273" actId="1076"/>
+          <ac:spMkLst>
+            <pc:docMk/>
+            <pc:sldMk cId="3824117055" sldId="273"/>
+            <ac:spMk id="20" creationId="{03F007B3-B35E-4131-84C8-7478F77DA534}"/>
+          </ac:spMkLst>
+        </pc:spChg>
+        <pc:spChg chg="mod">
+          <ac:chgData name="Hartman, Rosemary@DWR" userId="984f44d5-4180-46ad-9b77-e367b17d9727" providerId="ADAL" clId="{9D7DB16A-EAE9-460C-999F-5786EC138850}" dt="2019-09-10T22:02:06.171" v="269" actId="408"/>
+          <ac:spMkLst>
+            <pc:docMk/>
+            <pc:sldMk cId="3824117055" sldId="273"/>
+            <ac:spMk id="22" creationId="{8E6139C2-5AB7-4F96-8354-2CAD5D8E5405}"/>
+          </ac:spMkLst>
+        </pc:spChg>
+        <pc:spChg chg="mod">
+          <ac:chgData name="Hartman, Rosemary@DWR" userId="984f44d5-4180-46ad-9b77-e367b17d9727" providerId="ADAL" clId="{9D7DB16A-EAE9-460C-999F-5786EC138850}" dt="2019-09-10T22:02:06.171" v="269" actId="408"/>
+          <ac:spMkLst>
+            <pc:docMk/>
+            <pc:sldMk cId="3824117055" sldId="273"/>
+            <ac:spMk id="26" creationId="{3B3BB663-3AE5-430D-90F4-8CEF6BD89BCE}"/>
+          </ac:spMkLst>
+        </pc:spChg>
+        <pc:picChg chg="mod">
+          <ac:chgData name="Hartman, Rosemary@DWR" userId="984f44d5-4180-46ad-9b77-e367b17d9727" providerId="ADAL" clId="{9D7DB16A-EAE9-460C-999F-5786EC138850}" dt="2019-09-10T22:02:14.102" v="271" actId="1076"/>
+          <ac:picMkLst>
+            <pc:docMk/>
+            <pc:sldMk cId="3824117055" sldId="273"/>
+            <ac:picMk id="6" creationId="{07815C86-414E-4944-97A9-2298F19FA619}"/>
+          </ac:picMkLst>
+        </pc:picChg>
+        <pc:picChg chg="mod">
+          <ac:chgData name="Hartman, Rosemary@DWR" userId="984f44d5-4180-46ad-9b77-e367b17d9727" providerId="ADAL" clId="{9D7DB16A-EAE9-460C-999F-5786EC138850}" dt="2019-09-10T22:02:20.693" v="274" actId="1076"/>
+          <ac:picMkLst>
+            <pc:docMk/>
+            <pc:sldMk cId="3824117055" sldId="273"/>
+            <ac:picMk id="8" creationId="{FE606312-76F3-4BA0-AC36-DD6BEC2F892D}"/>
+          </ac:picMkLst>
+        </pc:picChg>
+        <pc:picChg chg="del">
+          <ac:chgData name="Hartman, Rosemary@DWR" userId="984f44d5-4180-46ad-9b77-e367b17d9727" providerId="ADAL" clId="{9D7DB16A-EAE9-460C-999F-5786EC138850}" dt="2019-09-10T22:02:12.638" v="270" actId="478"/>
+          <ac:picMkLst>
+            <pc:docMk/>
+            <pc:sldMk cId="3824117055" sldId="273"/>
+            <ac:picMk id="11" creationId="{995E6C15-2E49-4229-A5F8-8036334A8E4C}"/>
+          </ac:picMkLst>
+        </pc:picChg>
+        <pc:picChg chg="mod">
+          <ac:chgData name="Hartman, Rosemary@DWR" userId="984f44d5-4180-46ad-9b77-e367b17d9727" providerId="ADAL" clId="{9D7DB16A-EAE9-460C-999F-5786EC138850}" dt="2019-09-10T22:01:42.126" v="264" actId="1076"/>
+          <ac:picMkLst>
+            <pc:docMk/>
+            <pc:sldMk cId="3824117055" sldId="273"/>
+            <ac:picMk id="15" creationId="{D569397F-D5DC-433F-A7B3-6080D2A7B7FC}"/>
+          </ac:picMkLst>
+        </pc:picChg>
+      </pc:sldChg>
+      <pc:sldChg chg="addSp delSp modSp">
+        <pc:chgData name="Hartman, Rosemary@DWR" userId="984f44d5-4180-46ad-9b77-e367b17d9727" providerId="ADAL" clId="{9D7DB16A-EAE9-460C-999F-5786EC138850}" dt="2019-09-10T22:42:18.957" v="304" actId="14100"/>
+        <pc:sldMkLst>
+          <pc:docMk/>
+          <pc:sldMk cId="532555148" sldId="274"/>
+        </pc:sldMkLst>
+        <pc:spChg chg="del">
+          <ac:chgData name="Hartman, Rosemary@DWR" userId="984f44d5-4180-46ad-9b77-e367b17d9727" providerId="ADAL" clId="{9D7DB16A-EAE9-460C-999F-5786EC138850}" dt="2019-09-10T22:03:57.268" v="287" actId="478"/>
+          <ac:spMkLst>
+            <pc:docMk/>
+            <pc:sldMk cId="532555148" sldId="274"/>
+            <ac:spMk id="2" creationId="{9684B250-0696-449F-B9C0-D5D3CDC312FF}"/>
+          </ac:spMkLst>
+        </pc:spChg>
+        <pc:spChg chg="del">
+          <ac:chgData name="Hartman, Rosemary@DWR" userId="984f44d5-4180-46ad-9b77-e367b17d9727" providerId="ADAL" clId="{9D7DB16A-EAE9-460C-999F-5786EC138850}" dt="2019-09-10T22:03:52.989" v="285" actId="478"/>
+          <ac:spMkLst>
+            <pc:docMk/>
+            <pc:sldMk cId="532555148" sldId="274"/>
+            <ac:spMk id="3" creationId="{61179B21-AFC1-4EF2-A5C6-8A63DE3DE438}"/>
+          </ac:spMkLst>
+        </pc:spChg>
+        <pc:spChg chg="add del mod">
+          <ac:chgData name="Hartman, Rosemary@DWR" userId="984f44d5-4180-46ad-9b77-e367b17d9727" providerId="ADAL" clId="{9D7DB16A-EAE9-460C-999F-5786EC138850}" dt="2019-09-10T22:03:55.107" v="286" actId="478"/>
+          <ac:spMkLst>
+            <pc:docMk/>
+            <pc:sldMk cId="532555148" sldId="274"/>
+            <ac:spMk id="5" creationId="{ABD080E1-5BC4-42C0-8103-811201C616C0}"/>
+          </ac:spMkLst>
+        </pc:spChg>
+        <pc:spChg chg="add del mod">
+          <ac:chgData name="Hartman, Rosemary@DWR" userId="984f44d5-4180-46ad-9b77-e367b17d9727" providerId="ADAL" clId="{9D7DB16A-EAE9-460C-999F-5786EC138850}" dt="2019-09-10T22:03:59.169" v="288" actId="478"/>
+          <ac:spMkLst>
+            <pc:docMk/>
+            <pc:sldMk cId="532555148" sldId="274"/>
+            <ac:spMk id="8" creationId="{80616322-E254-45C8-B817-22720A8E593E}"/>
+          </ac:spMkLst>
+        </pc:spChg>
+        <pc:spChg chg="mod">
+          <ac:chgData name="Hartman, Rosemary@DWR" userId="984f44d5-4180-46ad-9b77-e367b17d9727" providerId="ADAL" clId="{9D7DB16A-EAE9-460C-999F-5786EC138850}" dt="2019-09-10T22:42:18.957" v="304" actId="14100"/>
+          <ac:spMkLst>
+            <pc:docMk/>
+            <pc:sldMk cId="532555148" sldId="274"/>
+            <ac:spMk id="17" creationId="{B35B0FF3-7DCB-462D-94DF-242B37C55B06}"/>
+          </ac:spMkLst>
+        </pc:spChg>
+        <pc:spChg chg="add mod">
+          <ac:chgData name="Hartman, Rosemary@DWR" userId="984f44d5-4180-46ad-9b77-e367b17d9727" providerId="ADAL" clId="{9D7DB16A-EAE9-460C-999F-5786EC138850}" dt="2019-09-10T22:04:06.126" v="293" actId="20577"/>
+          <ac:spMkLst>
+            <pc:docMk/>
+            <pc:sldMk cId="532555148" sldId="274"/>
+            <ac:spMk id="18" creationId="{4C602100-4414-42BE-8791-672767ADEBA7}"/>
+          </ac:spMkLst>
+        </pc:spChg>
+        <pc:spChg chg="mod">
+          <ac:chgData name="Hartman, Rosemary@DWR" userId="984f44d5-4180-46ad-9b77-e367b17d9727" providerId="ADAL" clId="{9D7DB16A-EAE9-460C-999F-5786EC138850}" dt="2019-09-10T22:41:55.810" v="299" actId="14100"/>
+          <ac:spMkLst>
+            <pc:docMk/>
+            <pc:sldMk cId="532555148" sldId="274"/>
+            <ac:spMk id="19" creationId="{631971A2-2C09-49B3-A05C-0CEA9F0B29EE}"/>
+          </ac:spMkLst>
+        </pc:spChg>
+        <pc:spChg chg="add">
+          <ac:chgData name="Hartman, Rosemary@DWR" userId="984f44d5-4180-46ad-9b77-e367b17d9727" providerId="ADAL" clId="{9D7DB16A-EAE9-460C-999F-5786EC138850}" dt="2019-09-10T22:04:02.171" v="289"/>
+          <ac:spMkLst>
+            <pc:docMk/>
+            <pc:sldMk cId="532555148" sldId="274"/>
+            <ac:spMk id="20" creationId="{EFE3599B-82CA-478B-BE6F-B13B54FFA065}"/>
+          </ac:spMkLst>
+        </pc:spChg>
+        <pc:spChg chg="mod">
+          <ac:chgData name="Hartman, Rosemary@DWR" userId="984f44d5-4180-46ad-9b77-e367b17d9727" providerId="ADAL" clId="{9D7DB16A-EAE9-460C-999F-5786EC138850}" dt="2019-09-10T22:42:18.957" v="304" actId="14100"/>
+          <ac:spMkLst>
+            <pc:docMk/>
+            <pc:sldMk cId="532555148" sldId="274"/>
+            <ac:spMk id="23" creationId="{31C28EC2-DE99-4E8A-B90C-42E6C012A330}"/>
+          </ac:spMkLst>
+        </pc:spChg>
+        <pc:picChg chg="mod">
+          <ac:chgData name="Hartman, Rosemary@DWR" userId="984f44d5-4180-46ad-9b77-e367b17d9727" providerId="ADAL" clId="{9D7DB16A-EAE9-460C-999F-5786EC138850}" dt="2019-09-10T22:41:53.082" v="298" actId="14100"/>
+          <ac:picMkLst>
+            <pc:docMk/>
+            <pc:sldMk cId="532555148" sldId="274"/>
+            <ac:picMk id="7" creationId="{8F8B8967-20D8-42EC-8E0F-B1A9304698CE}"/>
+          </ac:picMkLst>
+        </pc:picChg>
+        <pc:picChg chg="mod">
+          <ac:chgData name="Hartman, Rosemary@DWR" userId="984f44d5-4180-46ad-9b77-e367b17d9727" providerId="ADAL" clId="{9D7DB16A-EAE9-460C-999F-5786EC138850}" dt="2019-09-10T22:41:50.937" v="297" actId="1076"/>
+          <ac:picMkLst>
+            <pc:docMk/>
+            <pc:sldMk cId="532555148" sldId="274"/>
+            <ac:picMk id="21" creationId="{C227C36E-F30B-49CF-ADB4-3765AC0582CF}"/>
+          </ac:picMkLst>
+        </pc:picChg>
+        <pc:picChg chg="mod">
+          <ac:chgData name="Hartman, Rosemary@DWR" userId="984f44d5-4180-46ad-9b77-e367b17d9727" providerId="ADAL" clId="{9D7DB16A-EAE9-460C-999F-5786EC138850}" dt="2019-09-10T22:42:02.177" v="302" actId="14100"/>
+          <ac:picMkLst>
+            <pc:docMk/>
+            <pc:sldMk cId="532555148" sldId="274"/>
+            <ac:picMk id="22" creationId="{111A6A54-7170-4BAD-856C-DAAFFFAE94E1}"/>
+          </ac:picMkLst>
+        </pc:picChg>
+        <pc:picChg chg="mod">
+          <ac:chgData name="Hartman, Rosemary@DWR" userId="984f44d5-4180-46ad-9b77-e367b17d9727" providerId="ADAL" clId="{9D7DB16A-EAE9-460C-999F-5786EC138850}" dt="2019-09-10T22:41:59.561" v="301" actId="14100"/>
+          <ac:picMkLst>
+            <pc:docMk/>
+            <pc:sldMk cId="532555148" sldId="274"/>
+            <ac:picMk id="27" creationId="{0A3FC9E4-75DF-4ACB-BAB4-62F86B1B02E9}"/>
+          </ac:picMkLst>
+        </pc:picChg>
+      </pc:sldChg>
+      <pc:sldChg chg="addSp delSp modSp">
+        <pc:chgData name="Hartman, Rosemary@DWR" userId="984f44d5-4180-46ad-9b77-e367b17d9727" providerId="ADAL" clId="{9D7DB16A-EAE9-460C-999F-5786EC138850}" dt="2019-09-10T22:50:35.537" v="607" actId="1076"/>
+        <pc:sldMkLst>
+          <pc:docMk/>
+          <pc:sldMk cId="159825955" sldId="277"/>
+        </pc:sldMkLst>
+        <pc:spChg chg="del">
+          <ac:chgData name="Hartman, Rosemary@DWR" userId="984f44d5-4180-46ad-9b77-e367b17d9727" providerId="ADAL" clId="{9D7DB16A-EAE9-460C-999F-5786EC138850}" dt="2019-09-10T22:42:31.680" v="305" actId="478"/>
+          <ac:spMkLst>
+            <pc:docMk/>
+            <pc:sldMk cId="159825955" sldId="277"/>
+            <ac:spMk id="2" creationId="{9684B250-0696-449F-B9C0-D5D3CDC312FF}"/>
+          </ac:spMkLst>
+        </pc:spChg>
+        <pc:spChg chg="del">
+          <ac:chgData name="Hartman, Rosemary@DWR" userId="984f44d5-4180-46ad-9b77-e367b17d9727" providerId="ADAL" clId="{9D7DB16A-EAE9-460C-999F-5786EC138850}" dt="2019-09-10T22:42:31.680" v="305" actId="478"/>
+          <ac:spMkLst>
+            <pc:docMk/>
+            <pc:sldMk cId="159825955" sldId="277"/>
+            <ac:spMk id="3" creationId="{61179B21-AFC1-4EF2-A5C6-8A63DE3DE438}"/>
+          </ac:spMkLst>
+        </pc:spChg>
+        <pc:spChg chg="add del mod">
+          <ac:chgData name="Hartman, Rosemary@DWR" userId="984f44d5-4180-46ad-9b77-e367b17d9727" providerId="ADAL" clId="{9D7DB16A-EAE9-460C-999F-5786EC138850}" dt="2019-09-10T22:42:33.956" v="306" actId="478"/>
+          <ac:spMkLst>
+            <pc:docMk/>
+            <pc:sldMk cId="159825955" sldId="277"/>
+            <ac:spMk id="6" creationId="{869007CC-B5C7-43AA-881A-97A9DF4B2DF5}"/>
+          </ac:spMkLst>
+        </pc:spChg>
+        <pc:spChg chg="add del mod">
+          <ac:chgData name="Hartman, Rosemary@DWR" userId="984f44d5-4180-46ad-9b77-e367b17d9727" providerId="ADAL" clId="{9D7DB16A-EAE9-460C-999F-5786EC138850}" dt="2019-09-10T22:42:37.305" v="307" actId="478"/>
+          <ac:spMkLst>
+            <pc:docMk/>
+            <pc:sldMk cId="159825955" sldId="277"/>
+            <ac:spMk id="8" creationId="{C757D13C-7CE6-4859-81FA-3B578C965B10}"/>
+          </ac:spMkLst>
+        </pc:spChg>
+        <pc:spChg chg="mod">
+          <ac:chgData name="Hartman, Rosemary@DWR" userId="984f44d5-4180-46ad-9b77-e367b17d9727" providerId="ADAL" clId="{9D7DB16A-EAE9-460C-999F-5786EC138850}" dt="2019-09-10T22:44:25.898" v="348" actId="1076"/>
+          <ac:spMkLst>
+            <pc:docMk/>
+            <pc:sldMk cId="159825955" sldId="277"/>
+            <ac:spMk id="14" creationId="{3CAB71F2-2C20-4E95-BFE4-BF0B34E676C4}"/>
+          </ac:spMkLst>
+        </pc:spChg>
+        <pc:spChg chg="mod">
+          <ac:chgData name="Hartman, Rosemary@DWR" userId="984f44d5-4180-46ad-9b77-e367b17d9727" providerId="ADAL" clId="{9D7DB16A-EAE9-460C-999F-5786EC138850}" dt="2019-09-10T22:44:25.898" v="348" actId="1076"/>
+          <ac:spMkLst>
+            <pc:docMk/>
+            <pc:sldMk cId="159825955" sldId="277"/>
+            <ac:spMk id="16" creationId="{FF0CF2F7-30B1-4759-809C-8D81FBE71BBC}"/>
+          </ac:spMkLst>
+        </pc:spChg>
+        <pc:spChg chg="mod">
+          <ac:chgData name="Hartman, Rosemary@DWR" userId="984f44d5-4180-46ad-9b77-e367b17d9727" providerId="ADAL" clId="{9D7DB16A-EAE9-460C-999F-5786EC138850}" dt="2019-09-10T22:44:35.553" v="350" actId="1076"/>
+          <ac:spMkLst>
+            <pc:docMk/>
+            <pc:sldMk cId="159825955" sldId="277"/>
+            <ac:spMk id="17" creationId="{E6F55432-DFCA-4749-A90B-06CC23BF13B7}"/>
+          </ac:spMkLst>
+        </pc:spChg>
+        <pc:spChg chg="mod">
+          <ac:chgData name="Hartman, Rosemary@DWR" userId="984f44d5-4180-46ad-9b77-e367b17d9727" providerId="ADAL" clId="{9D7DB16A-EAE9-460C-999F-5786EC138850}" dt="2019-09-10T22:44:25.898" v="348" actId="1076"/>
+          <ac:spMkLst>
+            <pc:docMk/>
+            <pc:sldMk cId="159825955" sldId="277"/>
+            <ac:spMk id="18" creationId="{29F0BB81-2DAA-43B4-ABCC-301F4603C65D}"/>
+          </ac:spMkLst>
+        </pc:spChg>
+        <pc:spChg chg="add mod">
+          <ac:chgData name="Hartman, Rosemary@DWR" userId="984f44d5-4180-46ad-9b77-e367b17d9727" providerId="ADAL" clId="{9D7DB16A-EAE9-460C-999F-5786EC138850}" dt="2019-09-10T22:42:51.666" v="321" actId="20577"/>
+          <ac:spMkLst>
+            <pc:docMk/>
+            <pc:sldMk cId="159825955" sldId="277"/>
+            <ac:spMk id="19" creationId="{04BF57BC-6BB5-4635-A92E-6FB734DBC818}"/>
+          </ac:spMkLst>
+        </pc:spChg>
+        <pc:spChg chg="add">
+          <ac:chgData name="Hartman, Rosemary@DWR" userId="984f44d5-4180-46ad-9b77-e367b17d9727" providerId="ADAL" clId="{9D7DB16A-EAE9-460C-999F-5786EC138850}" dt="2019-09-10T22:42:47.518" v="308"/>
+          <ac:spMkLst>
+            <pc:docMk/>
+            <pc:sldMk cId="159825955" sldId="277"/>
+            <ac:spMk id="20" creationId="{DF6E8E3A-B2E7-470B-80B1-D25504F42C8D}"/>
+          </ac:spMkLst>
+        </pc:spChg>
+        <pc:spChg chg="mod">
+          <ac:chgData name="Hartman, Rosemary@DWR" userId="984f44d5-4180-46ad-9b77-e367b17d9727" providerId="ADAL" clId="{9D7DB16A-EAE9-460C-999F-5786EC138850}" dt="2019-09-10T22:44:35.553" v="350" actId="1076"/>
+          <ac:spMkLst>
+            <pc:docMk/>
+            <pc:sldMk cId="159825955" sldId="277"/>
+            <ac:spMk id="21" creationId="{A599362B-DC9A-4DB7-AD33-45B021A8E64C}"/>
+          </ac:spMkLst>
+        </pc:spChg>
+        <pc:spChg chg="mod">
+          <ac:chgData name="Hartman, Rosemary@DWR" userId="984f44d5-4180-46ad-9b77-e367b17d9727" providerId="ADAL" clId="{9D7DB16A-EAE9-460C-999F-5786EC138850}" dt="2019-09-10T22:44:35.553" v="350" actId="1076"/>
+          <ac:spMkLst>
+            <pc:docMk/>
+            <pc:sldMk cId="159825955" sldId="277"/>
+            <ac:spMk id="24" creationId="{706D9CC6-7F14-4DCB-B405-D72182187FBB}"/>
+          </ac:spMkLst>
+        </pc:spChg>
+        <pc:picChg chg="mod">
+          <ac:chgData name="Hartman, Rosemary@DWR" userId="984f44d5-4180-46ad-9b77-e367b17d9727" providerId="ADAL" clId="{9D7DB16A-EAE9-460C-999F-5786EC138850}" dt="2019-09-10T22:44:30.226" v="349" actId="1076"/>
+          <ac:picMkLst>
+            <pc:docMk/>
+            <pc:sldMk cId="159825955" sldId="277"/>
+            <ac:picMk id="5" creationId="{2FDF046F-36B1-4A1D-B57A-36C703D33B4B}"/>
+          </ac:picMkLst>
+        </pc:picChg>
+        <pc:picChg chg="add del mod">
+          <ac:chgData name="Hartman, Rosemary@DWR" userId="984f44d5-4180-46ad-9b77-e367b17d9727" providerId="ADAL" clId="{9D7DB16A-EAE9-460C-999F-5786EC138850}" dt="2019-09-10T22:45:50.498" v="357" actId="478"/>
+          <ac:picMkLst>
+            <pc:docMk/>
+            <pc:sldMk cId="159825955" sldId="277"/>
+            <ac:picMk id="10" creationId="{603F38DA-EBF8-42EC-9D87-019F46A0593C}"/>
+          </ac:picMkLst>
+        </pc:picChg>
+        <pc:picChg chg="add mod">
+          <ac:chgData name="Hartman, Rosemary@DWR" userId="984f44d5-4180-46ad-9b77-e367b17d9727" providerId="ADAL" clId="{9D7DB16A-EAE9-460C-999F-5786EC138850}" dt="2019-09-10T22:50:35.537" v="607" actId="1076"/>
+          <ac:picMkLst>
+            <pc:docMk/>
+            <pc:sldMk cId="159825955" sldId="277"/>
+            <ac:picMk id="12" creationId="{8DC26D53-D548-42A8-8AB8-E2D34C667F2D}"/>
+          </ac:picMkLst>
+        </pc:picChg>
+        <pc:picChg chg="mod">
+          <ac:chgData name="Hartman, Rosemary@DWR" userId="984f44d5-4180-46ad-9b77-e367b17d9727" providerId="ADAL" clId="{9D7DB16A-EAE9-460C-999F-5786EC138850}" dt="2019-09-10T22:45:19.976" v="355" actId="1076"/>
+          <ac:picMkLst>
+            <pc:docMk/>
+            <pc:sldMk cId="159825955" sldId="277"/>
+            <ac:picMk id="22" creationId="{B368484B-73D2-464C-9EBA-6AB31F0FEFA0}"/>
+          </ac:picMkLst>
+        </pc:picChg>
+        <pc:picChg chg="mod">
+          <ac:chgData name="Hartman, Rosemary@DWR" userId="984f44d5-4180-46ad-9b77-e367b17d9727" providerId="ADAL" clId="{9D7DB16A-EAE9-460C-999F-5786EC138850}" dt="2019-09-10T22:44:25.898" v="348" actId="1076"/>
+          <ac:picMkLst>
+            <pc:docMk/>
+            <pc:sldMk cId="159825955" sldId="277"/>
+            <ac:picMk id="25" creationId="{BD944F97-CD84-4114-9F46-071C194ED80C}"/>
+          </ac:picMkLst>
+        </pc:picChg>
+        <pc:picChg chg="del mod">
+          <ac:chgData name="Hartman, Rosemary@DWR" userId="984f44d5-4180-46ad-9b77-e367b17d9727" providerId="ADAL" clId="{9D7DB16A-EAE9-460C-999F-5786EC138850}" dt="2019-09-10T22:45:03.314" v="352" actId="478"/>
+          <ac:picMkLst>
+            <pc:docMk/>
+            <pc:sldMk cId="159825955" sldId="277"/>
+            <ac:picMk id="26" creationId="{96423E21-8229-4C54-96FC-7632C92550A1}"/>
+          </ac:picMkLst>
+        </pc:picChg>
+        <pc:picChg chg="mod">
+          <ac:chgData name="Hartman, Rosemary@DWR" userId="984f44d5-4180-46ad-9b77-e367b17d9727" providerId="ADAL" clId="{9D7DB16A-EAE9-460C-999F-5786EC138850}" dt="2019-09-10T22:44:39.753" v="351" actId="1076"/>
+          <ac:picMkLst>
+            <pc:docMk/>
+            <pc:sldMk cId="159825955" sldId="277"/>
+            <ac:picMk id="28" creationId="{AAE4D102-3A88-4232-9826-92273C624518}"/>
+          </ac:picMkLst>
+        </pc:picChg>
+      </pc:sldChg>
+    </pc:docChg>
+  </pc:docChgLst>
   <pc:docChgLst>
     <pc:chgData name="Hartman, Rosemary@DWR" userId="984f44d5-4180-46ad-9b77-e367b17d9727" providerId="ADAL" clId="{4845DDA0-C5E2-40D8-B655-728FCC7913AF}"/>
     <pc:docChg chg="custSel addSld delSld modSld">
@@ -310,84 +1200,6 @@
             <pc:docMk/>
             <pc:sldMk cId="532555148" sldId="274"/>
             <ac:picMk id="29" creationId="{5024863E-DDD2-4BED-A1AD-AFD03FD2353B}"/>
-          </ac:picMkLst>
-        </pc:picChg>
-      </pc:sldChg>
-      <pc:sldChg chg="addSp delSp modSp del modTransition">
-        <pc:chgData name="Hartman, Rosemary@DWR" userId="984f44d5-4180-46ad-9b77-e367b17d9727" providerId="ADAL" clId="{4845DDA0-C5E2-40D8-B655-728FCC7913AF}" dt="2019-09-05T15:08:47.736" v="164" actId="2696"/>
-        <pc:sldMkLst>
-          <pc:docMk/>
-          <pc:sldMk cId="3719315527" sldId="275"/>
-        </pc:sldMkLst>
-        <pc:spChg chg="del">
-          <ac:chgData name="Hartman, Rosemary@DWR" userId="984f44d5-4180-46ad-9b77-e367b17d9727" providerId="ADAL" clId="{4845DDA0-C5E2-40D8-B655-728FCC7913AF}" dt="2019-09-05T15:02:21.607" v="72" actId="478"/>
-          <ac:spMkLst>
-            <pc:docMk/>
-            <pc:sldMk cId="3719315527" sldId="275"/>
-            <ac:spMk id="5" creationId="{1A867731-274C-4C6F-99D1-3057898843C6}"/>
-          </ac:spMkLst>
-        </pc:spChg>
-        <pc:spChg chg="mod">
-          <ac:chgData name="Hartman, Rosemary@DWR" userId="984f44d5-4180-46ad-9b77-e367b17d9727" providerId="ADAL" clId="{4845DDA0-C5E2-40D8-B655-728FCC7913AF}" dt="2019-09-05T15:05:44.950" v="135" actId="1076"/>
-          <ac:spMkLst>
-            <pc:docMk/>
-            <pc:sldMk cId="3719315527" sldId="275"/>
-            <ac:spMk id="18" creationId="{29F0BB81-2DAA-43B4-ABCC-301F4603C65D}"/>
-          </ac:spMkLst>
-        </pc:spChg>
-        <pc:spChg chg="mod">
-          <ac:chgData name="Hartman, Rosemary@DWR" userId="984f44d5-4180-46ad-9b77-e367b17d9727" providerId="ADAL" clId="{4845DDA0-C5E2-40D8-B655-728FCC7913AF}" dt="2019-09-05T15:05:22.502" v="110" actId="1076"/>
-          <ac:spMkLst>
-            <pc:docMk/>
-            <pc:sldMk cId="3719315527" sldId="275"/>
-            <ac:spMk id="19" creationId="{631971A2-2C09-49B3-A05C-0CEA9F0B29EE}"/>
-          </ac:spMkLst>
-        </pc:spChg>
-        <pc:picChg chg="add mod">
-          <ac:chgData name="Hartman, Rosemary@DWR" userId="984f44d5-4180-46ad-9b77-e367b17d9727" providerId="ADAL" clId="{4845DDA0-C5E2-40D8-B655-728FCC7913AF}" dt="2019-09-05T15:05:05.032" v="77" actId="1076"/>
-          <ac:picMkLst>
-            <pc:docMk/>
-            <pc:sldMk cId="3719315527" sldId="275"/>
-            <ac:picMk id="4" creationId="{6B15B7B6-A21E-4751-9E04-FDF837C60B30}"/>
-          </ac:picMkLst>
-        </pc:picChg>
-        <pc:picChg chg="del">
-          <ac:chgData name="Hartman, Rosemary@DWR" userId="984f44d5-4180-46ad-9b77-e367b17d9727" providerId="ADAL" clId="{4845DDA0-C5E2-40D8-B655-728FCC7913AF}" dt="2019-09-05T15:04:59.118" v="73" actId="478"/>
-          <ac:picMkLst>
-            <pc:docMk/>
-            <pc:sldMk cId="3719315527" sldId="275"/>
-            <ac:picMk id="8" creationId="{2B502269-0256-4E36-8C87-6A4A32270850}"/>
-          </ac:picMkLst>
-        </pc:picChg>
-        <pc:picChg chg="del">
-          <ac:chgData name="Hartman, Rosemary@DWR" userId="984f44d5-4180-46ad-9b77-e367b17d9727" providerId="ADAL" clId="{4845DDA0-C5E2-40D8-B655-728FCC7913AF}" dt="2019-09-05T15:02:21.607" v="72" actId="478"/>
-          <ac:picMkLst>
-            <pc:docMk/>
-            <pc:sldMk cId="3719315527" sldId="275"/>
-            <ac:picMk id="11" creationId="{69506AC6-4372-489D-8C09-7622F99900B0}"/>
-          </ac:picMkLst>
-        </pc:picChg>
-      </pc:sldChg>
-      <pc:sldChg chg="delSp del">
-        <pc:chgData name="Hartman, Rosemary@DWR" userId="984f44d5-4180-46ad-9b77-e367b17d9727" providerId="ADAL" clId="{4845DDA0-C5E2-40D8-B655-728FCC7913AF}" dt="2019-09-05T15:06:57.372" v="157" actId="2696"/>
-        <pc:sldMkLst>
-          <pc:docMk/>
-          <pc:sldMk cId="1692531689" sldId="276"/>
-        </pc:sldMkLst>
-        <pc:spChg chg="del">
-          <ac:chgData name="Hartman, Rosemary@DWR" userId="984f44d5-4180-46ad-9b77-e367b17d9727" providerId="ADAL" clId="{4845DDA0-C5E2-40D8-B655-728FCC7913AF}" dt="2019-09-05T15:01:26.671" v="71" actId="478"/>
-          <ac:spMkLst>
-            <pc:docMk/>
-            <pc:sldMk cId="1692531689" sldId="276"/>
-            <ac:spMk id="16" creationId="{F3FB40A6-BE3D-46A6-BBAC-733D3485A1E1}"/>
-          </ac:spMkLst>
-        </pc:spChg>
-        <pc:picChg chg="del">
-          <ac:chgData name="Hartman, Rosemary@DWR" userId="984f44d5-4180-46ad-9b77-e367b17d9727" providerId="ADAL" clId="{4845DDA0-C5E2-40D8-B655-728FCC7913AF}" dt="2019-09-05T15:01:24.024" v="70" actId="478"/>
-          <ac:picMkLst>
-            <pc:docMk/>
-            <pc:sldMk cId="1692531689" sldId="276"/>
-            <ac:picMk id="12" creationId="{F0CD00CF-E611-4646-BCBC-8E801160B50D}"/>
           </ac:picMkLst>
         </pc:picChg>
       </pc:sldChg>
@@ -574,7 +1386,7 @@
         <p:spPr>
           <a:xfrm>
             <a:off x="0" y="0"/>
-            <a:ext cx="2971800" cy="458788"/>
+            <a:ext cx="3962400" cy="344091"/>
           </a:xfrm>
           <a:prstGeom prst="rect">
             <a:avLst/>
@@ -604,8 +1416,8 @@
         </p:nvSpPr>
         <p:spPr>
           <a:xfrm>
-            <a:off x="3884613" y="0"/>
-            <a:ext cx="2971800" cy="458788"/>
+            <a:off x="5179484" y="0"/>
+            <a:ext cx="3962400" cy="344091"/>
           </a:xfrm>
           <a:prstGeom prst="rect">
             <a:avLst/>
@@ -621,7 +1433,7 @@
           <a:p>
             <a:fld id="{75B52536-CDBD-46C2-AC86-CFC58E3F894A}" type="datetimeFigureOut">
               <a:rPr lang="en-US" smtClean="0"/>
-              <a:t>9/5/2019</a:t>
+              <a:t>9/10/2019</a:t>
             </a:fld>
             <a:endParaRPr lang="en-US"/>
           </a:p>
@@ -639,8 +1451,8 @@
         </p:nvSpPr>
         <p:spPr>
           <a:xfrm>
-            <a:off x="685800" y="1143000"/>
-            <a:ext cx="5486400" cy="3086100"/>
+            <a:off x="3074988" y="857250"/>
+            <a:ext cx="2994025" cy="2314575"/>
           </a:xfrm>
           <a:prstGeom prst="rect">
             <a:avLst/>
@@ -672,8 +1484,8 @@
         </p:nvSpPr>
         <p:spPr>
           <a:xfrm>
-            <a:off x="685800" y="4400550"/>
-            <a:ext cx="5486400" cy="3600450"/>
+            <a:off x="914400" y="3300412"/>
+            <a:ext cx="7315200" cy="2700338"/>
           </a:xfrm>
           <a:prstGeom prst="rect">
             <a:avLst/>
@@ -731,8 +1543,8 @@
         </p:nvSpPr>
         <p:spPr>
           <a:xfrm>
-            <a:off x="0" y="8685213"/>
-            <a:ext cx="2971800" cy="458787"/>
+            <a:off x="0" y="6513910"/>
+            <a:ext cx="3962400" cy="344090"/>
           </a:xfrm>
           <a:prstGeom prst="rect">
             <a:avLst/>
@@ -762,8 +1574,8 @@
         </p:nvSpPr>
         <p:spPr>
           <a:xfrm>
-            <a:off x="3884613" y="8685213"/>
-            <a:ext cx="2971800" cy="458787"/>
+            <a:off x="5179484" y="6513910"/>
+            <a:ext cx="3962400" cy="344090"/>
           </a:xfrm>
           <a:prstGeom prst="rect">
             <a:avLst/>
@@ -794,8 +1606,8 @@
   </p:cSld>
   <p:clrMap bg1="lt1" tx1="dk1" bg2="lt2" tx2="dk2" accent1="accent1" accent2="accent2" accent3="accent3" accent4="accent4" accent5="accent5" accent6="accent6" hlink="hlink" folHlink="folHlink"/>
   <p:notesStyle>
-    <a:lvl1pPr marL="0" algn="l" defTabSz="914400" rtl="0" eaLnBrk="1" latinLnBrk="0" hangingPunct="1">
-      <a:defRPr sz="1200" kern="1200">
+    <a:lvl1pPr marL="0" algn="l" defTabSz="641909" rtl="0" eaLnBrk="1" latinLnBrk="0" hangingPunct="1">
+      <a:defRPr sz="842" kern="1200">
         <a:solidFill>
           <a:schemeClr val="tx1"/>
         </a:solidFill>
@@ -804,8 +1616,8 @@
         <a:cs typeface="+mn-cs"/>
       </a:defRPr>
     </a:lvl1pPr>
-    <a:lvl2pPr marL="457200" algn="l" defTabSz="914400" rtl="0" eaLnBrk="1" latinLnBrk="0" hangingPunct="1">
-      <a:defRPr sz="1200" kern="1200">
+    <a:lvl2pPr marL="320954" algn="l" defTabSz="641909" rtl="0" eaLnBrk="1" latinLnBrk="0" hangingPunct="1">
+      <a:defRPr sz="842" kern="1200">
         <a:solidFill>
           <a:schemeClr val="tx1"/>
         </a:solidFill>
@@ -814,8 +1626,8 @@
         <a:cs typeface="+mn-cs"/>
       </a:defRPr>
     </a:lvl2pPr>
-    <a:lvl3pPr marL="914400" algn="l" defTabSz="914400" rtl="0" eaLnBrk="1" latinLnBrk="0" hangingPunct="1">
-      <a:defRPr sz="1200" kern="1200">
+    <a:lvl3pPr marL="641909" algn="l" defTabSz="641909" rtl="0" eaLnBrk="1" latinLnBrk="0" hangingPunct="1">
+      <a:defRPr sz="842" kern="1200">
         <a:solidFill>
           <a:schemeClr val="tx1"/>
         </a:solidFill>
@@ -824,8 +1636,8 @@
         <a:cs typeface="+mn-cs"/>
       </a:defRPr>
     </a:lvl3pPr>
-    <a:lvl4pPr marL="1371600" algn="l" defTabSz="914400" rtl="0" eaLnBrk="1" latinLnBrk="0" hangingPunct="1">
-      <a:defRPr sz="1200" kern="1200">
+    <a:lvl4pPr marL="962863" algn="l" defTabSz="641909" rtl="0" eaLnBrk="1" latinLnBrk="0" hangingPunct="1">
+      <a:defRPr sz="842" kern="1200">
         <a:solidFill>
           <a:schemeClr val="tx1"/>
         </a:solidFill>
@@ -834,8 +1646,8 @@
         <a:cs typeface="+mn-cs"/>
       </a:defRPr>
     </a:lvl4pPr>
-    <a:lvl5pPr marL="1828800" algn="l" defTabSz="914400" rtl="0" eaLnBrk="1" latinLnBrk="0" hangingPunct="1">
-      <a:defRPr sz="1200" kern="1200">
+    <a:lvl5pPr marL="1283818" algn="l" defTabSz="641909" rtl="0" eaLnBrk="1" latinLnBrk="0" hangingPunct="1">
+      <a:defRPr sz="842" kern="1200">
         <a:solidFill>
           <a:schemeClr val="tx1"/>
         </a:solidFill>
@@ -844,8 +1656,8 @@
         <a:cs typeface="+mn-cs"/>
       </a:defRPr>
     </a:lvl5pPr>
-    <a:lvl6pPr marL="2286000" algn="l" defTabSz="914400" rtl="0" eaLnBrk="1" latinLnBrk="0" hangingPunct="1">
-      <a:defRPr sz="1200" kern="1200">
+    <a:lvl6pPr marL="1604772" algn="l" defTabSz="641909" rtl="0" eaLnBrk="1" latinLnBrk="0" hangingPunct="1">
+      <a:defRPr sz="842" kern="1200">
         <a:solidFill>
           <a:schemeClr val="tx1"/>
         </a:solidFill>
@@ -854,8 +1666,8 @@
         <a:cs typeface="+mn-cs"/>
       </a:defRPr>
     </a:lvl6pPr>
-    <a:lvl7pPr marL="2743200" algn="l" defTabSz="914400" rtl="0" eaLnBrk="1" latinLnBrk="0" hangingPunct="1">
-      <a:defRPr sz="1200" kern="1200">
+    <a:lvl7pPr marL="1925726" algn="l" defTabSz="641909" rtl="0" eaLnBrk="1" latinLnBrk="0" hangingPunct="1">
+      <a:defRPr sz="842" kern="1200">
         <a:solidFill>
           <a:schemeClr val="tx1"/>
         </a:solidFill>
@@ -864,8 +1676,8 @@
         <a:cs typeface="+mn-cs"/>
       </a:defRPr>
     </a:lvl7pPr>
-    <a:lvl8pPr marL="3200400" algn="l" defTabSz="914400" rtl="0" eaLnBrk="1" latinLnBrk="0" hangingPunct="1">
-      <a:defRPr sz="1200" kern="1200">
+    <a:lvl8pPr marL="2246681" algn="l" defTabSz="641909" rtl="0" eaLnBrk="1" latinLnBrk="0" hangingPunct="1">
+      <a:defRPr sz="842" kern="1200">
         <a:solidFill>
           <a:schemeClr val="tx1"/>
         </a:solidFill>
@@ -874,8 +1686,8 @@
         <a:cs typeface="+mn-cs"/>
       </a:defRPr>
     </a:lvl8pPr>
-    <a:lvl9pPr marL="3657600" algn="l" defTabSz="914400" rtl="0" eaLnBrk="1" latinLnBrk="0" hangingPunct="1">
-      <a:defRPr sz="1200" kern="1200">
+    <a:lvl9pPr marL="2567635" algn="l" defTabSz="641909" rtl="0" eaLnBrk="1" latinLnBrk="0" hangingPunct="1">
+      <a:defRPr sz="842" kern="1200">
         <a:solidFill>
           <a:schemeClr val="tx1"/>
         </a:solidFill>
@@ -915,7 +1727,12 @@
             <p:ph type="sldImg"/>
           </p:nvPr>
         </p:nvSpPr>
-        <p:spPr/>
+        <p:spPr>
+          <a:xfrm>
+            <a:off x="3074988" y="857250"/>
+            <a:ext cx="2994025" cy="2314575"/>
+          </a:xfrm>
+        </p:spPr>
       </p:sp>
       <p:sp>
         <p:nvSpPr>
@@ -1008,7 +1825,12 @@
             <p:ph type="sldImg"/>
           </p:nvPr>
         </p:nvSpPr>
-        <p:spPr/>
+        <p:spPr>
+          <a:xfrm>
+            <a:off x="3074988" y="857250"/>
+            <a:ext cx="2994025" cy="2314575"/>
+          </a:xfrm>
+        </p:spPr>
       </p:sp>
       <p:sp>
         <p:nvSpPr>
@@ -1092,7 +1914,12 @@
             <p:ph type="sldImg"/>
           </p:nvPr>
         </p:nvSpPr>
-        <p:spPr/>
+        <p:spPr>
+          <a:xfrm>
+            <a:off x="3074988" y="857250"/>
+            <a:ext cx="2994025" cy="2314575"/>
+          </a:xfrm>
+        </p:spPr>
       </p:sp>
       <p:sp>
         <p:nvSpPr>
@@ -1178,15 +2005,15 @@
         </p:nvSpPr>
         <p:spPr>
           <a:xfrm>
-            <a:off x="2032000" y="1496484"/>
-            <a:ext cx="12192000" cy="3183467"/>
+            <a:off x="754380" y="1272011"/>
+            <a:ext cx="8549640" cy="2705947"/>
           </a:xfrm>
         </p:spPr>
         <p:txBody>
           <a:bodyPr anchor="b"/>
           <a:lstStyle>
             <a:lvl1pPr algn="ctr">
-              <a:defRPr sz="8000"/>
+              <a:defRPr sz="6600"/>
             </a:lvl1pPr>
           </a:lstStyle>
           <a:p>
@@ -1210,8 +2037,8 @@
         </p:nvSpPr>
         <p:spPr>
           <a:xfrm>
-            <a:off x="2032000" y="4802717"/>
-            <a:ext cx="12192000" cy="2207683"/>
+            <a:off x="1257300" y="4082310"/>
+            <a:ext cx="7543800" cy="1876530"/>
           </a:xfrm>
         </p:spPr>
         <p:txBody>
@@ -1219,39 +2046,39 @@
           <a:lstStyle>
             <a:lvl1pPr marL="0" indent="0" algn="ctr">
               <a:buNone/>
-              <a:defRPr sz="3200"/>
+              <a:defRPr sz="2640"/>
             </a:lvl1pPr>
-            <a:lvl2pPr marL="609585" indent="0" algn="ctr">
-              <a:buNone/>
-              <a:defRPr sz="2667"/>
+            <a:lvl2pPr marL="502920" indent="0" algn="ctr">
+              <a:buNone/>
+              <a:defRPr sz="2200"/>
             </a:lvl2pPr>
-            <a:lvl3pPr marL="1219170" indent="0" algn="ctr">
-              <a:buNone/>
-              <a:defRPr sz="2400"/>
+            <a:lvl3pPr marL="1005840" indent="0" algn="ctr">
+              <a:buNone/>
+              <a:defRPr sz="1980"/>
             </a:lvl3pPr>
-            <a:lvl4pPr marL="1828754" indent="0" algn="ctr">
-              <a:buNone/>
-              <a:defRPr sz="2133"/>
+            <a:lvl4pPr marL="1508760" indent="0" algn="ctr">
+              <a:buNone/>
+              <a:defRPr sz="1760"/>
             </a:lvl4pPr>
-            <a:lvl5pPr marL="2438339" indent="0" algn="ctr">
-              <a:buNone/>
-              <a:defRPr sz="2133"/>
+            <a:lvl5pPr marL="2011680" indent="0" algn="ctr">
+              <a:buNone/>
+              <a:defRPr sz="1760"/>
             </a:lvl5pPr>
-            <a:lvl6pPr marL="3047924" indent="0" algn="ctr">
-              <a:buNone/>
-              <a:defRPr sz="2133"/>
+            <a:lvl6pPr marL="2514600" indent="0" algn="ctr">
+              <a:buNone/>
+              <a:defRPr sz="1760"/>
             </a:lvl6pPr>
-            <a:lvl7pPr marL="3657509" indent="0" algn="ctr">
-              <a:buNone/>
-              <a:defRPr sz="2133"/>
+            <a:lvl7pPr marL="3017520" indent="0" algn="ctr">
+              <a:buNone/>
+              <a:defRPr sz="1760"/>
             </a:lvl7pPr>
-            <a:lvl8pPr marL="4267093" indent="0" algn="ctr">
-              <a:buNone/>
-              <a:defRPr sz="2133"/>
+            <a:lvl8pPr marL="3520440" indent="0" algn="ctr">
+              <a:buNone/>
+              <a:defRPr sz="1760"/>
             </a:lvl8pPr>
-            <a:lvl9pPr marL="4876678" indent="0" algn="ctr">
-              <a:buNone/>
-              <a:defRPr sz="2133"/>
+            <a:lvl9pPr marL="4023360" indent="0" algn="ctr">
+              <a:buNone/>
+              <a:defRPr sz="1760"/>
             </a:lvl9pPr>
           </a:lstStyle>
           <a:p>
@@ -1280,7 +2107,7 @@
           <a:p>
             <a:fld id="{5B9B541C-2D23-4375-AC31-E3C7AC460E3E}" type="datetimeFigureOut">
               <a:rPr lang="en-US" smtClean="0"/>
-              <a:t>9/5/2019</a:t>
+              <a:t>9/10/2019</a:t>
             </a:fld>
             <a:endParaRPr lang="en-US"/>
           </a:p>
@@ -1331,7 +2158,7 @@
     </p:spTree>
     <p:extLst>
       <p:ext uri="{BB962C8B-B14F-4D97-AF65-F5344CB8AC3E}">
-        <p14:creationId xmlns:p14="http://schemas.microsoft.com/office/powerpoint/2010/main" val="3407532257"/>
+        <p14:creationId xmlns:p14="http://schemas.microsoft.com/office/powerpoint/2010/main" val="26216562"/>
       </p:ext>
     </p:extLst>
   </p:cSld>
@@ -1450,7 +2277,7 @@
           <a:p>
             <a:fld id="{5B9B541C-2D23-4375-AC31-E3C7AC460E3E}" type="datetimeFigureOut">
               <a:rPr lang="en-US" smtClean="0"/>
-              <a:t>9/5/2019</a:t>
+              <a:t>9/10/2019</a:t>
             </a:fld>
             <a:endParaRPr lang="en-US"/>
           </a:p>
@@ -1501,7 +2328,7 @@
     </p:spTree>
     <p:extLst>
       <p:ext uri="{BB962C8B-B14F-4D97-AF65-F5344CB8AC3E}">
-        <p14:creationId xmlns:p14="http://schemas.microsoft.com/office/powerpoint/2010/main" val="3636873801"/>
+        <p14:creationId xmlns:p14="http://schemas.microsoft.com/office/powerpoint/2010/main" val="817005506"/>
       </p:ext>
     </p:extLst>
   </p:cSld>
@@ -1540,8 +2367,8 @@
         </p:nvSpPr>
         <p:spPr>
           <a:xfrm>
-            <a:off x="11633200" y="486834"/>
-            <a:ext cx="3505200" cy="7749117"/>
+            <a:off x="7198043" y="413808"/>
+            <a:ext cx="2168843" cy="6586750"/>
           </a:xfrm>
         </p:spPr>
         <p:txBody>
@@ -1568,8 +2395,8 @@
         </p:nvSpPr>
         <p:spPr>
           <a:xfrm>
-            <a:off x="1117600" y="486834"/>
-            <a:ext cx="10312400" cy="7749117"/>
+            <a:off x="691515" y="413808"/>
+            <a:ext cx="6380798" cy="6586750"/>
           </a:xfrm>
         </p:spPr>
         <p:txBody>
@@ -1630,7 +2457,7 @@
           <a:p>
             <a:fld id="{5B9B541C-2D23-4375-AC31-E3C7AC460E3E}" type="datetimeFigureOut">
               <a:rPr lang="en-US" smtClean="0"/>
-              <a:t>9/5/2019</a:t>
+              <a:t>9/10/2019</a:t>
             </a:fld>
             <a:endParaRPr lang="en-US"/>
           </a:p>
@@ -1681,7 +2508,7 @@
     </p:spTree>
     <p:extLst>
       <p:ext uri="{BB962C8B-B14F-4D97-AF65-F5344CB8AC3E}">
-        <p14:creationId xmlns:p14="http://schemas.microsoft.com/office/powerpoint/2010/main" val="1212297644"/>
+        <p14:creationId xmlns:p14="http://schemas.microsoft.com/office/powerpoint/2010/main" val="3623502406"/>
       </p:ext>
     </p:extLst>
   </p:cSld>
@@ -1800,7 +2627,7 @@
           <a:p>
             <a:fld id="{5B9B541C-2D23-4375-AC31-E3C7AC460E3E}" type="datetimeFigureOut">
               <a:rPr lang="en-US" smtClean="0"/>
-              <a:t>9/5/2019</a:t>
+              <a:t>9/10/2019</a:t>
             </a:fld>
             <a:endParaRPr lang="en-US"/>
           </a:p>
@@ -1851,7 +2678,7 @@
     </p:spTree>
     <p:extLst>
       <p:ext uri="{BB962C8B-B14F-4D97-AF65-F5344CB8AC3E}">
-        <p14:creationId xmlns:p14="http://schemas.microsoft.com/office/powerpoint/2010/main" val="1420299407"/>
+        <p14:creationId xmlns:p14="http://schemas.microsoft.com/office/powerpoint/2010/main" val="1365942623"/>
       </p:ext>
     </p:extLst>
   </p:cSld>
@@ -1890,15 +2717,15 @@
         </p:nvSpPr>
         <p:spPr>
           <a:xfrm>
-            <a:off x="1109133" y="2279652"/>
-            <a:ext cx="14020800" cy="3803649"/>
+            <a:off x="686277" y="1937705"/>
+            <a:ext cx="8675370" cy="3233102"/>
           </a:xfrm>
         </p:spPr>
         <p:txBody>
           <a:bodyPr anchor="b"/>
           <a:lstStyle>
             <a:lvl1pPr>
-              <a:defRPr sz="8000"/>
+              <a:defRPr sz="6600"/>
             </a:lvl1pPr>
           </a:lstStyle>
           <a:p>
@@ -1922,8 +2749,8 @@
         </p:nvSpPr>
         <p:spPr>
           <a:xfrm>
-            <a:off x="1109133" y="6119285"/>
-            <a:ext cx="14020800" cy="2000249"/>
+            <a:off x="686277" y="5201393"/>
+            <a:ext cx="8675370" cy="1700212"/>
           </a:xfrm>
         </p:spPr>
         <p:txBody>
@@ -1931,17 +2758,15 @@
           <a:lstStyle>
             <a:lvl1pPr marL="0" indent="0">
               <a:buNone/>
-              <a:defRPr sz="3200">
+              <a:defRPr sz="2640">
                 <a:solidFill>
-                  <a:schemeClr val="tx1">
-                    <a:tint val="75000"/>
-                  </a:schemeClr>
+                  <a:schemeClr val="tx1"/>
                 </a:solidFill>
               </a:defRPr>
             </a:lvl1pPr>
-            <a:lvl2pPr marL="609585" indent="0">
-              <a:buNone/>
-              <a:defRPr sz="2667">
+            <a:lvl2pPr marL="502920" indent="0">
+              <a:buNone/>
+              <a:defRPr sz="2200">
                 <a:solidFill>
                   <a:schemeClr val="tx1">
                     <a:tint val="75000"/>
@@ -1949,9 +2774,9 @@
                 </a:solidFill>
               </a:defRPr>
             </a:lvl2pPr>
-            <a:lvl3pPr marL="1219170" indent="0">
-              <a:buNone/>
-              <a:defRPr sz="2400">
+            <a:lvl3pPr marL="1005840" indent="0">
+              <a:buNone/>
+              <a:defRPr sz="1980">
                 <a:solidFill>
                   <a:schemeClr val="tx1">
                     <a:tint val="75000"/>
@@ -1959,9 +2784,9 @@
                 </a:solidFill>
               </a:defRPr>
             </a:lvl3pPr>
-            <a:lvl4pPr marL="1828754" indent="0">
-              <a:buNone/>
-              <a:defRPr sz="2133">
+            <a:lvl4pPr marL="1508760" indent="0">
+              <a:buNone/>
+              <a:defRPr sz="1760">
                 <a:solidFill>
                   <a:schemeClr val="tx1">
                     <a:tint val="75000"/>
@@ -1969,9 +2794,9 @@
                 </a:solidFill>
               </a:defRPr>
             </a:lvl4pPr>
-            <a:lvl5pPr marL="2438339" indent="0">
-              <a:buNone/>
-              <a:defRPr sz="2133">
+            <a:lvl5pPr marL="2011680" indent="0">
+              <a:buNone/>
+              <a:defRPr sz="1760">
                 <a:solidFill>
                   <a:schemeClr val="tx1">
                     <a:tint val="75000"/>
@@ -1979,9 +2804,9 @@
                 </a:solidFill>
               </a:defRPr>
             </a:lvl5pPr>
-            <a:lvl6pPr marL="3047924" indent="0">
-              <a:buNone/>
-              <a:defRPr sz="2133">
+            <a:lvl6pPr marL="2514600" indent="0">
+              <a:buNone/>
+              <a:defRPr sz="1760">
                 <a:solidFill>
                   <a:schemeClr val="tx1">
                     <a:tint val="75000"/>
@@ -1989,9 +2814,9 @@
                 </a:solidFill>
               </a:defRPr>
             </a:lvl6pPr>
-            <a:lvl7pPr marL="3657509" indent="0">
-              <a:buNone/>
-              <a:defRPr sz="2133">
+            <a:lvl7pPr marL="3017520" indent="0">
+              <a:buNone/>
+              <a:defRPr sz="1760">
                 <a:solidFill>
                   <a:schemeClr val="tx1">
                     <a:tint val="75000"/>
@@ -1999,9 +2824,9 @@
                 </a:solidFill>
               </a:defRPr>
             </a:lvl7pPr>
-            <a:lvl8pPr marL="4267093" indent="0">
-              <a:buNone/>
-              <a:defRPr sz="2133">
+            <a:lvl8pPr marL="3520440" indent="0">
+              <a:buNone/>
+              <a:defRPr sz="1760">
                 <a:solidFill>
                   <a:schemeClr val="tx1">
                     <a:tint val="75000"/>
@@ -2009,9 +2834,9 @@
                 </a:solidFill>
               </a:defRPr>
             </a:lvl8pPr>
-            <a:lvl9pPr marL="4876678" indent="0">
-              <a:buNone/>
-              <a:defRPr sz="2133">
+            <a:lvl9pPr marL="4023360" indent="0">
+              <a:buNone/>
+              <a:defRPr sz="1760">
                 <a:solidFill>
                   <a:schemeClr val="tx1">
                     <a:tint val="75000"/>
@@ -2046,7 +2871,7 @@
           <a:p>
             <a:fld id="{5B9B541C-2D23-4375-AC31-E3C7AC460E3E}" type="datetimeFigureOut">
               <a:rPr lang="en-US" smtClean="0"/>
-              <a:t>9/5/2019</a:t>
+              <a:t>9/10/2019</a:t>
             </a:fld>
             <a:endParaRPr lang="en-US"/>
           </a:p>
@@ -2097,7 +2922,7 @@
     </p:spTree>
     <p:extLst>
       <p:ext uri="{BB962C8B-B14F-4D97-AF65-F5344CB8AC3E}">
-        <p14:creationId xmlns:p14="http://schemas.microsoft.com/office/powerpoint/2010/main" val="669195260"/>
+        <p14:creationId xmlns:p14="http://schemas.microsoft.com/office/powerpoint/2010/main" val="2663123022"/>
       </p:ext>
     </p:extLst>
   </p:cSld>
@@ -2159,8 +2984,8 @@
         </p:nvSpPr>
         <p:spPr>
           <a:xfrm>
-            <a:off x="1117600" y="2434167"/>
-            <a:ext cx="6908800" cy="5801784"/>
+            <a:off x="691515" y="2069042"/>
+            <a:ext cx="4274820" cy="4931516"/>
           </a:xfrm>
         </p:spPr>
         <p:txBody>
@@ -2216,8 +3041,8 @@
         </p:nvSpPr>
         <p:spPr>
           <a:xfrm>
-            <a:off x="8229600" y="2434167"/>
-            <a:ext cx="6908800" cy="5801784"/>
+            <a:off x="5092065" y="2069042"/>
+            <a:ext cx="4274820" cy="4931516"/>
           </a:xfrm>
         </p:spPr>
         <p:txBody>
@@ -2278,7 +3103,7 @@
           <a:p>
             <a:fld id="{5B9B541C-2D23-4375-AC31-E3C7AC460E3E}" type="datetimeFigureOut">
               <a:rPr lang="en-US" smtClean="0"/>
-              <a:t>9/5/2019</a:t>
+              <a:t>9/10/2019</a:t>
             </a:fld>
             <a:endParaRPr lang="en-US"/>
           </a:p>
@@ -2329,7 +3154,7 @@
     </p:spTree>
     <p:extLst>
       <p:ext uri="{BB962C8B-B14F-4D97-AF65-F5344CB8AC3E}">
-        <p14:creationId xmlns:p14="http://schemas.microsoft.com/office/powerpoint/2010/main" val="1249693073"/>
+        <p14:creationId xmlns:p14="http://schemas.microsoft.com/office/powerpoint/2010/main" val="241000926"/>
       </p:ext>
     </p:extLst>
   </p:cSld>
@@ -2368,8 +3193,8 @@
         </p:nvSpPr>
         <p:spPr>
           <a:xfrm>
-            <a:off x="1119717" y="486834"/>
-            <a:ext cx="14020800" cy="1767417"/>
+            <a:off x="692825" y="413810"/>
+            <a:ext cx="8675370" cy="1502305"/>
           </a:xfrm>
         </p:spPr>
         <p:txBody>
@@ -2396,8 +3221,8 @@
         </p:nvSpPr>
         <p:spPr>
           <a:xfrm>
-            <a:off x="1119718" y="2241551"/>
-            <a:ext cx="6877049" cy="1098549"/>
+            <a:off x="692826" y="1905318"/>
+            <a:ext cx="4255174" cy="933767"/>
           </a:xfrm>
         </p:spPr>
         <p:txBody>
@@ -2405,39 +3230,39 @@
           <a:lstStyle>
             <a:lvl1pPr marL="0" indent="0">
               <a:buNone/>
-              <a:defRPr sz="3200" b="1"/>
+              <a:defRPr sz="2640" b="1"/>
             </a:lvl1pPr>
-            <a:lvl2pPr marL="609585" indent="0">
-              <a:buNone/>
-              <a:defRPr sz="2667" b="1"/>
+            <a:lvl2pPr marL="502920" indent="0">
+              <a:buNone/>
+              <a:defRPr sz="2200" b="1"/>
             </a:lvl2pPr>
-            <a:lvl3pPr marL="1219170" indent="0">
-              <a:buNone/>
-              <a:defRPr sz="2400" b="1"/>
+            <a:lvl3pPr marL="1005840" indent="0">
+              <a:buNone/>
+              <a:defRPr sz="1980" b="1"/>
             </a:lvl3pPr>
-            <a:lvl4pPr marL="1828754" indent="0">
-              <a:buNone/>
-              <a:defRPr sz="2133" b="1"/>
+            <a:lvl4pPr marL="1508760" indent="0">
+              <a:buNone/>
+              <a:defRPr sz="1760" b="1"/>
             </a:lvl4pPr>
-            <a:lvl5pPr marL="2438339" indent="0">
-              <a:buNone/>
-              <a:defRPr sz="2133" b="1"/>
+            <a:lvl5pPr marL="2011680" indent="0">
+              <a:buNone/>
+              <a:defRPr sz="1760" b="1"/>
             </a:lvl5pPr>
-            <a:lvl6pPr marL="3047924" indent="0">
-              <a:buNone/>
-              <a:defRPr sz="2133" b="1"/>
+            <a:lvl6pPr marL="2514600" indent="0">
+              <a:buNone/>
+              <a:defRPr sz="1760" b="1"/>
             </a:lvl6pPr>
-            <a:lvl7pPr marL="3657509" indent="0">
-              <a:buNone/>
-              <a:defRPr sz="2133" b="1"/>
+            <a:lvl7pPr marL="3017520" indent="0">
+              <a:buNone/>
+              <a:defRPr sz="1760" b="1"/>
             </a:lvl7pPr>
-            <a:lvl8pPr marL="4267093" indent="0">
-              <a:buNone/>
-              <a:defRPr sz="2133" b="1"/>
+            <a:lvl8pPr marL="3520440" indent="0">
+              <a:buNone/>
+              <a:defRPr sz="1760" b="1"/>
             </a:lvl8pPr>
-            <a:lvl9pPr marL="4876678" indent="0">
-              <a:buNone/>
-              <a:defRPr sz="2133" b="1"/>
+            <a:lvl9pPr marL="4023360" indent="0">
+              <a:buNone/>
+              <a:defRPr sz="1760" b="1"/>
             </a:lvl9pPr>
           </a:lstStyle>
           <a:p>
@@ -2461,8 +3286,8 @@
         </p:nvSpPr>
         <p:spPr>
           <a:xfrm>
-            <a:off x="1119718" y="3340100"/>
-            <a:ext cx="6877049" cy="4912784"/>
+            <a:off x="692826" y="2839085"/>
+            <a:ext cx="4255174" cy="4175866"/>
           </a:xfrm>
         </p:spPr>
         <p:txBody>
@@ -2518,8 +3343,8 @@
         </p:nvSpPr>
         <p:spPr>
           <a:xfrm>
-            <a:off x="8229600" y="2241551"/>
-            <a:ext cx="6910917" cy="1098549"/>
+            <a:off x="5092066" y="1905318"/>
+            <a:ext cx="4276130" cy="933767"/>
           </a:xfrm>
         </p:spPr>
         <p:txBody>
@@ -2527,39 +3352,39 @@
           <a:lstStyle>
             <a:lvl1pPr marL="0" indent="0">
               <a:buNone/>
-              <a:defRPr sz="3200" b="1"/>
+              <a:defRPr sz="2640" b="1"/>
             </a:lvl1pPr>
-            <a:lvl2pPr marL="609585" indent="0">
-              <a:buNone/>
-              <a:defRPr sz="2667" b="1"/>
+            <a:lvl2pPr marL="502920" indent="0">
+              <a:buNone/>
+              <a:defRPr sz="2200" b="1"/>
             </a:lvl2pPr>
-            <a:lvl3pPr marL="1219170" indent="0">
-              <a:buNone/>
-              <a:defRPr sz="2400" b="1"/>
+            <a:lvl3pPr marL="1005840" indent="0">
+              <a:buNone/>
+              <a:defRPr sz="1980" b="1"/>
             </a:lvl3pPr>
-            <a:lvl4pPr marL="1828754" indent="0">
-              <a:buNone/>
-              <a:defRPr sz="2133" b="1"/>
+            <a:lvl4pPr marL="1508760" indent="0">
+              <a:buNone/>
+              <a:defRPr sz="1760" b="1"/>
             </a:lvl4pPr>
-            <a:lvl5pPr marL="2438339" indent="0">
-              <a:buNone/>
-              <a:defRPr sz="2133" b="1"/>
+            <a:lvl5pPr marL="2011680" indent="0">
+              <a:buNone/>
+              <a:defRPr sz="1760" b="1"/>
             </a:lvl5pPr>
-            <a:lvl6pPr marL="3047924" indent="0">
-              <a:buNone/>
-              <a:defRPr sz="2133" b="1"/>
+            <a:lvl6pPr marL="2514600" indent="0">
+              <a:buNone/>
+              <a:defRPr sz="1760" b="1"/>
             </a:lvl6pPr>
-            <a:lvl7pPr marL="3657509" indent="0">
-              <a:buNone/>
-              <a:defRPr sz="2133" b="1"/>
+            <a:lvl7pPr marL="3017520" indent="0">
+              <a:buNone/>
+              <a:defRPr sz="1760" b="1"/>
             </a:lvl7pPr>
-            <a:lvl8pPr marL="4267093" indent="0">
-              <a:buNone/>
-              <a:defRPr sz="2133" b="1"/>
+            <a:lvl8pPr marL="3520440" indent="0">
+              <a:buNone/>
+              <a:defRPr sz="1760" b="1"/>
             </a:lvl8pPr>
-            <a:lvl9pPr marL="4876678" indent="0">
-              <a:buNone/>
-              <a:defRPr sz="2133" b="1"/>
+            <a:lvl9pPr marL="4023360" indent="0">
+              <a:buNone/>
+              <a:defRPr sz="1760" b="1"/>
             </a:lvl9pPr>
           </a:lstStyle>
           <a:p>
@@ -2583,8 +3408,8 @@
         </p:nvSpPr>
         <p:spPr>
           <a:xfrm>
-            <a:off x="8229600" y="3340100"/>
-            <a:ext cx="6910917" cy="4912784"/>
+            <a:off x="5092066" y="2839085"/>
+            <a:ext cx="4276130" cy="4175866"/>
           </a:xfrm>
         </p:spPr>
         <p:txBody>
@@ -2645,7 +3470,7 @@
           <a:p>
             <a:fld id="{5B9B541C-2D23-4375-AC31-E3C7AC460E3E}" type="datetimeFigureOut">
               <a:rPr lang="en-US" smtClean="0"/>
-              <a:t>9/5/2019</a:t>
+              <a:t>9/10/2019</a:t>
             </a:fld>
             <a:endParaRPr lang="en-US"/>
           </a:p>
@@ -2696,7 +3521,7 @@
     </p:spTree>
     <p:extLst>
       <p:ext uri="{BB962C8B-B14F-4D97-AF65-F5344CB8AC3E}">
-        <p14:creationId xmlns:p14="http://schemas.microsoft.com/office/powerpoint/2010/main" val="4263273940"/>
+        <p14:creationId xmlns:p14="http://schemas.microsoft.com/office/powerpoint/2010/main" val="675587085"/>
       </p:ext>
     </p:extLst>
   </p:cSld>
@@ -2763,7 +3588,7 @@
           <a:p>
             <a:fld id="{5B9B541C-2D23-4375-AC31-E3C7AC460E3E}" type="datetimeFigureOut">
               <a:rPr lang="en-US" smtClean="0"/>
-              <a:t>9/5/2019</a:t>
+              <a:t>9/10/2019</a:t>
             </a:fld>
             <a:endParaRPr lang="en-US"/>
           </a:p>
@@ -2814,7 +3639,7 @@
     </p:spTree>
     <p:extLst>
       <p:ext uri="{BB962C8B-B14F-4D97-AF65-F5344CB8AC3E}">
-        <p14:creationId xmlns:p14="http://schemas.microsoft.com/office/powerpoint/2010/main" val="344786548"/>
+        <p14:creationId xmlns:p14="http://schemas.microsoft.com/office/powerpoint/2010/main" val="637347294"/>
       </p:ext>
     </p:extLst>
   </p:cSld>
@@ -2858,7 +3683,7 @@
           <a:p>
             <a:fld id="{5B9B541C-2D23-4375-AC31-E3C7AC460E3E}" type="datetimeFigureOut">
               <a:rPr lang="en-US" smtClean="0"/>
-              <a:t>9/5/2019</a:t>
+              <a:t>9/10/2019</a:t>
             </a:fld>
             <a:endParaRPr lang="en-US"/>
           </a:p>
@@ -2909,7 +3734,7 @@
     </p:spTree>
     <p:extLst>
       <p:ext uri="{BB962C8B-B14F-4D97-AF65-F5344CB8AC3E}">
-        <p14:creationId xmlns:p14="http://schemas.microsoft.com/office/powerpoint/2010/main" val="578558818"/>
+        <p14:creationId xmlns:p14="http://schemas.microsoft.com/office/powerpoint/2010/main" val="727923089"/>
       </p:ext>
     </p:extLst>
   </p:cSld>
@@ -2948,15 +3773,15 @@
         </p:nvSpPr>
         <p:spPr>
           <a:xfrm>
-            <a:off x="1119718" y="609600"/>
-            <a:ext cx="5242983" cy="2133600"/>
+            <a:off x="692825" y="518160"/>
+            <a:ext cx="3244096" cy="1813560"/>
           </a:xfrm>
         </p:spPr>
         <p:txBody>
           <a:bodyPr anchor="b"/>
           <a:lstStyle>
             <a:lvl1pPr>
-              <a:defRPr sz="4267"/>
+              <a:defRPr sz="3520"/>
             </a:lvl1pPr>
           </a:lstStyle>
           <a:p>
@@ -2980,39 +3805,39 @@
         </p:nvSpPr>
         <p:spPr>
           <a:xfrm>
-            <a:off x="6910917" y="1316567"/>
-            <a:ext cx="8229600" cy="6498167"/>
+            <a:off x="4276130" y="1119083"/>
+            <a:ext cx="5092065" cy="5523442"/>
           </a:xfrm>
         </p:spPr>
         <p:txBody>
           <a:bodyPr/>
           <a:lstStyle>
             <a:lvl1pPr>
-              <a:defRPr sz="4267"/>
+              <a:defRPr sz="3520"/>
             </a:lvl1pPr>
             <a:lvl2pPr>
-              <a:defRPr sz="3733"/>
+              <a:defRPr sz="3080"/>
             </a:lvl2pPr>
             <a:lvl3pPr>
-              <a:defRPr sz="3200"/>
+              <a:defRPr sz="2640"/>
             </a:lvl3pPr>
             <a:lvl4pPr>
-              <a:defRPr sz="2667"/>
+              <a:defRPr sz="2200"/>
             </a:lvl4pPr>
             <a:lvl5pPr>
-              <a:defRPr sz="2667"/>
+              <a:defRPr sz="2200"/>
             </a:lvl5pPr>
             <a:lvl6pPr>
-              <a:defRPr sz="2667"/>
+              <a:defRPr sz="2200"/>
             </a:lvl6pPr>
             <a:lvl7pPr>
-              <a:defRPr sz="2667"/>
+              <a:defRPr sz="2200"/>
             </a:lvl7pPr>
             <a:lvl8pPr>
-              <a:defRPr sz="2667"/>
+              <a:defRPr sz="2200"/>
             </a:lvl8pPr>
             <a:lvl9pPr>
-              <a:defRPr sz="2667"/>
+              <a:defRPr sz="2200"/>
             </a:lvl9pPr>
           </a:lstStyle>
           <a:p>
@@ -3065,8 +3890,8 @@
         </p:nvSpPr>
         <p:spPr>
           <a:xfrm>
-            <a:off x="1119718" y="2743200"/>
-            <a:ext cx="5242983" cy="5082117"/>
+            <a:off x="692825" y="2331720"/>
+            <a:ext cx="3244096" cy="4319800"/>
           </a:xfrm>
         </p:spPr>
         <p:txBody>
@@ -3074,39 +3899,39 @@
           <a:lstStyle>
             <a:lvl1pPr marL="0" indent="0">
               <a:buNone/>
-              <a:defRPr sz="2133"/>
+              <a:defRPr sz="1760"/>
             </a:lvl1pPr>
-            <a:lvl2pPr marL="609585" indent="0">
-              <a:buNone/>
-              <a:defRPr sz="1867"/>
+            <a:lvl2pPr marL="502920" indent="0">
+              <a:buNone/>
+              <a:defRPr sz="1540"/>
             </a:lvl2pPr>
-            <a:lvl3pPr marL="1219170" indent="0">
-              <a:buNone/>
-              <a:defRPr sz="1600"/>
+            <a:lvl3pPr marL="1005840" indent="0">
+              <a:buNone/>
+              <a:defRPr sz="1320"/>
             </a:lvl3pPr>
-            <a:lvl4pPr marL="1828754" indent="0">
-              <a:buNone/>
-              <a:defRPr sz="1333"/>
+            <a:lvl4pPr marL="1508760" indent="0">
+              <a:buNone/>
+              <a:defRPr sz="1100"/>
             </a:lvl4pPr>
-            <a:lvl5pPr marL="2438339" indent="0">
-              <a:buNone/>
-              <a:defRPr sz="1333"/>
+            <a:lvl5pPr marL="2011680" indent="0">
+              <a:buNone/>
+              <a:defRPr sz="1100"/>
             </a:lvl5pPr>
-            <a:lvl6pPr marL="3047924" indent="0">
-              <a:buNone/>
-              <a:defRPr sz="1333"/>
+            <a:lvl6pPr marL="2514600" indent="0">
+              <a:buNone/>
+              <a:defRPr sz="1100"/>
             </a:lvl6pPr>
-            <a:lvl7pPr marL="3657509" indent="0">
-              <a:buNone/>
-              <a:defRPr sz="1333"/>
+            <a:lvl7pPr marL="3017520" indent="0">
+              <a:buNone/>
+              <a:defRPr sz="1100"/>
             </a:lvl7pPr>
-            <a:lvl8pPr marL="4267093" indent="0">
-              <a:buNone/>
-              <a:defRPr sz="1333"/>
+            <a:lvl8pPr marL="3520440" indent="0">
+              <a:buNone/>
+              <a:defRPr sz="1100"/>
             </a:lvl8pPr>
-            <a:lvl9pPr marL="4876678" indent="0">
-              <a:buNone/>
-              <a:defRPr sz="1333"/>
+            <a:lvl9pPr marL="4023360" indent="0">
+              <a:buNone/>
+              <a:defRPr sz="1100"/>
             </a:lvl9pPr>
           </a:lstStyle>
           <a:p>
@@ -3135,7 +3960,7 @@
           <a:p>
             <a:fld id="{5B9B541C-2D23-4375-AC31-E3C7AC460E3E}" type="datetimeFigureOut">
               <a:rPr lang="en-US" smtClean="0"/>
-              <a:t>9/5/2019</a:t>
+              <a:t>9/10/2019</a:t>
             </a:fld>
             <a:endParaRPr lang="en-US"/>
           </a:p>
@@ -3186,7 +4011,7 @@
     </p:spTree>
     <p:extLst>
       <p:ext uri="{BB962C8B-B14F-4D97-AF65-F5344CB8AC3E}">
-        <p14:creationId xmlns:p14="http://schemas.microsoft.com/office/powerpoint/2010/main" val="1207151401"/>
+        <p14:creationId xmlns:p14="http://schemas.microsoft.com/office/powerpoint/2010/main" val="946971368"/>
       </p:ext>
     </p:extLst>
   </p:cSld>
@@ -3225,15 +4050,15 @@
         </p:nvSpPr>
         <p:spPr>
           <a:xfrm>
-            <a:off x="1119718" y="609600"/>
-            <a:ext cx="5242983" cy="2133600"/>
+            <a:off x="692825" y="518160"/>
+            <a:ext cx="3244096" cy="1813560"/>
           </a:xfrm>
         </p:spPr>
         <p:txBody>
           <a:bodyPr anchor="b"/>
           <a:lstStyle>
             <a:lvl1pPr>
-              <a:defRPr sz="4267"/>
+              <a:defRPr sz="3520"/>
             </a:lvl1pPr>
           </a:lstStyle>
           <a:p>
@@ -3257,8 +4082,8 @@
         </p:nvSpPr>
         <p:spPr>
           <a:xfrm>
-            <a:off x="6910917" y="1316567"/>
-            <a:ext cx="8229600" cy="6498167"/>
+            <a:off x="4276130" y="1119083"/>
+            <a:ext cx="5092065" cy="5523442"/>
           </a:xfrm>
         </p:spPr>
         <p:txBody>
@@ -3266,39 +4091,39 @@
           <a:lstStyle>
             <a:lvl1pPr marL="0" indent="0">
               <a:buNone/>
-              <a:defRPr sz="4267"/>
+              <a:defRPr sz="3520"/>
             </a:lvl1pPr>
-            <a:lvl2pPr marL="609585" indent="0">
-              <a:buNone/>
-              <a:defRPr sz="3733"/>
+            <a:lvl2pPr marL="502920" indent="0">
+              <a:buNone/>
+              <a:defRPr sz="3080"/>
             </a:lvl2pPr>
-            <a:lvl3pPr marL="1219170" indent="0">
-              <a:buNone/>
-              <a:defRPr sz="3200"/>
+            <a:lvl3pPr marL="1005840" indent="0">
+              <a:buNone/>
+              <a:defRPr sz="2640"/>
             </a:lvl3pPr>
-            <a:lvl4pPr marL="1828754" indent="0">
-              <a:buNone/>
-              <a:defRPr sz="2667"/>
+            <a:lvl4pPr marL="1508760" indent="0">
+              <a:buNone/>
+              <a:defRPr sz="2200"/>
             </a:lvl4pPr>
-            <a:lvl5pPr marL="2438339" indent="0">
-              <a:buNone/>
-              <a:defRPr sz="2667"/>
+            <a:lvl5pPr marL="2011680" indent="0">
+              <a:buNone/>
+              <a:defRPr sz="2200"/>
             </a:lvl5pPr>
-            <a:lvl6pPr marL="3047924" indent="0">
-              <a:buNone/>
-              <a:defRPr sz="2667"/>
+            <a:lvl6pPr marL="2514600" indent="0">
+              <a:buNone/>
+              <a:defRPr sz="2200"/>
             </a:lvl6pPr>
-            <a:lvl7pPr marL="3657509" indent="0">
-              <a:buNone/>
-              <a:defRPr sz="2667"/>
+            <a:lvl7pPr marL="3017520" indent="0">
+              <a:buNone/>
+              <a:defRPr sz="2200"/>
             </a:lvl7pPr>
-            <a:lvl8pPr marL="4267093" indent="0">
-              <a:buNone/>
-              <a:defRPr sz="2667"/>
+            <a:lvl8pPr marL="3520440" indent="0">
+              <a:buNone/>
+              <a:defRPr sz="2200"/>
             </a:lvl8pPr>
-            <a:lvl9pPr marL="4876678" indent="0">
-              <a:buNone/>
-              <a:defRPr sz="2667"/>
+            <a:lvl9pPr marL="4023360" indent="0">
+              <a:buNone/>
+              <a:defRPr sz="2200"/>
             </a:lvl9pPr>
           </a:lstStyle>
           <a:p>
@@ -3322,8 +4147,8 @@
         </p:nvSpPr>
         <p:spPr>
           <a:xfrm>
-            <a:off x="1119718" y="2743200"/>
-            <a:ext cx="5242983" cy="5082117"/>
+            <a:off x="692825" y="2331720"/>
+            <a:ext cx="3244096" cy="4319800"/>
           </a:xfrm>
         </p:spPr>
         <p:txBody>
@@ -3331,39 +4156,39 @@
           <a:lstStyle>
             <a:lvl1pPr marL="0" indent="0">
               <a:buNone/>
-              <a:defRPr sz="2133"/>
+              <a:defRPr sz="1760"/>
             </a:lvl1pPr>
-            <a:lvl2pPr marL="609585" indent="0">
-              <a:buNone/>
-              <a:defRPr sz="1867"/>
+            <a:lvl2pPr marL="502920" indent="0">
+              <a:buNone/>
+              <a:defRPr sz="1540"/>
             </a:lvl2pPr>
-            <a:lvl3pPr marL="1219170" indent="0">
-              <a:buNone/>
-              <a:defRPr sz="1600"/>
+            <a:lvl3pPr marL="1005840" indent="0">
+              <a:buNone/>
+              <a:defRPr sz="1320"/>
             </a:lvl3pPr>
-            <a:lvl4pPr marL="1828754" indent="0">
-              <a:buNone/>
-              <a:defRPr sz="1333"/>
+            <a:lvl4pPr marL="1508760" indent="0">
+              <a:buNone/>
+              <a:defRPr sz="1100"/>
             </a:lvl4pPr>
-            <a:lvl5pPr marL="2438339" indent="0">
-              <a:buNone/>
-              <a:defRPr sz="1333"/>
+            <a:lvl5pPr marL="2011680" indent="0">
+              <a:buNone/>
+              <a:defRPr sz="1100"/>
             </a:lvl5pPr>
-            <a:lvl6pPr marL="3047924" indent="0">
-              <a:buNone/>
-              <a:defRPr sz="1333"/>
+            <a:lvl6pPr marL="2514600" indent="0">
+              <a:buNone/>
+              <a:defRPr sz="1100"/>
             </a:lvl6pPr>
-            <a:lvl7pPr marL="3657509" indent="0">
-              <a:buNone/>
-              <a:defRPr sz="1333"/>
+            <a:lvl7pPr marL="3017520" indent="0">
+              <a:buNone/>
+              <a:defRPr sz="1100"/>
             </a:lvl7pPr>
-            <a:lvl8pPr marL="4267093" indent="0">
-              <a:buNone/>
-              <a:defRPr sz="1333"/>
+            <a:lvl8pPr marL="3520440" indent="0">
+              <a:buNone/>
+              <a:defRPr sz="1100"/>
             </a:lvl8pPr>
-            <a:lvl9pPr marL="4876678" indent="0">
-              <a:buNone/>
-              <a:defRPr sz="1333"/>
+            <a:lvl9pPr marL="4023360" indent="0">
+              <a:buNone/>
+              <a:defRPr sz="1100"/>
             </a:lvl9pPr>
           </a:lstStyle>
           <a:p>
@@ -3392,7 +4217,7 @@
           <a:p>
             <a:fld id="{5B9B541C-2D23-4375-AC31-E3C7AC460E3E}" type="datetimeFigureOut">
               <a:rPr lang="en-US" smtClean="0"/>
-              <a:t>9/5/2019</a:t>
+              <a:t>9/10/2019</a:t>
             </a:fld>
             <a:endParaRPr lang="en-US"/>
           </a:p>
@@ -3443,7 +4268,7 @@
     </p:spTree>
     <p:extLst>
       <p:ext uri="{BB962C8B-B14F-4D97-AF65-F5344CB8AC3E}">
-        <p14:creationId xmlns:p14="http://schemas.microsoft.com/office/powerpoint/2010/main" val="2148241956"/>
+        <p14:creationId xmlns:p14="http://schemas.microsoft.com/office/powerpoint/2010/main" val="3176923581"/>
       </p:ext>
     </p:extLst>
   </p:cSld>
@@ -3487,8 +4312,8 @@
         </p:nvSpPr>
         <p:spPr>
           <a:xfrm>
-            <a:off x="1117600" y="486834"/>
-            <a:ext cx="14020800" cy="1767417"/>
+            <a:off x="691515" y="413810"/>
+            <a:ext cx="8675370" cy="1502305"/>
           </a:xfrm>
           <a:prstGeom prst="rect">
             <a:avLst/>
@@ -3520,8 +4345,8 @@
         </p:nvSpPr>
         <p:spPr>
           <a:xfrm>
-            <a:off x="1117600" y="2434167"/>
-            <a:ext cx="14020800" cy="5801784"/>
+            <a:off x="691515" y="2069042"/>
+            <a:ext cx="8675370" cy="4931516"/>
           </a:xfrm>
           <a:prstGeom prst="rect">
             <a:avLst/>
@@ -3582,8 +4407,8 @@
         </p:nvSpPr>
         <p:spPr>
           <a:xfrm>
-            <a:off x="1117600" y="8475134"/>
-            <a:ext cx="3657600" cy="486833"/>
+            <a:off x="691515" y="7203865"/>
+            <a:ext cx="2263140" cy="413808"/>
           </a:xfrm>
           <a:prstGeom prst="rect">
             <a:avLst/>
@@ -3593,7 +4418,7 @@
           <a:bodyPr vert="horz" lIns="91440" tIns="45720" rIns="91440" bIns="45720" rtlCol="0" anchor="ctr"/>
           <a:lstStyle>
             <a:lvl1pPr algn="l">
-              <a:defRPr sz="1600">
+              <a:defRPr sz="1320">
                 <a:solidFill>
                   <a:schemeClr val="tx1">
                     <a:tint val="75000"/>
@@ -3605,7 +4430,7 @@
           <a:p>
             <a:fld id="{5B9B541C-2D23-4375-AC31-E3C7AC460E3E}" type="datetimeFigureOut">
               <a:rPr lang="en-US" smtClean="0"/>
-              <a:t>9/5/2019</a:t>
+              <a:t>9/10/2019</a:t>
             </a:fld>
             <a:endParaRPr lang="en-US"/>
           </a:p>
@@ -3623,8 +4448,8 @@
         </p:nvSpPr>
         <p:spPr>
           <a:xfrm>
-            <a:off x="5384800" y="8475134"/>
-            <a:ext cx="5486400" cy="486833"/>
+            <a:off x="3331845" y="7203865"/>
+            <a:ext cx="3394710" cy="413808"/>
           </a:xfrm>
           <a:prstGeom prst="rect">
             <a:avLst/>
@@ -3634,7 +4459,7 @@
           <a:bodyPr vert="horz" lIns="91440" tIns="45720" rIns="91440" bIns="45720" rtlCol="0" anchor="ctr"/>
           <a:lstStyle>
             <a:lvl1pPr algn="ctr">
-              <a:defRPr sz="1600">
+              <a:defRPr sz="1320">
                 <a:solidFill>
                   <a:schemeClr val="tx1">
                     <a:tint val="75000"/>
@@ -3660,8 +4485,8 @@
         </p:nvSpPr>
         <p:spPr>
           <a:xfrm>
-            <a:off x="11480800" y="8475134"/>
-            <a:ext cx="3657600" cy="486833"/>
+            <a:off x="7103745" y="7203865"/>
+            <a:ext cx="2263140" cy="413808"/>
           </a:xfrm>
           <a:prstGeom prst="rect">
             <a:avLst/>
@@ -3671,7 +4496,7 @@
           <a:bodyPr vert="horz" lIns="91440" tIns="45720" rIns="91440" bIns="45720" rtlCol="0" anchor="ctr"/>
           <a:lstStyle>
             <a:lvl1pPr algn="r">
-              <a:defRPr sz="1600">
+              <a:defRPr sz="1320">
                 <a:solidFill>
                   <a:schemeClr val="tx1">
                     <a:tint val="75000"/>
@@ -3692,27 +4517,27 @@
     </p:spTree>
     <p:extLst>
       <p:ext uri="{BB962C8B-B14F-4D97-AF65-F5344CB8AC3E}">
-        <p14:creationId xmlns:p14="http://schemas.microsoft.com/office/powerpoint/2010/main" val="3758487562"/>
+        <p14:creationId xmlns:p14="http://schemas.microsoft.com/office/powerpoint/2010/main" val="3860155546"/>
       </p:ext>
     </p:extLst>
   </p:cSld>
   <p:clrMap bg1="lt1" tx1="dk1" bg2="lt2" tx2="dk2" accent1="accent1" accent2="accent2" accent3="accent3" accent4="accent4" accent5="accent5" accent6="accent6" hlink="hlink" folHlink="folHlink"/>
   <p:sldLayoutIdLst>
-    <p:sldLayoutId id="2147483673" r:id="rId1"/>
-    <p:sldLayoutId id="2147483674" r:id="rId2"/>
-    <p:sldLayoutId id="2147483675" r:id="rId3"/>
-    <p:sldLayoutId id="2147483676" r:id="rId4"/>
-    <p:sldLayoutId id="2147483677" r:id="rId5"/>
-    <p:sldLayoutId id="2147483678" r:id="rId6"/>
-    <p:sldLayoutId id="2147483679" r:id="rId7"/>
-    <p:sldLayoutId id="2147483680" r:id="rId8"/>
-    <p:sldLayoutId id="2147483681" r:id="rId9"/>
-    <p:sldLayoutId id="2147483682" r:id="rId10"/>
-    <p:sldLayoutId id="2147483683" r:id="rId11"/>
+    <p:sldLayoutId id="2147483685" r:id="rId1"/>
+    <p:sldLayoutId id="2147483686" r:id="rId2"/>
+    <p:sldLayoutId id="2147483687" r:id="rId3"/>
+    <p:sldLayoutId id="2147483688" r:id="rId4"/>
+    <p:sldLayoutId id="2147483689" r:id="rId5"/>
+    <p:sldLayoutId id="2147483690" r:id="rId6"/>
+    <p:sldLayoutId id="2147483691" r:id="rId7"/>
+    <p:sldLayoutId id="2147483692" r:id="rId8"/>
+    <p:sldLayoutId id="2147483693" r:id="rId9"/>
+    <p:sldLayoutId id="2147483694" r:id="rId10"/>
+    <p:sldLayoutId id="2147483695" r:id="rId11"/>
   </p:sldLayoutIdLst>
   <p:txStyles>
     <p:titleStyle>
-      <a:lvl1pPr algn="l" defTabSz="1219170" rtl="0" eaLnBrk="1" latinLnBrk="0" hangingPunct="1">
+      <a:lvl1pPr algn="l" defTabSz="1005840" rtl="0" eaLnBrk="1" latinLnBrk="0" hangingPunct="1">
         <a:lnSpc>
           <a:spcPct val="90000"/>
         </a:lnSpc>
@@ -3720,7 +4545,7 @@
           <a:spcPct val="0"/>
         </a:spcBef>
         <a:buNone/>
-        <a:defRPr sz="5867" kern="1200">
+        <a:defRPr sz="4840" kern="1200">
           <a:solidFill>
             <a:schemeClr val="tx1"/>
           </a:solidFill>
@@ -3731,16 +4556,16 @@
       </a:lvl1pPr>
     </p:titleStyle>
     <p:bodyStyle>
-      <a:lvl1pPr marL="304792" indent="-304792" algn="l" defTabSz="1219170" rtl="0" eaLnBrk="1" latinLnBrk="0" hangingPunct="1">
+      <a:lvl1pPr marL="251460" indent="-251460" algn="l" defTabSz="1005840" rtl="0" eaLnBrk="1" latinLnBrk="0" hangingPunct="1">
         <a:lnSpc>
           <a:spcPct val="90000"/>
         </a:lnSpc>
         <a:spcBef>
-          <a:spcPts val="1333"/>
+          <a:spcPts val="1100"/>
         </a:spcBef>
         <a:buFont typeface="Arial" panose="020B0604020202020204" pitchFamily="34" charset="0"/>
         <a:buChar char="•"/>
-        <a:defRPr sz="3733" kern="1200">
+        <a:defRPr sz="3080" kern="1200">
           <a:solidFill>
             <a:schemeClr val="tx1"/>
           </a:solidFill>
@@ -3749,16 +4574,16 @@
           <a:cs typeface="+mn-cs"/>
         </a:defRPr>
       </a:lvl1pPr>
-      <a:lvl2pPr marL="914377" indent="-304792" algn="l" defTabSz="1219170" rtl="0" eaLnBrk="1" latinLnBrk="0" hangingPunct="1">
+      <a:lvl2pPr marL="754380" indent="-251460" algn="l" defTabSz="1005840" rtl="0" eaLnBrk="1" latinLnBrk="0" hangingPunct="1">
         <a:lnSpc>
           <a:spcPct val="90000"/>
         </a:lnSpc>
         <a:spcBef>
-          <a:spcPts val="667"/>
+          <a:spcPts val="550"/>
         </a:spcBef>
         <a:buFont typeface="Arial" panose="020B0604020202020204" pitchFamily="34" charset="0"/>
         <a:buChar char="•"/>
-        <a:defRPr sz="3200" kern="1200">
+        <a:defRPr sz="2640" kern="1200">
           <a:solidFill>
             <a:schemeClr val="tx1"/>
           </a:solidFill>
@@ -3767,16 +4592,16 @@
           <a:cs typeface="+mn-cs"/>
         </a:defRPr>
       </a:lvl2pPr>
-      <a:lvl3pPr marL="1523962" indent="-304792" algn="l" defTabSz="1219170" rtl="0" eaLnBrk="1" latinLnBrk="0" hangingPunct="1">
+      <a:lvl3pPr marL="1257300" indent="-251460" algn="l" defTabSz="1005840" rtl="0" eaLnBrk="1" latinLnBrk="0" hangingPunct="1">
         <a:lnSpc>
           <a:spcPct val="90000"/>
         </a:lnSpc>
         <a:spcBef>
-          <a:spcPts val="667"/>
+          <a:spcPts val="550"/>
         </a:spcBef>
         <a:buFont typeface="Arial" panose="020B0604020202020204" pitchFamily="34" charset="0"/>
         <a:buChar char="•"/>
-        <a:defRPr sz="2667" kern="1200">
+        <a:defRPr sz="2200" kern="1200">
           <a:solidFill>
             <a:schemeClr val="tx1"/>
           </a:solidFill>
@@ -3785,16 +4610,16 @@
           <a:cs typeface="+mn-cs"/>
         </a:defRPr>
       </a:lvl3pPr>
-      <a:lvl4pPr marL="2133547" indent="-304792" algn="l" defTabSz="1219170" rtl="0" eaLnBrk="1" latinLnBrk="0" hangingPunct="1">
+      <a:lvl4pPr marL="1760220" indent="-251460" algn="l" defTabSz="1005840" rtl="0" eaLnBrk="1" latinLnBrk="0" hangingPunct="1">
         <a:lnSpc>
           <a:spcPct val="90000"/>
         </a:lnSpc>
         <a:spcBef>
-          <a:spcPts val="667"/>
+          <a:spcPts val="550"/>
         </a:spcBef>
         <a:buFont typeface="Arial" panose="020B0604020202020204" pitchFamily="34" charset="0"/>
         <a:buChar char="•"/>
-        <a:defRPr sz="2400" kern="1200">
+        <a:defRPr sz="1980" kern="1200">
           <a:solidFill>
             <a:schemeClr val="tx1"/>
           </a:solidFill>
@@ -3803,16 +4628,16 @@
           <a:cs typeface="+mn-cs"/>
         </a:defRPr>
       </a:lvl4pPr>
-      <a:lvl5pPr marL="2743131" indent="-304792" algn="l" defTabSz="1219170" rtl="0" eaLnBrk="1" latinLnBrk="0" hangingPunct="1">
+      <a:lvl5pPr marL="2263140" indent="-251460" algn="l" defTabSz="1005840" rtl="0" eaLnBrk="1" latinLnBrk="0" hangingPunct="1">
         <a:lnSpc>
           <a:spcPct val="90000"/>
         </a:lnSpc>
         <a:spcBef>
-          <a:spcPts val="667"/>
+          <a:spcPts val="550"/>
         </a:spcBef>
         <a:buFont typeface="Arial" panose="020B0604020202020204" pitchFamily="34" charset="0"/>
         <a:buChar char="•"/>
-        <a:defRPr sz="2400" kern="1200">
+        <a:defRPr sz="1980" kern="1200">
           <a:solidFill>
             <a:schemeClr val="tx1"/>
           </a:solidFill>
@@ -3821,16 +4646,16 @@
           <a:cs typeface="+mn-cs"/>
         </a:defRPr>
       </a:lvl5pPr>
-      <a:lvl6pPr marL="3352716" indent="-304792" algn="l" defTabSz="1219170" rtl="0" eaLnBrk="1" latinLnBrk="0" hangingPunct="1">
+      <a:lvl6pPr marL="2766060" indent="-251460" algn="l" defTabSz="1005840" rtl="0" eaLnBrk="1" latinLnBrk="0" hangingPunct="1">
         <a:lnSpc>
           <a:spcPct val="90000"/>
         </a:lnSpc>
         <a:spcBef>
-          <a:spcPts val="667"/>
+          <a:spcPts val="550"/>
         </a:spcBef>
         <a:buFont typeface="Arial" panose="020B0604020202020204" pitchFamily="34" charset="0"/>
         <a:buChar char="•"/>
-        <a:defRPr sz="2400" kern="1200">
+        <a:defRPr sz="1980" kern="1200">
           <a:solidFill>
             <a:schemeClr val="tx1"/>
           </a:solidFill>
@@ -3839,16 +4664,16 @@
           <a:cs typeface="+mn-cs"/>
         </a:defRPr>
       </a:lvl6pPr>
-      <a:lvl7pPr marL="3962301" indent="-304792" algn="l" defTabSz="1219170" rtl="0" eaLnBrk="1" latinLnBrk="0" hangingPunct="1">
+      <a:lvl7pPr marL="3268980" indent="-251460" algn="l" defTabSz="1005840" rtl="0" eaLnBrk="1" latinLnBrk="0" hangingPunct="1">
         <a:lnSpc>
           <a:spcPct val="90000"/>
         </a:lnSpc>
         <a:spcBef>
-          <a:spcPts val="667"/>
+          <a:spcPts val="550"/>
         </a:spcBef>
         <a:buFont typeface="Arial" panose="020B0604020202020204" pitchFamily="34" charset="0"/>
         <a:buChar char="•"/>
-        <a:defRPr sz="2400" kern="1200">
+        <a:defRPr sz="1980" kern="1200">
           <a:solidFill>
             <a:schemeClr val="tx1"/>
           </a:solidFill>
@@ -3857,16 +4682,16 @@
           <a:cs typeface="+mn-cs"/>
         </a:defRPr>
       </a:lvl7pPr>
-      <a:lvl8pPr marL="4571886" indent="-304792" algn="l" defTabSz="1219170" rtl="0" eaLnBrk="1" latinLnBrk="0" hangingPunct="1">
+      <a:lvl8pPr marL="3771900" indent="-251460" algn="l" defTabSz="1005840" rtl="0" eaLnBrk="1" latinLnBrk="0" hangingPunct="1">
         <a:lnSpc>
           <a:spcPct val="90000"/>
         </a:lnSpc>
         <a:spcBef>
-          <a:spcPts val="667"/>
+          <a:spcPts val="550"/>
         </a:spcBef>
         <a:buFont typeface="Arial" panose="020B0604020202020204" pitchFamily="34" charset="0"/>
         <a:buChar char="•"/>
-        <a:defRPr sz="2400" kern="1200">
+        <a:defRPr sz="1980" kern="1200">
           <a:solidFill>
             <a:schemeClr val="tx1"/>
           </a:solidFill>
@@ -3875,16 +4700,16 @@
           <a:cs typeface="+mn-cs"/>
         </a:defRPr>
       </a:lvl8pPr>
-      <a:lvl9pPr marL="5181470" indent="-304792" algn="l" defTabSz="1219170" rtl="0" eaLnBrk="1" latinLnBrk="0" hangingPunct="1">
+      <a:lvl9pPr marL="4274820" indent="-251460" algn="l" defTabSz="1005840" rtl="0" eaLnBrk="1" latinLnBrk="0" hangingPunct="1">
         <a:lnSpc>
           <a:spcPct val="90000"/>
         </a:lnSpc>
         <a:spcBef>
-          <a:spcPts val="667"/>
+          <a:spcPts val="550"/>
         </a:spcBef>
         <a:buFont typeface="Arial" panose="020B0604020202020204" pitchFamily="34" charset="0"/>
         <a:buChar char="•"/>
-        <a:defRPr sz="2400" kern="1200">
+        <a:defRPr sz="1980" kern="1200">
           <a:solidFill>
             <a:schemeClr val="tx1"/>
           </a:solidFill>
@@ -3898,8 +4723,8 @@
       <a:defPPr>
         <a:defRPr lang="en-US"/>
       </a:defPPr>
-      <a:lvl1pPr marL="0" algn="l" defTabSz="1219170" rtl="0" eaLnBrk="1" latinLnBrk="0" hangingPunct="1">
-        <a:defRPr sz="2400" kern="1200">
+      <a:lvl1pPr marL="0" algn="l" defTabSz="1005840" rtl="0" eaLnBrk="1" latinLnBrk="0" hangingPunct="1">
+        <a:defRPr sz="1980" kern="1200">
           <a:solidFill>
             <a:schemeClr val="tx1"/>
           </a:solidFill>
@@ -3908,8 +4733,8 @@
           <a:cs typeface="+mn-cs"/>
         </a:defRPr>
       </a:lvl1pPr>
-      <a:lvl2pPr marL="609585" algn="l" defTabSz="1219170" rtl="0" eaLnBrk="1" latinLnBrk="0" hangingPunct="1">
-        <a:defRPr sz="2400" kern="1200">
+      <a:lvl2pPr marL="502920" algn="l" defTabSz="1005840" rtl="0" eaLnBrk="1" latinLnBrk="0" hangingPunct="1">
+        <a:defRPr sz="1980" kern="1200">
           <a:solidFill>
             <a:schemeClr val="tx1"/>
           </a:solidFill>
@@ -3918,8 +4743,8 @@
           <a:cs typeface="+mn-cs"/>
         </a:defRPr>
       </a:lvl2pPr>
-      <a:lvl3pPr marL="1219170" algn="l" defTabSz="1219170" rtl="0" eaLnBrk="1" latinLnBrk="0" hangingPunct="1">
-        <a:defRPr sz="2400" kern="1200">
+      <a:lvl3pPr marL="1005840" algn="l" defTabSz="1005840" rtl="0" eaLnBrk="1" latinLnBrk="0" hangingPunct="1">
+        <a:defRPr sz="1980" kern="1200">
           <a:solidFill>
             <a:schemeClr val="tx1"/>
           </a:solidFill>
@@ -3928,8 +4753,8 @@
           <a:cs typeface="+mn-cs"/>
         </a:defRPr>
       </a:lvl3pPr>
-      <a:lvl4pPr marL="1828754" algn="l" defTabSz="1219170" rtl="0" eaLnBrk="1" latinLnBrk="0" hangingPunct="1">
-        <a:defRPr sz="2400" kern="1200">
+      <a:lvl4pPr marL="1508760" algn="l" defTabSz="1005840" rtl="0" eaLnBrk="1" latinLnBrk="0" hangingPunct="1">
+        <a:defRPr sz="1980" kern="1200">
           <a:solidFill>
             <a:schemeClr val="tx1"/>
           </a:solidFill>
@@ -3938,8 +4763,8 @@
           <a:cs typeface="+mn-cs"/>
         </a:defRPr>
       </a:lvl4pPr>
-      <a:lvl5pPr marL="2438339" algn="l" defTabSz="1219170" rtl="0" eaLnBrk="1" latinLnBrk="0" hangingPunct="1">
-        <a:defRPr sz="2400" kern="1200">
+      <a:lvl5pPr marL="2011680" algn="l" defTabSz="1005840" rtl="0" eaLnBrk="1" latinLnBrk="0" hangingPunct="1">
+        <a:defRPr sz="1980" kern="1200">
           <a:solidFill>
             <a:schemeClr val="tx1"/>
           </a:solidFill>
@@ -3948,8 +4773,8 @@
           <a:cs typeface="+mn-cs"/>
         </a:defRPr>
       </a:lvl5pPr>
-      <a:lvl6pPr marL="3047924" algn="l" defTabSz="1219170" rtl="0" eaLnBrk="1" latinLnBrk="0" hangingPunct="1">
-        <a:defRPr sz="2400" kern="1200">
+      <a:lvl6pPr marL="2514600" algn="l" defTabSz="1005840" rtl="0" eaLnBrk="1" latinLnBrk="0" hangingPunct="1">
+        <a:defRPr sz="1980" kern="1200">
           <a:solidFill>
             <a:schemeClr val="tx1"/>
           </a:solidFill>
@@ -3958,8 +4783,8 @@
           <a:cs typeface="+mn-cs"/>
         </a:defRPr>
       </a:lvl6pPr>
-      <a:lvl7pPr marL="3657509" algn="l" defTabSz="1219170" rtl="0" eaLnBrk="1" latinLnBrk="0" hangingPunct="1">
-        <a:defRPr sz="2400" kern="1200">
+      <a:lvl7pPr marL="3017520" algn="l" defTabSz="1005840" rtl="0" eaLnBrk="1" latinLnBrk="0" hangingPunct="1">
+        <a:defRPr sz="1980" kern="1200">
           <a:solidFill>
             <a:schemeClr val="tx1"/>
           </a:solidFill>
@@ -3968,8 +4793,8 @@
           <a:cs typeface="+mn-cs"/>
         </a:defRPr>
       </a:lvl7pPr>
-      <a:lvl8pPr marL="4267093" algn="l" defTabSz="1219170" rtl="0" eaLnBrk="1" latinLnBrk="0" hangingPunct="1">
-        <a:defRPr sz="2400" kern="1200">
+      <a:lvl8pPr marL="3520440" algn="l" defTabSz="1005840" rtl="0" eaLnBrk="1" latinLnBrk="0" hangingPunct="1">
+        <a:defRPr sz="1980" kern="1200">
           <a:solidFill>
             <a:schemeClr val="tx1"/>
           </a:solidFill>
@@ -3978,8 +4803,8 @@
           <a:cs typeface="+mn-cs"/>
         </a:defRPr>
       </a:lvl8pPr>
-      <a:lvl9pPr marL="4876678" algn="l" defTabSz="1219170" rtl="0" eaLnBrk="1" latinLnBrk="0" hangingPunct="1">
-        <a:defRPr sz="2400" kern="1200">
+      <a:lvl9pPr marL="4023360" algn="l" defTabSz="1005840" rtl="0" eaLnBrk="1" latinLnBrk="0" hangingPunct="1">
+        <a:defRPr sz="1980" kern="1200">
           <a:solidFill>
             <a:schemeClr val="tx1"/>
           </a:solidFill>
@@ -4028,12 +4853,14 @@
         </p:nvSpPr>
         <p:spPr>
           <a:xfrm>
-            <a:off x="1117600" y="235006"/>
-            <a:ext cx="14020800" cy="1767417"/>
-          </a:xfrm>
-        </p:spPr>
-        <p:txBody>
-          <a:bodyPr/>
+            <a:off x="895230" y="519679"/>
+            <a:ext cx="8675370" cy="1093589"/>
+          </a:xfrm>
+        </p:spPr>
+        <p:txBody>
+          <a:bodyPr>
+            <a:normAutofit fontScale="90000"/>
+          </a:bodyPr>
           <a:lstStyle/>
           <a:p>
             <a:pPr algn="ctr"/>
@@ -4081,8 +4908,8 @@
         </p:blipFill>
         <p:spPr>
           <a:xfrm>
-            <a:off x="10312500" y="3873000"/>
-            <a:ext cx="4479401" cy="2845796"/>
+            <a:off x="6446845" y="3125462"/>
+            <a:ext cx="3395708" cy="2157318"/>
           </a:xfrm>
         </p:spPr>
       </p:pic>
@@ -4100,8 +4927,8 @@
         </p:nvSpPr>
         <p:spPr>
           <a:xfrm>
-            <a:off x="4023909" y="1812186"/>
-            <a:ext cx="8981954" cy="923330"/>
+            <a:off x="2250408" y="1865212"/>
+            <a:ext cx="5557584" cy="646331"/>
           </a:xfrm>
           <a:prstGeom prst="rect">
             <a:avLst/>
@@ -4116,14 +4943,14 @@
           <a:p>
             <a:pPr algn="ctr"/>
             <a:r>
-              <a:rPr lang="en-US" dirty="0"/>
+              <a:rPr lang="en-US" sz="1200" dirty="0"/>
               <a:t>Interagency Ecological Program for the San Francisco Estuary</a:t>
             </a:r>
           </a:p>
           <a:p>
             <a:pPr algn="ctr"/>
             <a:r>
-              <a:rPr lang="en-US" dirty="0"/>
+              <a:rPr lang="en-US" sz="1200" dirty="0"/>
               <a:t>This report shows trends in water quality, plankton, and fish across multiple IEP surveys for December of 2017, January and February of 2018.</a:t>
             </a:r>
           </a:p>
@@ -4143,8 +4970,8 @@
         </p:nvSpPr>
         <p:spPr>
           <a:xfrm>
-            <a:off x="10999182" y="3309506"/>
-            <a:ext cx="2216312" cy="523220"/>
+            <a:off x="6971756" y="2697881"/>
+            <a:ext cx="1441036" cy="359009"/>
           </a:xfrm>
           <a:prstGeom prst="rect">
             <a:avLst/>
@@ -4158,18 +4985,297 @@
           <a:lstStyle/>
           <a:p>
             <a:r>
-              <a:rPr lang="en-US" sz="2800" dirty="0"/>
+              <a:rPr lang="en-US" sz="1733" dirty="0"/>
               <a:t>Delta Outflow</a:t>
+            </a:r>
+          </a:p>
+        </p:txBody>
+      </p:sp>
+      <p:sp>
+        <p:nvSpPr>
+          <p:cNvPr id="19" name="TextBox 18">
+            <a:extLst>
+              <a:ext uri="{FF2B5EF4-FFF2-40B4-BE49-F238E27FC236}">
+                <a16:creationId xmlns:a16="http://schemas.microsoft.com/office/drawing/2014/main" id="{93CA7E69-9849-481A-972D-0A421B7CAF5E}"/>
+              </a:ext>
+            </a:extLst>
+          </p:cNvPr>
+          <p:cNvSpPr txBox="1"/>
+          <p:nvPr/>
+        </p:nvSpPr>
+        <p:spPr>
+          <a:xfrm>
+            <a:off x="586331" y="5894054"/>
+            <a:ext cx="1968524" cy="1600438"/>
+          </a:xfrm>
+          <a:prstGeom prst="rect">
+            <a:avLst/>
+          </a:prstGeom>
+          <a:noFill/>
+        </p:spPr>
+        <p:txBody>
+          <a:bodyPr wrap="square" rtlCol="0">
+            <a:spAutoFit/>
+          </a:bodyPr>
+          <a:lstStyle/>
+          <a:p>
+            <a:r>
+              <a:rPr lang="en-US" sz="1400" dirty="0"/>
+              <a:t>Disclaimer: While substantial efforts are made to ensure the accuracy of these data, complete accuracy of data sets cannot be guaranteed.</a:t>
+            </a:r>
+          </a:p>
+        </p:txBody>
+      </p:sp>
+      <p:sp>
+        <p:nvSpPr>
+          <p:cNvPr id="20" name="TextBox 19">
+            <a:extLst>
+              <a:ext uri="{FF2B5EF4-FFF2-40B4-BE49-F238E27FC236}">
+                <a16:creationId xmlns:a16="http://schemas.microsoft.com/office/drawing/2014/main" id="{41429D89-1B46-4039-80EB-BA87FFC2F9B6}"/>
+              </a:ext>
+            </a:extLst>
+          </p:cNvPr>
+          <p:cNvSpPr txBox="1"/>
+          <p:nvPr/>
+        </p:nvSpPr>
+        <p:spPr>
+          <a:xfrm>
+            <a:off x="6971756" y="5680813"/>
+            <a:ext cx="3129722" cy="954107"/>
+          </a:xfrm>
+          <a:prstGeom prst="rect">
+            <a:avLst/>
+          </a:prstGeom>
+          <a:noFill/>
+        </p:spPr>
+        <p:txBody>
+          <a:bodyPr wrap="square" rtlCol="0">
+            <a:spAutoFit/>
+          </a:bodyPr>
+          <a:lstStyle/>
+          <a:p>
+            <a:pPr marL="176822" indent="-176822">
+              <a:buFont typeface="Arial" panose="020B0604020202020204" pitchFamily="34" charset="0"/>
+              <a:buChar char="•"/>
+            </a:pPr>
+            <a:r>
+              <a:rPr lang="en-US" sz="1400" dirty="0"/>
+              <a:t>Freshwater flow is one of the controlling factors in the estuary</a:t>
+            </a:r>
+          </a:p>
+          <a:p>
+            <a:pPr marL="176822" indent="-176822">
+              <a:buFont typeface="Arial" panose="020B0604020202020204" pitchFamily="34" charset="0"/>
+              <a:buChar char="•"/>
+            </a:pPr>
+            <a:r>
+              <a:rPr lang="en-US" sz="1400" dirty="0"/>
+              <a:t>Winter flow is driven primarily by rainfall and upstream dam releases.</a:t>
+            </a:r>
+          </a:p>
+        </p:txBody>
+      </p:sp>
+      <p:sp>
+        <p:nvSpPr>
+          <p:cNvPr id="21" name="TextBox 20">
+            <a:extLst>
+              <a:ext uri="{FF2B5EF4-FFF2-40B4-BE49-F238E27FC236}">
+                <a16:creationId xmlns:a16="http://schemas.microsoft.com/office/drawing/2014/main" id="{4A448C76-C9D5-4116-B87C-A3149D299CD0}"/>
+              </a:ext>
+            </a:extLst>
+          </p:cNvPr>
+          <p:cNvSpPr txBox="1"/>
+          <p:nvPr/>
+        </p:nvSpPr>
+        <p:spPr>
+          <a:xfrm>
+            <a:off x="3330860" y="2697882"/>
+            <a:ext cx="2191113" cy="359009"/>
+          </a:xfrm>
+          <a:prstGeom prst="rect">
+            <a:avLst/>
+          </a:prstGeom>
+          <a:noFill/>
+        </p:spPr>
+        <p:txBody>
+          <a:bodyPr wrap="none" rtlCol="0">
+            <a:spAutoFit/>
+          </a:bodyPr>
+          <a:lstStyle/>
+          <a:p>
+            <a:r>
+              <a:rPr lang="en-US" sz="1733" dirty="0"/>
+              <a:t>Regions of the Estuary</a:t>
+            </a:r>
+          </a:p>
+        </p:txBody>
+      </p:sp>
+      <p:sp>
+        <p:nvSpPr>
+          <p:cNvPr id="22" name="TextBox 21">
+            <a:extLst>
+              <a:ext uri="{FF2B5EF4-FFF2-40B4-BE49-F238E27FC236}">
+                <a16:creationId xmlns:a16="http://schemas.microsoft.com/office/drawing/2014/main" id="{0CA1EF9C-12C6-423E-851E-1DF632AB30C8}"/>
+              </a:ext>
+            </a:extLst>
+          </p:cNvPr>
+          <p:cNvSpPr txBox="1"/>
+          <p:nvPr/>
+        </p:nvSpPr>
+        <p:spPr>
+          <a:xfrm>
+            <a:off x="3110576" y="6084173"/>
+            <a:ext cx="3696626" cy="1600438"/>
+          </a:xfrm>
+          <a:prstGeom prst="rect">
+            <a:avLst/>
+          </a:prstGeom>
+          <a:noFill/>
+        </p:spPr>
+        <p:txBody>
+          <a:bodyPr wrap="square" rtlCol="0">
+            <a:spAutoFit/>
+          </a:bodyPr>
+          <a:lstStyle/>
+          <a:p>
+            <a:pPr marL="176822" indent="-176822">
+              <a:buFont typeface="Arial" panose="020B0604020202020204" pitchFamily="34" charset="0"/>
+              <a:buChar char="•"/>
+            </a:pPr>
+            <a:r>
+              <a:rPr lang="en-US" sz="1400" dirty="0"/>
+              <a:t>San Pablo Bay is salty, similar to San Francisco Bay, with influence from the Pacific Ocean.</a:t>
+            </a:r>
+          </a:p>
+          <a:p>
+            <a:pPr marL="176822" indent="-176822">
+              <a:buFont typeface="Arial" panose="020B0604020202020204" pitchFamily="34" charset="0"/>
+              <a:buChar char="•"/>
+            </a:pPr>
+            <a:r>
+              <a:rPr lang="en-US" sz="1400" dirty="0"/>
+              <a:t>Suisun is brackish in the summer, fresher in the winter/spring, and contains a lot of wetlands.</a:t>
+            </a:r>
+          </a:p>
+          <a:p>
+            <a:pPr marL="176822" indent="-176822">
+              <a:buFont typeface="Arial" panose="020B0604020202020204" pitchFamily="34" charset="0"/>
+              <a:buChar char="•"/>
+            </a:pPr>
+            <a:r>
+              <a:rPr lang="en-US" sz="1400" dirty="0"/>
+              <a:t>The Delta is fresh, with many distributary channels</a:t>
+            </a:r>
+          </a:p>
+        </p:txBody>
+      </p:sp>
+      <p:sp>
+        <p:nvSpPr>
+          <p:cNvPr id="23" name="TextBox 22">
+            <a:extLst>
+              <a:ext uri="{FF2B5EF4-FFF2-40B4-BE49-F238E27FC236}">
+                <a16:creationId xmlns:a16="http://schemas.microsoft.com/office/drawing/2014/main" id="{E6CBE8F5-B43C-45A5-9390-915E77A88028}"/>
+              </a:ext>
+            </a:extLst>
+          </p:cNvPr>
+          <p:cNvSpPr txBox="1"/>
+          <p:nvPr/>
+        </p:nvSpPr>
+        <p:spPr>
+          <a:xfrm>
+            <a:off x="511325" y="2986504"/>
+            <a:ext cx="2043530" cy="1463478"/>
+          </a:xfrm>
+          <a:prstGeom prst="rect">
+            <a:avLst/>
+          </a:prstGeom>
+          <a:noFill/>
+        </p:spPr>
+        <p:txBody>
+          <a:bodyPr wrap="square" rtlCol="0">
+            <a:spAutoFit/>
+          </a:bodyPr>
+          <a:lstStyle/>
+          <a:p>
+            <a:r>
+              <a:rPr lang="en-US" sz="1485" dirty="0">
+                <a:hlinkClick r:id="rId3" action="ppaction://hlinksldjump"/>
+              </a:rPr>
+              <a:t>Secchi Depth</a:t>
+            </a:r>
+            <a:r>
+              <a:rPr lang="en-US" sz="1485" dirty="0"/>
+              <a:t>……………..1</a:t>
+            </a:r>
+          </a:p>
+          <a:p>
+            <a:r>
+              <a:rPr lang="en-US" sz="1485" dirty="0">
+                <a:hlinkClick r:id="rId4" action="ppaction://hlinksldjump"/>
+              </a:rPr>
+              <a:t>Temperature</a:t>
+            </a:r>
+            <a:r>
+              <a:rPr lang="en-US" sz="1485" dirty="0"/>
+              <a:t>……………..2</a:t>
+            </a:r>
+          </a:p>
+          <a:p>
+            <a:r>
+              <a:rPr lang="en-US" sz="1485" dirty="0">
+                <a:hlinkClick r:id="rId5" action="ppaction://hlinksldjump"/>
+              </a:rPr>
+              <a:t>Chlorophyll</a:t>
+            </a:r>
+            <a:r>
+              <a:rPr lang="en-US" sz="1485" dirty="0"/>
+              <a:t>………………..3</a:t>
+            </a:r>
+          </a:p>
+          <a:p>
+            <a:r>
+              <a:rPr lang="en-US" sz="1485" dirty="0">
+                <a:hlinkClick r:id="rId6" action="ppaction://hlinksldjump"/>
+              </a:rPr>
+              <a:t>Zooplankton</a:t>
+            </a:r>
+            <a:r>
+              <a:rPr lang="en-US" sz="1485" dirty="0"/>
+              <a:t>………………4</a:t>
+            </a:r>
+          </a:p>
+          <a:p>
+            <a:r>
+              <a:rPr lang="en-US" sz="1485" dirty="0">
+                <a:hlinkClick r:id="rId7" action="ppaction://hlinksldjump"/>
+              </a:rPr>
+              <a:t>Fish</a:t>
+            </a:r>
+            <a:r>
+              <a:rPr lang="en-US" sz="1485" dirty="0"/>
+              <a:t>……………………………5</a:t>
+            </a:r>
+          </a:p>
+          <a:p>
+            <a:r>
+              <a:rPr lang="en-US" sz="1485" dirty="0">
+                <a:hlinkClick r:id="rId8" action="ppaction://hlinksldjump"/>
+              </a:rPr>
+              <a:t>Recent Trends</a:t>
+            </a:r>
+            <a:r>
+              <a:rPr lang="en-US" sz="1485" dirty="0"/>
+              <a:t>….………..6</a:t>
             </a:r>
           </a:p>
         </p:txBody>
       </p:sp>
       <p:pic>
         <p:nvPicPr>
-          <p:cNvPr id="11" name="Picture 10">
+          <p:cNvPr id="4" name="Picture 3">
             <a:extLst>
               <a:ext uri="{FF2B5EF4-FFF2-40B4-BE49-F238E27FC236}">
-                <a16:creationId xmlns:a16="http://schemas.microsoft.com/office/drawing/2014/main" id="{D391B6D6-A86E-4196-BC69-68262B4CEFE4}"/>
+                <a16:creationId xmlns:a16="http://schemas.microsoft.com/office/drawing/2014/main" id="{E239B59A-13B0-4C2D-9561-229E1A398742}"/>
               </a:ext>
             </a:extLst>
           </p:cNvPr>
@@ -4179,311 +5285,33 @@
           <p:nvPr/>
         </p:nvPicPr>
         <p:blipFill>
-          <a:blip r:embed="rId3"/>
+          <a:blip r:embed="rId9">
+            <a:extLst>
+              <a:ext uri="{28A0092B-C50C-407E-A947-70E740481C1C}">
+                <a14:useLocalDpi xmlns:a14="http://schemas.microsoft.com/office/drawing/2010/main" val="0"/>
+              </a:ext>
+            </a:extLst>
+          </a:blip>
           <a:stretch>
             <a:fillRect/>
           </a:stretch>
         </p:blipFill>
         <p:spPr>
           <a:xfrm>
-            <a:off x="4880437" y="3778273"/>
-            <a:ext cx="4479401" cy="2660433"/>
+            <a:off x="703271" y="571335"/>
+            <a:ext cx="1027644" cy="990275"/>
           </a:xfrm>
           <a:prstGeom prst="rect">
             <a:avLst/>
           </a:prstGeom>
         </p:spPr>
       </p:pic>
-      <p:sp>
-        <p:nvSpPr>
-          <p:cNvPr id="19" name="TextBox 18">
-            <a:extLst>
-              <a:ext uri="{FF2B5EF4-FFF2-40B4-BE49-F238E27FC236}">
-                <a16:creationId xmlns:a16="http://schemas.microsoft.com/office/drawing/2014/main" id="{93CA7E69-9849-481A-972D-0A421B7CAF5E}"/>
-              </a:ext>
-            </a:extLst>
-          </p:cNvPr>
-          <p:cNvSpPr txBox="1"/>
-          <p:nvPr/>
-        </p:nvSpPr>
-        <p:spPr>
-          <a:xfrm>
-            <a:off x="5231757" y="8657166"/>
-            <a:ext cx="5058137" cy="369332"/>
-          </a:xfrm>
-          <a:prstGeom prst="rect">
-            <a:avLst/>
-          </a:prstGeom>
-          <a:noFill/>
-        </p:spPr>
-        <p:txBody>
-          <a:bodyPr wrap="square" rtlCol="0">
-            <a:spAutoFit/>
-          </a:bodyPr>
-          <a:lstStyle/>
-          <a:p>
-            <a:r>
-              <a:rPr lang="en-US" dirty="0"/>
-              <a:t>DISCLAIMER: Use this data at your own risk</a:t>
-            </a:r>
-          </a:p>
-        </p:txBody>
-      </p:sp>
-      <p:sp>
-        <p:nvSpPr>
-          <p:cNvPr id="20" name="TextBox 19">
-            <a:extLst>
-              <a:ext uri="{FF2B5EF4-FFF2-40B4-BE49-F238E27FC236}">
-                <a16:creationId xmlns:a16="http://schemas.microsoft.com/office/drawing/2014/main" id="{41429D89-1B46-4039-80EB-BA87FFC2F9B6}"/>
-              </a:ext>
-            </a:extLst>
-          </p:cNvPr>
-          <p:cNvSpPr txBox="1"/>
-          <p:nvPr/>
-        </p:nvSpPr>
-        <p:spPr>
-          <a:xfrm>
-            <a:off x="10686426" y="6674921"/>
-            <a:ext cx="5058137" cy="1200329"/>
-          </a:xfrm>
-          <a:prstGeom prst="rect">
-            <a:avLst/>
-          </a:prstGeom>
-          <a:noFill/>
-        </p:spPr>
-        <p:txBody>
-          <a:bodyPr wrap="square" rtlCol="0">
-            <a:spAutoFit/>
-          </a:bodyPr>
-          <a:lstStyle/>
-          <a:p>
-            <a:pPr marL="285750" indent="-285750">
-              <a:buFont typeface="Arial" panose="020B0604020202020204" pitchFamily="34" charset="0"/>
-              <a:buChar char="•"/>
-            </a:pPr>
-            <a:r>
-              <a:rPr lang="en-US" dirty="0"/>
-              <a:t>Freshwater flow is one of the controlling factors in the estuary</a:t>
-            </a:r>
-          </a:p>
-          <a:p>
-            <a:pPr marL="285750" indent="-285750">
-              <a:buFont typeface="Arial" panose="020B0604020202020204" pitchFamily="34" charset="0"/>
-              <a:buChar char="•"/>
-            </a:pPr>
-            <a:r>
-              <a:rPr lang="en-US" dirty="0"/>
-              <a:t>Winter flow is driven primarily by rainfall and upstream dam releases.</a:t>
-            </a:r>
-          </a:p>
-        </p:txBody>
-      </p:sp>
-      <p:sp>
-        <p:nvSpPr>
-          <p:cNvPr id="21" name="TextBox 20">
-            <a:extLst>
-              <a:ext uri="{FF2B5EF4-FFF2-40B4-BE49-F238E27FC236}">
-                <a16:creationId xmlns:a16="http://schemas.microsoft.com/office/drawing/2014/main" id="{4A448C76-C9D5-4116-B87C-A3149D299CD0}"/>
-              </a:ext>
-            </a:extLst>
-          </p:cNvPr>
-          <p:cNvSpPr txBox="1"/>
-          <p:nvPr/>
-        </p:nvSpPr>
-        <p:spPr>
-          <a:xfrm>
-            <a:off x="5254363" y="3255053"/>
-            <a:ext cx="3433376" cy="523220"/>
-          </a:xfrm>
-          <a:prstGeom prst="rect">
-            <a:avLst/>
-          </a:prstGeom>
-          <a:noFill/>
-        </p:spPr>
-        <p:txBody>
-          <a:bodyPr wrap="none" rtlCol="0">
-            <a:spAutoFit/>
-          </a:bodyPr>
-          <a:lstStyle/>
-          <a:p>
-            <a:r>
-              <a:rPr lang="en-US" sz="2800" dirty="0"/>
-              <a:t>Regions of the Estuary</a:t>
-            </a:r>
-          </a:p>
-        </p:txBody>
-      </p:sp>
-      <p:sp>
-        <p:nvSpPr>
-          <p:cNvPr id="22" name="TextBox 21">
-            <a:extLst>
-              <a:ext uri="{FF2B5EF4-FFF2-40B4-BE49-F238E27FC236}">
-                <a16:creationId xmlns:a16="http://schemas.microsoft.com/office/drawing/2014/main" id="{0CA1EF9C-12C6-423E-851E-1DF632AB30C8}"/>
-              </a:ext>
-            </a:extLst>
-          </p:cNvPr>
-          <p:cNvSpPr txBox="1"/>
-          <p:nvPr/>
-        </p:nvSpPr>
-        <p:spPr>
-          <a:xfrm>
-            <a:off x="4562115" y="6674921"/>
-            <a:ext cx="5637847" cy="1477328"/>
-          </a:xfrm>
-          <a:prstGeom prst="rect">
-            <a:avLst/>
-          </a:prstGeom>
-          <a:noFill/>
-        </p:spPr>
-        <p:txBody>
-          <a:bodyPr wrap="square" rtlCol="0">
-            <a:spAutoFit/>
-          </a:bodyPr>
-          <a:lstStyle/>
-          <a:p>
-            <a:pPr marL="285750" indent="-285750">
-              <a:buFont typeface="Arial" panose="020B0604020202020204" pitchFamily="34" charset="0"/>
-              <a:buChar char="•"/>
-            </a:pPr>
-            <a:r>
-              <a:rPr lang="en-US" dirty="0"/>
-              <a:t>San Pablo Bay is salty, similar to San Francisco Bay, with influence from the Pacific Ocean.</a:t>
-            </a:r>
-          </a:p>
-          <a:p>
-            <a:pPr marL="285750" indent="-285750">
-              <a:buFont typeface="Arial" panose="020B0604020202020204" pitchFamily="34" charset="0"/>
-              <a:buChar char="•"/>
-            </a:pPr>
-            <a:r>
-              <a:rPr lang="en-US" dirty="0"/>
-              <a:t>Suisun is brackish in the summer, fresher in the winter/spring, and contains a lot of wetlands.</a:t>
-            </a:r>
-          </a:p>
-          <a:p>
-            <a:pPr marL="285750" indent="-285750">
-              <a:buFont typeface="Arial" panose="020B0604020202020204" pitchFamily="34" charset="0"/>
-              <a:buChar char="•"/>
-            </a:pPr>
-            <a:r>
-              <a:rPr lang="en-US" dirty="0"/>
-              <a:t>The Delta is fresh, with many distributary channels</a:t>
-            </a:r>
-          </a:p>
-        </p:txBody>
-      </p:sp>
-      <p:sp>
-        <p:nvSpPr>
-          <p:cNvPr id="23" name="TextBox 22">
-            <a:extLst>
-              <a:ext uri="{FF2B5EF4-FFF2-40B4-BE49-F238E27FC236}">
-                <a16:creationId xmlns:a16="http://schemas.microsoft.com/office/drawing/2014/main" id="{E6CBE8F5-B43C-45A5-9390-915E77A88028}"/>
-              </a:ext>
-            </a:extLst>
-          </p:cNvPr>
-          <p:cNvSpPr txBox="1"/>
-          <p:nvPr/>
-        </p:nvSpPr>
-        <p:spPr>
-          <a:xfrm>
-            <a:off x="268369" y="4087938"/>
-            <a:ext cx="5058137" cy="3046988"/>
-          </a:xfrm>
-          <a:prstGeom prst="rect">
-            <a:avLst/>
-          </a:prstGeom>
-          <a:noFill/>
-        </p:spPr>
-        <p:txBody>
-          <a:bodyPr wrap="square" rtlCol="0">
-            <a:spAutoFit/>
-          </a:bodyPr>
-          <a:lstStyle/>
-          <a:p>
-            <a:pPr algn="ctr"/>
-            <a:r>
-              <a:rPr lang="en-US" sz="2400" b="1" dirty="0"/>
-              <a:t>Contents</a:t>
-            </a:r>
-          </a:p>
-          <a:p>
-            <a:pPr algn="ctr"/>
-            <a:r>
-              <a:rPr lang="en-US" sz="2400" dirty="0">
-                <a:hlinkClick r:id="rId4" action="ppaction://hlinksldjump"/>
-              </a:rPr>
-              <a:t>Secchi Depth</a:t>
-            </a:r>
-            <a:endParaRPr lang="en-US" sz="2400" dirty="0"/>
-          </a:p>
-          <a:p>
-            <a:pPr algn="ctr"/>
-            <a:r>
-              <a:rPr lang="en-US" sz="2400" dirty="0">
-                <a:hlinkClick r:id="rId5" action="ppaction://hlinksldjump"/>
-              </a:rPr>
-              <a:t>Temperature</a:t>
-            </a:r>
-            <a:endParaRPr lang="en-US" sz="2400" dirty="0"/>
-          </a:p>
-          <a:p>
-            <a:pPr algn="ctr"/>
-            <a:r>
-              <a:rPr lang="en-US" sz="2400" dirty="0">
-                <a:hlinkClick r:id="rId6" action="ppaction://hlinksldjump"/>
-              </a:rPr>
-              <a:t>Chlorophyll</a:t>
-            </a:r>
-            <a:endParaRPr lang="en-US" sz="2400" dirty="0"/>
-          </a:p>
-          <a:p>
-            <a:pPr algn="ctr"/>
-            <a:r>
-              <a:rPr lang="en-US" sz="2400" dirty="0">
-                <a:hlinkClick r:id="rId7" action="ppaction://hlinksldjump"/>
-              </a:rPr>
-              <a:t>Zooplankton</a:t>
-            </a:r>
-            <a:endParaRPr lang="en-US" sz="2400" dirty="0"/>
-          </a:p>
-          <a:p>
-            <a:pPr algn="ctr"/>
-            <a:r>
-              <a:rPr lang="en-US" sz="2400" dirty="0">
-                <a:hlinkClick r:id="rId8" action="ppaction://hlinksldjump"/>
-              </a:rPr>
-              <a:t>Smelt</a:t>
-            </a:r>
-            <a:endParaRPr lang="en-US" sz="2400" dirty="0"/>
-          </a:p>
-          <a:p>
-            <a:pPr algn="ctr"/>
-            <a:r>
-              <a:rPr lang="en-US" sz="2400" dirty="0">
-                <a:hlinkClick r:id="rId9" action="ppaction://hlinksldjump"/>
-              </a:rPr>
-              <a:t>Salmon</a:t>
-            </a:r>
-            <a:endParaRPr lang="en-US" sz="2400" dirty="0"/>
-          </a:p>
-          <a:p>
-            <a:pPr algn="ctr"/>
-            <a:r>
-              <a:rPr lang="en-US" sz="2400" dirty="0">
-                <a:hlinkClick r:id="" action="ppaction://noaction"/>
-              </a:rPr>
-              <a:t>Other Fish</a:t>
-            </a:r>
-            <a:endParaRPr lang="en-US" sz="2400" dirty="0"/>
-          </a:p>
-        </p:txBody>
-      </p:sp>
       <p:pic>
         <p:nvPicPr>
-          <p:cNvPr id="4" name="Picture 3">
+          <p:cNvPr id="6" name="Picture 5">
             <a:extLst>
               <a:ext uri="{FF2B5EF4-FFF2-40B4-BE49-F238E27FC236}">
-                <a16:creationId xmlns:a16="http://schemas.microsoft.com/office/drawing/2014/main" id="{E239B59A-13B0-4C2D-9561-229E1A398742}"/>
+                <a16:creationId xmlns:a16="http://schemas.microsoft.com/office/drawing/2014/main" id="{F7E24920-91C9-4CEF-9DFC-A31F3A8C9F50}"/>
               </a:ext>
             </a:extLst>
           </p:cNvPr>
@@ -4506,14 +5334,316 @@
         </p:blipFill>
         <p:spPr>
           <a:xfrm>
-            <a:off x="1446836" y="537045"/>
-            <a:ext cx="1660838" cy="1600444"/>
+            <a:off x="3312232" y="3059822"/>
+            <a:ext cx="3293315" cy="2993923"/>
           </a:xfrm>
           <a:prstGeom prst="rect">
             <a:avLst/>
           </a:prstGeom>
         </p:spPr>
       </p:pic>
+      <p:sp>
+        <p:nvSpPr>
+          <p:cNvPr id="7" name="Oval 6">
+            <a:extLst>
+              <a:ext uri="{FF2B5EF4-FFF2-40B4-BE49-F238E27FC236}">
+                <a16:creationId xmlns:a16="http://schemas.microsoft.com/office/drawing/2014/main" id="{7DD6A998-369D-4E0F-885B-593DBBCE4698}"/>
+              </a:ext>
+            </a:extLst>
+          </p:cNvPr>
+          <p:cNvSpPr/>
+          <p:nvPr/>
+        </p:nvSpPr>
+        <p:spPr>
+          <a:xfrm>
+            <a:off x="5266974" y="3221702"/>
+            <a:ext cx="1179871" cy="2231257"/>
+          </a:xfrm>
+          <a:prstGeom prst="ellipse">
+            <a:avLst/>
+          </a:prstGeom>
+          <a:noFill/>
+          <a:ln>
+            <a:solidFill>
+              <a:srgbClr val="FF0000"/>
+            </a:solidFill>
+          </a:ln>
+        </p:spPr>
+        <p:style>
+          <a:lnRef idx="2">
+            <a:schemeClr val="accent1">
+              <a:shade val="50000"/>
+            </a:schemeClr>
+          </a:lnRef>
+          <a:fillRef idx="1">
+            <a:schemeClr val="accent1"/>
+          </a:fillRef>
+          <a:effectRef idx="0">
+            <a:schemeClr val="accent1"/>
+          </a:effectRef>
+          <a:fontRef idx="minor">
+            <a:schemeClr val="lt1"/>
+          </a:fontRef>
+        </p:style>
+        <p:txBody>
+          <a:bodyPr rtlCol="0" anchor="ctr"/>
+          <a:lstStyle/>
+          <a:p>
+            <a:pPr algn="ctr"/>
+            <a:endParaRPr lang="en-US"/>
+          </a:p>
+        </p:txBody>
+      </p:sp>
+      <p:sp>
+        <p:nvSpPr>
+          <p:cNvPr id="16" name="Oval 15">
+            <a:extLst>
+              <a:ext uri="{FF2B5EF4-FFF2-40B4-BE49-F238E27FC236}">
+                <a16:creationId xmlns:a16="http://schemas.microsoft.com/office/drawing/2014/main" id="{87A3A34E-F8C6-4E75-B0D9-A389732471A8}"/>
+              </a:ext>
+            </a:extLst>
+          </p:cNvPr>
+          <p:cNvSpPr/>
+          <p:nvPr/>
+        </p:nvSpPr>
+        <p:spPr>
+          <a:xfrm>
+            <a:off x="4201491" y="3830264"/>
+            <a:ext cx="1065483" cy="935036"/>
+          </a:xfrm>
+          <a:prstGeom prst="ellipse">
+            <a:avLst/>
+          </a:prstGeom>
+          <a:noFill/>
+          <a:ln>
+            <a:solidFill>
+              <a:srgbClr val="7030A0"/>
+            </a:solidFill>
+          </a:ln>
+        </p:spPr>
+        <p:style>
+          <a:lnRef idx="2">
+            <a:schemeClr val="accent1">
+              <a:shade val="50000"/>
+            </a:schemeClr>
+          </a:lnRef>
+          <a:fillRef idx="1">
+            <a:schemeClr val="accent1"/>
+          </a:fillRef>
+          <a:effectRef idx="0">
+            <a:schemeClr val="accent1"/>
+          </a:effectRef>
+          <a:fontRef idx="minor">
+            <a:schemeClr val="lt1"/>
+          </a:fontRef>
+        </p:style>
+        <p:txBody>
+          <a:bodyPr rtlCol="0" anchor="ctr"/>
+          <a:lstStyle/>
+          <a:p>
+            <a:pPr algn="ctr"/>
+            <a:endParaRPr lang="en-US"/>
+          </a:p>
+        </p:txBody>
+      </p:sp>
+      <p:sp>
+        <p:nvSpPr>
+          <p:cNvPr id="17" name="Oval 16">
+            <a:extLst>
+              <a:ext uri="{FF2B5EF4-FFF2-40B4-BE49-F238E27FC236}">
+                <a16:creationId xmlns:a16="http://schemas.microsoft.com/office/drawing/2014/main" id="{BB7D5BFC-EF3C-4B6C-8482-3059EFB15EF5}"/>
+              </a:ext>
+            </a:extLst>
+          </p:cNvPr>
+          <p:cNvSpPr/>
+          <p:nvPr/>
+        </p:nvSpPr>
+        <p:spPr>
+          <a:xfrm>
+            <a:off x="3308079" y="3946767"/>
+            <a:ext cx="947407" cy="935036"/>
+          </a:xfrm>
+          <a:prstGeom prst="ellipse">
+            <a:avLst/>
+          </a:prstGeom>
+          <a:noFill/>
+          <a:ln>
+            <a:solidFill>
+              <a:srgbClr val="00B050"/>
+            </a:solidFill>
+          </a:ln>
+        </p:spPr>
+        <p:style>
+          <a:lnRef idx="2">
+            <a:schemeClr val="accent1">
+              <a:shade val="50000"/>
+            </a:schemeClr>
+          </a:lnRef>
+          <a:fillRef idx="1">
+            <a:schemeClr val="accent1"/>
+          </a:fillRef>
+          <a:effectRef idx="0">
+            <a:schemeClr val="accent1"/>
+          </a:effectRef>
+          <a:fontRef idx="minor">
+            <a:schemeClr val="lt1"/>
+          </a:fontRef>
+        </p:style>
+        <p:txBody>
+          <a:bodyPr rtlCol="0" anchor="ctr"/>
+          <a:lstStyle/>
+          <a:p>
+            <a:pPr algn="ctr"/>
+            <a:endParaRPr lang="en-US"/>
+          </a:p>
+        </p:txBody>
+      </p:sp>
+      <p:sp>
+        <p:nvSpPr>
+          <p:cNvPr id="8" name="TextBox 7">
+            <a:extLst>
+              <a:ext uri="{FF2B5EF4-FFF2-40B4-BE49-F238E27FC236}">
+                <a16:creationId xmlns:a16="http://schemas.microsoft.com/office/drawing/2014/main" id="{C7B4A30A-E2E5-45B2-8DAC-2B331E28073D}"/>
+              </a:ext>
+            </a:extLst>
+          </p:cNvPr>
+          <p:cNvSpPr txBox="1"/>
+          <p:nvPr/>
+        </p:nvSpPr>
+        <p:spPr>
+          <a:xfrm>
+            <a:off x="3280344" y="3691036"/>
+            <a:ext cx="983283" cy="338554"/>
+          </a:xfrm>
+          <a:prstGeom prst="rect">
+            <a:avLst/>
+          </a:prstGeom>
+          <a:noFill/>
+        </p:spPr>
+        <p:txBody>
+          <a:bodyPr wrap="none" rtlCol="0">
+            <a:spAutoFit/>
+          </a:bodyPr>
+          <a:lstStyle/>
+          <a:p>
+            <a:r>
+              <a:rPr lang="en-US" sz="1600" dirty="0">
+                <a:latin typeface="+mj-lt"/>
+              </a:rPr>
+              <a:t>San Pablo</a:t>
+            </a:r>
+          </a:p>
+        </p:txBody>
+      </p:sp>
+      <p:sp>
+        <p:nvSpPr>
+          <p:cNvPr id="24" name="TextBox 23">
+            <a:extLst>
+              <a:ext uri="{FF2B5EF4-FFF2-40B4-BE49-F238E27FC236}">
+                <a16:creationId xmlns:a16="http://schemas.microsoft.com/office/drawing/2014/main" id="{42AAD0A6-482E-469B-BAFB-4A8C2DE69485}"/>
+              </a:ext>
+            </a:extLst>
+          </p:cNvPr>
+          <p:cNvSpPr txBox="1"/>
+          <p:nvPr/>
+        </p:nvSpPr>
+        <p:spPr>
+          <a:xfrm>
+            <a:off x="4371793" y="3608907"/>
+            <a:ext cx="724878" cy="338554"/>
+          </a:xfrm>
+          <a:prstGeom prst="rect">
+            <a:avLst/>
+          </a:prstGeom>
+          <a:noFill/>
+        </p:spPr>
+        <p:txBody>
+          <a:bodyPr wrap="none" rtlCol="0">
+            <a:spAutoFit/>
+          </a:bodyPr>
+          <a:lstStyle/>
+          <a:p>
+            <a:r>
+              <a:rPr lang="en-US" sz="1600" dirty="0">
+                <a:latin typeface="+mj-lt"/>
+              </a:rPr>
+              <a:t>Suisun</a:t>
+            </a:r>
+          </a:p>
+        </p:txBody>
+      </p:sp>
+      <p:sp>
+        <p:nvSpPr>
+          <p:cNvPr id="25" name="TextBox 24">
+            <a:extLst>
+              <a:ext uri="{FF2B5EF4-FFF2-40B4-BE49-F238E27FC236}">
+                <a16:creationId xmlns:a16="http://schemas.microsoft.com/office/drawing/2014/main" id="{7120DF91-3E6A-4B3F-BC48-F52CD674EC54}"/>
+              </a:ext>
+            </a:extLst>
+          </p:cNvPr>
+          <p:cNvSpPr txBox="1"/>
+          <p:nvPr/>
+        </p:nvSpPr>
+        <p:spPr>
+          <a:xfrm>
+            <a:off x="5521973" y="3295083"/>
+            <a:ext cx="970330" cy="338554"/>
+          </a:xfrm>
+          <a:prstGeom prst="rect">
+            <a:avLst/>
+          </a:prstGeom>
+          <a:noFill/>
+        </p:spPr>
+        <p:txBody>
+          <a:bodyPr wrap="none" rtlCol="0">
+            <a:spAutoFit/>
+          </a:bodyPr>
+          <a:lstStyle/>
+          <a:p>
+            <a:r>
+              <a:rPr lang="en-US" sz="1600" dirty="0">
+                <a:latin typeface="+mj-lt"/>
+              </a:rPr>
+              <a:t>The Delta</a:t>
+            </a:r>
+          </a:p>
+        </p:txBody>
+      </p:sp>
+      <p:sp>
+        <p:nvSpPr>
+          <p:cNvPr id="26" name="TextBox 25">
+            <a:extLst>
+              <a:ext uri="{FF2B5EF4-FFF2-40B4-BE49-F238E27FC236}">
+                <a16:creationId xmlns:a16="http://schemas.microsoft.com/office/drawing/2014/main" id="{8B4D2A53-3E2D-4DF9-AEF9-E2776EA610D8}"/>
+              </a:ext>
+            </a:extLst>
+          </p:cNvPr>
+          <p:cNvSpPr txBox="1"/>
+          <p:nvPr/>
+        </p:nvSpPr>
+        <p:spPr>
+          <a:xfrm>
+            <a:off x="511325" y="2697880"/>
+            <a:ext cx="992516" cy="359009"/>
+          </a:xfrm>
+          <a:prstGeom prst="rect">
+            <a:avLst/>
+          </a:prstGeom>
+          <a:noFill/>
+        </p:spPr>
+        <p:txBody>
+          <a:bodyPr wrap="none" rtlCol="0">
+            <a:spAutoFit/>
+          </a:bodyPr>
+          <a:lstStyle/>
+          <a:p>
+            <a:r>
+              <a:rPr lang="en-US" sz="1733" dirty="0"/>
+              <a:t>Contents</a:t>
+            </a:r>
+          </a:p>
+        </p:txBody>
+      </p:sp>
     </p:spTree>
     <p:extLst>
       <p:ext uri="{BB962C8B-B14F-4D97-AF65-F5344CB8AC3E}">
@@ -4558,8 +5688,8 @@
         </p:nvSpPr>
         <p:spPr>
           <a:xfrm>
-            <a:off x="492901" y="4067675"/>
-            <a:ext cx="6248370" cy="1113895"/>
+            <a:off x="304982" y="3574149"/>
+            <a:ext cx="3866179" cy="724557"/>
           </a:xfrm>
           <a:prstGeom prst="rect">
             <a:avLst/>
@@ -4573,12 +5703,12 @@
           <a:lstStyle/>
           <a:p>
             <a:r>
-              <a:rPr lang="en-US" sz="3319" b="1" dirty="0"/>
+              <a:rPr lang="en-US" sz="2054" b="1" dirty="0"/>
               <a:t>San Pablo Bay</a:t>
             </a:r>
           </a:p>
           <a:p>
-            <a:endParaRPr lang="en-US" sz="3319" b="1" dirty="0"/>
+            <a:endParaRPr lang="en-US" sz="2054" b="1" dirty="0"/>
           </a:p>
         </p:txBody>
       </p:sp>
@@ -4600,8 +5730,8 @@
         </p:nvSpPr>
         <p:spPr>
           <a:xfrm>
-            <a:off x="3359353" y="-316321"/>
-            <a:ext cx="8192171" cy="1951298"/>
+            <a:off x="2238071" y="213475"/>
+            <a:ext cx="5068906" cy="1207366"/>
           </a:xfrm>
         </p:spPr>
         <p:txBody>
@@ -4611,7 +5741,7 @@
           <a:lstStyle/>
           <a:p>
             <a:r>
-              <a:rPr lang="en-US" sz="6600" dirty="0"/>
+              <a:rPr lang="en-US" sz="5400" dirty="0"/>
               <a:t>Secchi Depth</a:t>
             </a:r>
           </a:p>
@@ -4635,13 +5765,13 @@
         </p:nvSpPr>
         <p:spPr>
           <a:xfrm>
-            <a:off x="1631507" y="57436"/>
-            <a:ext cx="12992986" cy="862278"/>
+            <a:off x="862012" y="130329"/>
+            <a:ext cx="8576956" cy="533535"/>
           </a:xfrm>
         </p:spPr>
         <p:txBody>
           <a:bodyPr>
-            <a:normAutofit/>
+            <a:normAutofit fontScale="85000" lnSpcReduction="10000"/>
           </a:bodyPr>
           <a:lstStyle/>
           <a:p>
@@ -4666,8 +5796,8 @@
         </p:nvSpPr>
         <p:spPr>
           <a:xfrm>
-            <a:off x="900380" y="1772449"/>
-            <a:ext cx="11136848" cy="1692771"/>
+            <a:off x="632206" y="1574428"/>
+            <a:ext cx="6890925" cy="1569660"/>
           </a:xfrm>
           <a:prstGeom prst="rect">
             <a:avLst/>
@@ -4680,27 +5810,27 @@
           </a:bodyPr>
           <a:lstStyle/>
           <a:p>
-            <a:pPr marL="406405" indent="-406405">
+            <a:pPr marL="251483" indent="-251483">
               <a:buFont typeface="Arial" panose="020B0604020202020204" pitchFamily="34" charset="0"/>
               <a:buChar char="•"/>
             </a:pPr>
             <a:r>
-              <a:rPr lang="en-US" sz="2000" dirty="0"/>
+              <a:rPr lang="en-US" sz="1600" dirty="0"/>
               <a:t>Organisms in this ecosystem are adapted to high turbidity conditions, and reductions in turbidity can have many negative ecological effects. Higher values for Secchi depth indicate lower turbidity.</a:t>
             </a:r>
           </a:p>
           <a:p>
-            <a:pPr marL="406405" indent="-406405">
+            <a:pPr marL="251483" indent="-251483">
               <a:buFont typeface="Arial" panose="020B0604020202020204" pitchFamily="34" charset="0"/>
               <a:buChar char="•"/>
             </a:pPr>
             <a:r>
-              <a:rPr lang="en-US" sz="2000" dirty="0"/>
+              <a:rPr lang="en-US" sz="1600" dirty="0"/>
               <a:t>Secchi depth is measured monthly by DWR’s Environmental monitoring program by dropping a black-and-white disk in the water until it disappears.</a:t>
             </a:r>
           </a:p>
           <a:p>
-            <a:endParaRPr lang="en-US" sz="2400" dirty="0"/>
+            <a:endParaRPr lang="en-US" sz="1600" dirty="0"/>
           </a:p>
         </p:txBody>
       </p:sp>
@@ -4718,8 +5848,8 @@
         </p:nvSpPr>
         <p:spPr>
           <a:xfrm>
-            <a:off x="6468804" y="4067675"/>
-            <a:ext cx="6248370" cy="1113895"/>
+            <a:off x="4002572" y="3574149"/>
+            <a:ext cx="3866179" cy="724557"/>
           </a:xfrm>
           <a:prstGeom prst="rect">
             <a:avLst/>
@@ -4733,12 +5863,12 @@
           <a:lstStyle/>
           <a:p>
             <a:r>
-              <a:rPr lang="en-US" sz="3319" b="1" dirty="0"/>
+              <a:rPr lang="en-US" sz="2054" b="1" dirty="0"/>
               <a:t>Suisun Bay</a:t>
             </a:r>
           </a:p>
           <a:p>
-            <a:endParaRPr lang="en-US" sz="3319" b="1" dirty="0"/>
+            <a:endParaRPr lang="en-US" sz="2054" b="1" dirty="0"/>
           </a:p>
         </p:txBody>
       </p:sp>
@@ -4756,8 +5886,8 @@
         </p:nvSpPr>
         <p:spPr>
           <a:xfrm>
-            <a:off x="11648232" y="4018024"/>
-            <a:ext cx="6248370" cy="1113895"/>
+            <a:off x="7207344" y="3543427"/>
+            <a:ext cx="3866179" cy="724557"/>
           </a:xfrm>
           <a:prstGeom prst="rect">
             <a:avLst/>
@@ -4771,12 +5901,12 @@
           <a:lstStyle/>
           <a:p>
             <a:r>
-              <a:rPr lang="en-US" sz="3319" b="1" dirty="0"/>
+              <a:rPr lang="en-US" sz="2054" b="1" dirty="0"/>
               <a:t>The Delta</a:t>
             </a:r>
           </a:p>
           <a:p>
-            <a:endParaRPr lang="en-US" sz="3319" b="1" dirty="0"/>
+            <a:endParaRPr lang="en-US" sz="2054" b="1" dirty="0"/>
           </a:p>
         </p:txBody>
       </p:sp>
@@ -4794,8 +5924,8 @@
         </p:nvSpPr>
         <p:spPr>
           <a:xfrm>
-            <a:off x="8947667" y="5233903"/>
-            <a:ext cx="7181065" cy="1149995"/>
+            <a:off x="5536369" y="4295753"/>
+            <a:ext cx="4443284" cy="746808"/>
           </a:xfrm>
           <a:prstGeom prst="rect">
             <a:avLst/>
@@ -4808,33 +5938,33 @@
           </a:bodyPr>
           <a:lstStyle/>
           <a:p>
-            <a:pPr marL="406405" indent="-406405">
+            <a:pPr marL="251483" indent="-251483">
               <a:buFont typeface="Arial" panose="020B0604020202020204" pitchFamily="34" charset="0"/>
               <a:buChar char="•"/>
             </a:pPr>
             <a:r>
-              <a:rPr lang="en-US" sz="2133" dirty="0"/>
+              <a:rPr lang="en-US" sz="1320" dirty="0"/>
               <a:t>Suisun bay is usually pretty </a:t>
             </a:r>
             <a:r>
-              <a:rPr lang="en-US" sz="2133" dirty="0" err="1"/>
+              <a:rPr lang="en-US" sz="1320" dirty="0" err="1"/>
               <a:t>murkey</a:t>
             </a:r>
             <a:r>
-              <a:rPr lang="en-US" sz="2133" dirty="0"/>
+              <a:rPr lang="en-US" sz="1320" dirty="0"/>
               <a:t>, meaning low </a:t>
             </a:r>
             <a:r>
-              <a:rPr lang="en-US" sz="2133" dirty="0" err="1"/>
+              <a:rPr lang="en-US" sz="1320" dirty="0" err="1"/>
               <a:t>secchi</a:t>
             </a:r>
             <a:r>
-              <a:rPr lang="en-US" sz="2133" dirty="0"/>
+              <a:rPr lang="en-US" sz="1320" dirty="0"/>
               <a:t> depth. </a:t>
             </a:r>
           </a:p>
           <a:p>
-            <a:endParaRPr lang="en-US" sz="2607" dirty="0"/>
+            <a:endParaRPr lang="en-US" sz="1613" dirty="0"/>
           </a:p>
         </p:txBody>
       </p:sp>
@@ -4852,8 +5982,8 @@
         </p:nvSpPr>
         <p:spPr>
           <a:xfrm>
-            <a:off x="12158595" y="8290053"/>
-            <a:ext cx="3970137" cy="1149995"/>
+            <a:off x="7523131" y="6186746"/>
+            <a:ext cx="2456522" cy="1077218"/>
           </a:xfrm>
           <a:prstGeom prst="rect">
             <a:avLst/>
@@ -4866,17 +5996,17 @@
           </a:bodyPr>
           <a:lstStyle/>
           <a:p>
-            <a:pPr marL="406405" indent="-406405">
+            <a:pPr marL="251483" indent="-251483">
               <a:buFont typeface="Arial" panose="020B0604020202020204" pitchFamily="34" charset="0"/>
               <a:buChar char="•"/>
             </a:pPr>
             <a:r>
-              <a:rPr lang="en-US" sz="2133" dirty="0"/>
+              <a:rPr lang="en-US" sz="1600" dirty="0"/>
               <a:t>The Delta has been getting clearer over time</a:t>
             </a:r>
           </a:p>
           <a:p>
-            <a:endParaRPr lang="en-US" sz="2607" dirty="0"/>
+            <a:endParaRPr lang="en-US" sz="1600" dirty="0"/>
           </a:p>
         </p:txBody>
       </p:sp>
@@ -4894,8 +6024,8 @@
         </p:nvSpPr>
         <p:spPr>
           <a:xfrm>
-            <a:off x="707436" y="8290053"/>
-            <a:ext cx="4151644" cy="821763"/>
+            <a:off x="437726" y="6186746"/>
+            <a:ext cx="2568830" cy="830997"/>
           </a:xfrm>
           <a:prstGeom prst="rect">
             <a:avLst/>
@@ -4908,17 +6038,17 @@
           </a:bodyPr>
           <a:lstStyle/>
           <a:p>
-            <a:pPr marL="406405" indent="-406405">
+            <a:pPr marL="251483" indent="-251483">
               <a:buFont typeface="Arial" panose="020B0604020202020204" pitchFamily="34" charset="0"/>
               <a:buChar char="•"/>
             </a:pPr>
             <a:r>
-              <a:rPr lang="en-US" sz="2133" dirty="0"/>
+              <a:rPr lang="en-US" sz="1600" dirty="0"/>
               <a:t>San Pablo bay is pretty clear. </a:t>
             </a:r>
           </a:p>
           <a:p>
-            <a:endParaRPr lang="en-US" sz="2607" dirty="0"/>
+            <a:endParaRPr lang="en-US" sz="1600" dirty="0"/>
           </a:p>
         </p:txBody>
       </p:sp>
@@ -4951,8 +6081,8 @@
         </p:blipFill>
         <p:spPr bwMode="auto">
           <a:xfrm>
-            <a:off x="12682229" y="1602935"/>
-            <a:ext cx="2922868" cy="1862285"/>
+            <a:off x="7333088" y="1416203"/>
+            <a:ext cx="2646565" cy="1686240"/>
           </a:xfrm>
           <a:prstGeom prst="rect">
             <a:avLst/>
@@ -4996,8 +6126,8 @@
         </p:blipFill>
         <p:spPr>
           <a:xfrm>
-            <a:off x="287078" y="4936532"/>
-            <a:ext cx="15841653" cy="3216049"/>
+            <a:off x="177630" y="4111755"/>
+            <a:ext cx="9802023" cy="1989930"/>
           </a:xfrm>
           <a:prstGeom prst="rect">
             <a:avLst/>
@@ -5018,8 +6148,8 @@
         </p:nvSpPr>
         <p:spPr>
           <a:xfrm>
-            <a:off x="6132082" y="8254565"/>
-            <a:ext cx="4151644" cy="1149995"/>
+            <a:off x="3794226" y="6164787"/>
+            <a:ext cx="2568830" cy="830997"/>
           </a:xfrm>
           <a:prstGeom prst="rect">
             <a:avLst/>
@@ -5032,25 +6162,25 @@
           </a:bodyPr>
           <a:lstStyle/>
           <a:p>
-            <a:pPr marL="406405" indent="-406405">
+            <a:pPr marL="251483" indent="-251483">
               <a:buFont typeface="Arial" panose="020B0604020202020204" pitchFamily="34" charset="0"/>
               <a:buChar char="•"/>
             </a:pPr>
             <a:r>
-              <a:rPr lang="en-US" sz="2133" dirty="0"/>
+              <a:rPr lang="en-US" sz="1600" dirty="0"/>
               <a:t>Suisun Bay is pretty murky (low </a:t>
             </a:r>
             <a:r>
-              <a:rPr lang="en-US" sz="2133" dirty="0" err="1"/>
+              <a:rPr lang="en-US" sz="1600" dirty="0" err="1"/>
               <a:t>secchi</a:t>
             </a:r>
             <a:r>
-              <a:rPr lang="en-US" sz="2133" dirty="0"/>
+              <a:rPr lang="en-US" sz="1600" dirty="0"/>
               <a:t> depth)</a:t>
             </a:r>
           </a:p>
           <a:p>
-            <a:endParaRPr lang="en-US" sz="2607" dirty="0"/>
+            <a:endParaRPr lang="en-US" sz="1600" dirty="0"/>
           </a:p>
         </p:txBody>
       </p:sp>
@@ -5068,8 +6198,8 @@
         </p:nvSpPr>
         <p:spPr>
           <a:xfrm>
-            <a:off x="13544781" y="1141867"/>
-            <a:ext cx="1197764" cy="369332"/>
+            <a:off x="8168692" y="1119503"/>
+            <a:ext cx="971741" cy="307777"/>
           </a:xfrm>
           <a:prstGeom prst="rect">
             <a:avLst/>
@@ -5083,7 +6213,7 @@
           <a:lstStyle/>
           <a:p>
             <a:r>
-              <a:rPr lang="en-US" dirty="0"/>
+              <a:rPr lang="en-US" sz="1400" dirty="0"/>
               <a:t>Secchi disk</a:t>
             </a:r>
           </a:p>
@@ -5133,8 +6263,8 @@
         </p:nvSpPr>
         <p:spPr>
           <a:xfrm>
-            <a:off x="527625" y="3886671"/>
-            <a:ext cx="6248370" cy="1113895"/>
+            <a:off x="326468" y="3462153"/>
+            <a:ext cx="2003777" cy="724557"/>
           </a:xfrm>
           <a:prstGeom prst="rect">
             <a:avLst/>
@@ -5148,82 +6278,12 @@
           <a:lstStyle/>
           <a:p>
             <a:r>
-              <a:rPr lang="en-US" sz="3319" b="1" dirty="0"/>
+              <a:rPr lang="en-US" sz="2054" b="1" dirty="0"/>
               <a:t>San Pablo Bay</a:t>
             </a:r>
           </a:p>
           <a:p>
-            <a:endParaRPr lang="en-US" sz="3319" b="1" dirty="0"/>
-          </a:p>
-        </p:txBody>
-      </p:sp>
-      <p:sp>
-        <p:nvSpPr>
-          <p:cNvPr id="2" name="Title 1">
-            <a:extLst>
-              <a:ext uri="{FF2B5EF4-FFF2-40B4-BE49-F238E27FC236}">
-                <a16:creationId xmlns:a16="http://schemas.microsoft.com/office/drawing/2014/main" id="{9684B250-0696-449F-B9C0-D5D3CDC312FF}"/>
-              </a:ext>
-            </a:extLst>
-          </p:cNvPr>
-          <p:cNvSpPr>
-            <a:spLocks noGrp="1"/>
-          </p:cNvSpPr>
-          <p:nvPr>
-            <p:ph type="ctrTitle"/>
-          </p:nvPr>
-        </p:nvSpPr>
-        <p:spPr>
-          <a:xfrm>
-            <a:off x="3359353" y="-316321"/>
-            <a:ext cx="8192171" cy="1951298"/>
-          </a:xfrm>
-        </p:spPr>
-        <p:txBody>
-          <a:bodyPr>
-            <a:normAutofit/>
-          </a:bodyPr>
-          <a:lstStyle/>
-          <a:p>
-            <a:r>
-              <a:rPr lang="en-US" sz="6600" dirty="0"/>
-              <a:t>Temperature</a:t>
-            </a:r>
-          </a:p>
-        </p:txBody>
-      </p:sp>
-      <p:sp>
-        <p:nvSpPr>
-          <p:cNvPr id="3" name="Subtitle 2">
-            <a:extLst>
-              <a:ext uri="{FF2B5EF4-FFF2-40B4-BE49-F238E27FC236}">
-                <a16:creationId xmlns:a16="http://schemas.microsoft.com/office/drawing/2014/main" id="{61179B21-AFC1-4EF2-A5C6-8A63DE3DE438}"/>
-              </a:ext>
-            </a:extLst>
-          </p:cNvPr>
-          <p:cNvSpPr>
-            <a:spLocks noGrp="1"/>
-          </p:cNvSpPr>
-          <p:nvPr>
-            <p:ph type="subTitle" idx="1"/>
-          </p:nvPr>
-        </p:nvSpPr>
-        <p:spPr>
-          <a:xfrm>
-            <a:off x="1631507" y="57436"/>
-            <a:ext cx="12992986" cy="862278"/>
-          </a:xfrm>
-        </p:spPr>
-        <p:txBody>
-          <a:bodyPr>
-            <a:normAutofit/>
-          </a:bodyPr>
-          <a:lstStyle/>
-          <a:p>
-            <a:r>
-              <a:rPr lang="en-US" sz="2400" dirty="0"/>
-              <a:t>Interagency Ecological Program Status &amp; Trends 2017-2018 Winter Season Report</a:t>
-            </a:r>
+            <a:endParaRPr lang="en-US" sz="2054" b="1" dirty="0"/>
           </a:p>
         </p:txBody>
       </p:sp>
@@ -5241,8 +6301,8 @@
         </p:nvSpPr>
         <p:spPr>
           <a:xfrm>
-            <a:off x="900380" y="1864391"/>
-            <a:ext cx="11136848" cy="1015663"/>
+            <a:off x="492654" y="1764932"/>
+            <a:ext cx="7145455" cy="1077218"/>
           </a:xfrm>
           <a:prstGeom prst="rect">
             <a:avLst/>
@@ -5255,32 +6315,32 @@
           </a:bodyPr>
           <a:lstStyle/>
           <a:p>
-            <a:pPr marL="406405" indent="-406405">
+            <a:pPr marL="251483" indent="-251483">
               <a:buFont typeface="Arial" panose="020B0604020202020204" pitchFamily="34" charset="0"/>
               <a:buChar char="•"/>
             </a:pPr>
             <a:r>
-              <a:rPr lang="en-US" sz="2000" dirty="0"/>
+              <a:rPr lang="en-US" sz="1600" dirty="0"/>
               <a:t>Temperature is monitored monthly by DWR’s Environmental Monitoring Program.</a:t>
             </a:r>
           </a:p>
           <a:p>
-            <a:pPr marL="406405" indent="-406405">
+            <a:pPr marL="251483" indent="-251483">
               <a:buFont typeface="Arial" panose="020B0604020202020204" pitchFamily="34" charset="0"/>
               <a:buChar char="•"/>
             </a:pPr>
             <a:r>
-              <a:rPr lang="en-US" sz="2000" dirty="0"/>
+              <a:rPr lang="en-US" sz="1600" dirty="0"/>
               <a:t>Most fish have temperature tolerances necessary for growth and reproduction.</a:t>
             </a:r>
           </a:p>
           <a:p>
-            <a:pPr marL="406405" indent="-406405">
+            <a:pPr marL="251483" indent="-251483">
               <a:buFont typeface="Arial" panose="020B0604020202020204" pitchFamily="34" charset="0"/>
               <a:buChar char="•"/>
             </a:pPr>
             <a:r>
-              <a:rPr lang="en-US" sz="2000" dirty="0"/>
+              <a:rPr lang="en-US" sz="1600" dirty="0"/>
               <a:t>Increasing winter temperatures may lower Delta Smelt fecundity.</a:t>
             </a:r>
           </a:p>
@@ -5300,8 +6360,8 @@
         </p:nvSpPr>
         <p:spPr>
           <a:xfrm>
-            <a:off x="6468804" y="3921860"/>
-            <a:ext cx="6248370" cy="1113895"/>
+            <a:off x="3729769" y="3426309"/>
+            <a:ext cx="2172086" cy="724557"/>
           </a:xfrm>
           <a:prstGeom prst="rect">
             <a:avLst/>
@@ -5315,12 +6375,12 @@
           <a:lstStyle/>
           <a:p>
             <a:r>
-              <a:rPr lang="en-US" sz="3319" b="1" dirty="0"/>
+              <a:rPr lang="en-US" sz="2054" b="1" dirty="0"/>
               <a:t>Suisun Bay</a:t>
             </a:r>
           </a:p>
           <a:p>
-            <a:endParaRPr lang="en-US" sz="3319" b="1" dirty="0"/>
+            <a:endParaRPr lang="en-US" sz="2054" b="1" dirty="0"/>
           </a:p>
         </p:txBody>
       </p:sp>
@@ -5338,8 +6398,8 @@
         </p:nvSpPr>
         <p:spPr>
           <a:xfrm>
-            <a:off x="11589065" y="3890594"/>
-            <a:ext cx="6248370" cy="1113895"/>
+            <a:off x="7052747" y="3426309"/>
+            <a:ext cx="2003777" cy="724557"/>
           </a:xfrm>
           <a:prstGeom prst="rect">
             <a:avLst/>
@@ -5353,21 +6413,21 @@
           <a:lstStyle/>
           <a:p>
             <a:r>
-              <a:rPr lang="en-US" sz="3319" b="1" dirty="0"/>
+              <a:rPr lang="en-US" sz="2054" b="1" dirty="0"/>
               <a:t>The Delta</a:t>
             </a:r>
           </a:p>
           <a:p>
-            <a:endParaRPr lang="en-US" sz="3319" b="1" dirty="0"/>
-          </a:p>
-        </p:txBody>
-      </p:sp>
-      <p:sp>
-        <p:nvSpPr>
-          <p:cNvPr id="27" name="TextBox 26">
+            <a:endParaRPr lang="en-US" sz="2054" b="1" dirty="0"/>
+          </a:p>
+        </p:txBody>
+      </p:sp>
+      <p:sp>
+        <p:nvSpPr>
+          <p:cNvPr id="28" name="TextBox 27">
             <a:extLst>
               <a:ext uri="{FF2B5EF4-FFF2-40B4-BE49-F238E27FC236}">
-                <a16:creationId xmlns:a16="http://schemas.microsoft.com/office/drawing/2014/main" id="{C362F15E-9505-41C4-9AD7-10CF4E211EE9}"/>
+                <a16:creationId xmlns:a16="http://schemas.microsoft.com/office/drawing/2014/main" id="{B9E9807A-8D05-4948-AF07-AFCCFFD3D08F}"/>
               </a:ext>
             </a:extLst>
           </p:cNvPr>
@@ -5376,8 +6436,8 @@
         </p:nvSpPr>
         <p:spPr>
           <a:xfrm>
-            <a:off x="8947667" y="5233903"/>
-            <a:ext cx="7181065" cy="1149995"/>
+            <a:off x="7182754" y="5926277"/>
+            <a:ext cx="2456522" cy="1077218"/>
           </a:xfrm>
           <a:prstGeom prst="rect">
             <a:avLst/>
@@ -5390,75 +6450,17 @@
           </a:bodyPr>
           <a:lstStyle/>
           <a:p>
-            <a:pPr marL="406405" indent="-406405">
+            <a:pPr marL="251483" indent="-251483">
               <a:buFont typeface="Arial" panose="020B0604020202020204" pitchFamily="34" charset="0"/>
               <a:buChar char="•"/>
             </a:pPr>
             <a:r>
-              <a:rPr lang="en-US" sz="2133" dirty="0"/>
-              <a:t>Suisun bay is usually pretty </a:t>
-            </a:r>
-            <a:r>
-              <a:rPr lang="en-US" sz="2133" dirty="0" err="1"/>
-              <a:t>murkey</a:t>
-            </a:r>
-            <a:r>
-              <a:rPr lang="en-US" sz="2133" dirty="0"/>
-              <a:t>, meaning low </a:t>
-            </a:r>
-            <a:r>
-              <a:rPr lang="en-US" sz="2133" dirty="0" err="1"/>
-              <a:t>secchi</a:t>
-            </a:r>
-            <a:r>
-              <a:rPr lang="en-US" sz="2133" dirty="0"/>
-              <a:t> depth. </a:t>
-            </a:r>
-          </a:p>
-          <a:p>
-            <a:endParaRPr lang="en-US" sz="2607" dirty="0"/>
-          </a:p>
-        </p:txBody>
-      </p:sp>
-      <p:sp>
-        <p:nvSpPr>
-          <p:cNvPr id="28" name="TextBox 27">
-            <a:extLst>
-              <a:ext uri="{FF2B5EF4-FFF2-40B4-BE49-F238E27FC236}">
-                <a16:creationId xmlns:a16="http://schemas.microsoft.com/office/drawing/2014/main" id="{B9E9807A-8D05-4948-AF07-AFCCFFD3D08F}"/>
-              </a:ext>
-            </a:extLst>
-          </p:cNvPr>
-          <p:cNvSpPr txBox="1"/>
-          <p:nvPr/>
-        </p:nvSpPr>
-        <p:spPr>
-          <a:xfrm>
-            <a:off x="11608490" y="7918084"/>
-            <a:ext cx="3970137" cy="1149995"/>
-          </a:xfrm>
-          <a:prstGeom prst="rect">
-            <a:avLst/>
-          </a:prstGeom>
-          <a:noFill/>
-        </p:spPr>
-        <p:txBody>
-          <a:bodyPr wrap="square" rtlCol="0">
-            <a:spAutoFit/>
-          </a:bodyPr>
-          <a:lstStyle/>
-          <a:p>
-            <a:pPr marL="406405" indent="-406405">
-              <a:buFont typeface="Arial" panose="020B0604020202020204" pitchFamily="34" charset="0"/>
-              <a:buChar char="•"/>
-            </a:pPr>
-            <a:r>
-              <a:rPr lang="en-US" sz="2133" dirty="0"/>
+              <a:rPr lang="en-US" sz="1600" dirty="0"/>
               <a:t>Delta temperatures are closely linked to air temperature</a:t>
             </a:r>
           </a:p>
           <a:p>
-            <a:endParaRPr lang="en-US" sz="2607" dirty="0"/>
+            <a:endParaRPr lang="en-US" sz="1600" dirty="0"/>
           </a:p>
         </p:txBody>
       </p:sp>
@@ -5489,8 +6491,8 @@
         </p:blipFill>
         <p:spPr>
           <a:xfrm>
-            <a:off x="56702" y="4483337"/>
-            <a:ext cx="15841653" cy="3216049"/>
+            <a:off x="78747" y="3877624"/>
+            <a:ext cx="9802023" cy="1989930"/>
           </a:xfrm>
           <a:prstGeom prst="rect">
             <a:avLst/>
@@ -5511,8 +6513,8 @@
         </p:nvSpPr>
         <p:spPr>
           <a:xfrm>
-            <a:off x="6027910" y="7971077"/>
-            <a:ext cx="4151644" cy="1149995"/>
+            <a:off x="3837704" y="5926277"/>
+            <a:ext cx="2568830" cy="830997"/>
           </a:xfrm>
           <a:prstGeom prst="rect">
             <a:avLst/>
@@ -5525,17 +6527,17 @@
           </a:bodyPr>
           <a:lstStyle/>
           <a:p>
-            <a:pPr marL="406405" indent="-406405">
+            <a:pPr marL="251483" indent="-251483">
               <a:buFont typeface="Arial" panose="020B0604020202020204" pitchFamily="34" charset="0"/>
               <a:buChar char="•"/>
             </a:pPr>
             <a:r>
-              <a:rPr lang="en-US" sz="2133" dirty="0"/>
+              <a:rPr lang="en-US" sz="1600" dirty="0"/>
               <a:t>Suisun Bay is usually similar to the Delta</a:t>
             </a:r>
           </a:p>
           <a:p>
-            <a:endParaRPr lang="en-US" sz="2607" dirty="0"/>
+            <a:endParaRPr lang="en-US" sz="1600" dirty="0"/>
           </a:p>
         </p:txBody>
       </p:sp>
@@ -5568,8 +6570,8 @@
         </p:blipFill>
         <p:spPr bwMode="auto">
           <a:xfrm>
-            <a:off x="11988895" y="1047013"/>
-            <a:ext cx="2580949" cy="2580949"/>
+            <a:off x="7758011" y="1184006"/>
+            <a:ext cx="1596962" cy="1596962"/>
           </a:xfrm>
           <a:prstGeom prst="rect">
             <a:avLst/>
@@ -5600,8 +6602,8 @@
         </p:nvSpPr>
         <p:spPr>
           <a:xfrm>
-            <a:off x="796208" y="7869093"/>
-            <a:ext cx="4151644" cy="1149995"/>
+            <a:off x="492654" y="5926277"/>
+            <a:ext cx="2568830" cy="1077218"/>
           </a:xfrm>
           <a:prstGeom prst="rect">
             <a:avLst/>
@@ -5614,17 +6616,252 @@
           </a:bodyPr>
           <a:lstStyle/>
           <a:p>
-            <a:pPr marL="406405" indent="-406405">
+            <a:pPr marL="251483" indent="-251483">
               <a:buFont typeface="Arial" panose="020B0604020202020204" pitchFamily="34" charset="0"/>
               <a:buChar char="•"/>
             </a:pPr>
             <a:r>
-              <a:rPr lang="en-US" sz="2133" dirty="0"/>
+              <a:rPr lang="en-US" sz="1600" dirty="0"/>
               <a:t>San Pablo Bay is slightly warmer than the Delta in the winter</a:t>
             </a:r>
           </a:p>
           <a:p>
-            <a:endParaRPr lang="en-US" sz="2607" dirty="0"/>
+            <a:endParaRPr lang="en-US" sz="1600" dirty="0"/>
+          </a:p>
+        </p:txBody>
+      </p:sp>
+      <p:sp>
+        <p:nvSpPr>
+          <p:cNvPr id="18" name="Title 1">
+            <a:extLst>
+              <a:ext uri="{FF2B5EF4-FFF2-40B4-BE49-F238E27FC236}">
+                <a16:creationId xmlns:a16="http://schemas.microsoft.com/office/drawing/2014/main" id="{377AB46F-CDA5-4920-B5FB-39C4A0BF47A7}"/>
+              </a:ext>
+            </a:extLst>
+          </p:cNvPr>
+          <p:cNvSpPr>
+            <a:spLocks noGrp="1"/>
+          </p:cNvSpPr>
+          <p:nvPr>
+            <p:ph type="ctrTitle"/>
+          </p:nvPr>
+        </p:nvSpPr>
+        <p:spPr>
+          <a:xfrm>
+            <a:off x="2238071" y="213475"/>
+            <a:ext cx="5068906" cy="1207366"/>
+          </a:xfrm>
+        </p:spPr>
+        <p:txBody>
+          <a:bodyPr>
+            <a:normAutofit/>
+          </a:bodyPr>
+          <a:lstStyle/>
+          <a:p>
+            <a:r>
+              <a:rPr lang="en-US" sz="5400" dirty="0"/>
+              <a:t>Temperature</a:t>
+            </a:r>
+          </a:p>
+        </p:txBody>
+      </p:sp>
+      <p:sp>
+        <p:nvSpPr>
+          <p:cNvPr id="19" name="Subtitle 2">
+            <a:extLst>
+              <a:ext uri="{FF2B5EF4-FFF2-40B4-BE49-F238E27FC236}">
+                <a16:creationId xmlns:a16="http://schemas.microsoft.com/office/drawing/2014/main" id="{693E9B4A-0F87-4BB6-BC1F-2BFCC67756A7}"/>
+              </a:ext>
+            </a:extLst>
+          </p:cNvPr>
+          <p:cNvSpPr txBox="1">
+            <a:spLocks/>
+          </p:cNvSpPr>
+          <p:nvPr/>
+        </p:nvSpPr>
+        <p:spPr>
+          <a:xfrm>
+            <a:off x="862012" y="130329"/>
+            <a:ext cx="8576956" cy="533535"/>
+          </a:xfrm>
+          <a:prstGeom prst="rect">
+            <a:avLst/>
+          </a:prstGeom>
+        </p:spPr>
+        <p:txBody>
+          <a:bodyPr vert="horz" lIns="91440" tIns="45720" rIns="91440" bIns="45720" rtlCol="0">
+            <a:normAutofit fontScale="85000" lnSpcReduction="10000"/>
+          </a:bodyPr>
+          <a:lstStyle>
+            <a:lvl1pPr marL="0" indent="0" algn="ctr" defTabSz="1005840" rtl="0" eaLnBrk="1" latinLnBrk="0" hangingPunct="1">
+              <a:lnSpc>
+                <a:spcPct val="90000"/>
+              </a:lnSpc>
+              <a:spcBef>
+                <a:spcPts val="1100"/>
+              </a:spcBef>
+              <a:buFont typeface="Arial" panose="020B0604020202020204" pitchFamily="34" charset="0"/>
+              <a:buNone/>
+              <a:defRPr sz="2640" kern="1200">
+                <a:solidFill>
+                  <a:schemeClr val="tx1"/>
+                </a:solidFill>
+                <a:latin typeface="+mn-lt"/>
+                <a:ea typeface="+mn-ea"/>
+                <a:cs typeface="+mn-cs"/>
+              </a:defRPr>
+            </a:lvl1pPr>
+            <a:lvl2pPr marL="502920" indent="0" algn="ctr" defTabSz="1005840" rtl="0" eaLnBrk="1" latinLnBrk="0" hangingPunct="1">
+              <a:lnSpc>
+                <a:spcPct val="90000"/>
+              </a:lnSpc>
+              <a:spcBef>
+                <a:spcPts val="550"/>
+              </a:spcBef>
+              <a:buFont typeface="Arial" panose="020B0604020202020204" pitchFamily="34" charset="0"/>
+              <a:buNone/>
+              <a:defRPr sz="2200" kern="1200">
+                <a:solidFill>
+                  <a:schemeClr val="tx1"/>
+                </a:solidFill>
+                <a:latin typeface="+mn-lt"/>
+                <a:ea typeface="+mn-ea"/>
+                <a:cs typeface="+mn-cs"/>
+              </a:defRPr>
+            </a:lvl2pPr>
+            <a:lvl3pPr marL="1005840" indent="0" algn="ctr" defTabSz="1005840" rtl="0" eaLnBrk="1" latinLnBrk="0" hangingPunct="1">
+              <a:lnSpc>
+                <a:spcPct val="90000"/>
+              </a:lnSpc>
+              <a:spcBef>
+                <a:spcPts val="550"/>
+              </a:spcBef>
+              <a:buFont typeface="Arial" panose="020B0604020202020204" pitchFamily="34" charset="0"/>
+              <a:buNone/>
+              <a:defRPr sz="1980" kern="1200">
+                <a:solidFill>
+                  <a:schemeClr val="tx1"/>
+                </a:solidFill>
+                <a:latin typeface="+mn-lt"/>
+                <a:ea typeface="+mn-ea"/>
+                <a:cs typeface="+mn-cs"/>
+              </a:defRPr>
+            </a:lvl3pPr>
+            <a:lvl4pPr marL="1508760" indent="0" algn="ctr" defTabSz="1005840" rtl="0" eaLnBrk="1" latinLnBrk="0" hangingPunct="1">
+              <a:lnSpc>
+                <a:spcPct val="90000"/>
+              </a:lnSpc>
+              <a:spcBef>
+                <a:spcPts val="550"/>
+              </a:spcBef>
+              <a:buFont typeface="Arial" panose="020B0604020202020204" pitchFamily="34" charset="0"/>
+              <a:buNone/>
+              <a:defRPr sz="1760" kern="1200">
+                <a:solidFill>
+                  <a:schemeClr val="tx1"/>
+                </a:solidFill>
+                <a:latin typeface="+mn-lt"/>
+                <a:ea typeface="+mn-ea"/>
+                <a:cs typeface="+mn-cs"/>
+              </a:defRPr>
+            </a:lvl4pPr>
+            <a:lvl5pPr marL="2011680" indent="0" algn="ctr" defTabSz="1005840" rtl="0" eaLnBrk="1" latinLnBrk="0" hangingPunct="1">
+              <a:lnSpc>
+                <a:spcPct val="90000"/>
+              </a:lnSpc>
+              <a:spcBef>
+                <a:spcPts val="550"/>
+              </a:spcBef>
+              <a:buFont typeface="Arial" panose="020B0604020202020204" pitchFamily="34" charset="0"/>
+              <a:buNone/>
+              <a:defRPr sz="1760" kern="1200">
+                <a:solidFill>
+                  <a:schemeClr val="tx1"/>
+                </a:solidFill>
+                <a:latin typeface="+mn-lt"/>
+                <a:ea typeface="+mn-ea"/>
+                <a:cs typeface="+mn-cs"/>
+              </a:defRPr>
+            </a:lvl5pPr>
+            <a:lvl6pPr marL="2514600" indent="0" algn="ctr" defTabSz="1005840" rtl="0" eaLnBrk="1" latinLnBrk="0" hangingPunct="1">
+              <a:lnSpc>
+                <a:spcPct val="90000"/>
+              </a:lnSpc>
+              <a:spcBef>
+                <a:spcPts val="550"/>
+              </a:spcBef>
+              <a:buFont typeface="Arial" panose="020B0604020202020204" pitchFamily="34" charset="0"/>
+              <a:buNone/>
+              <a:defRPr sz="1760" kern="1200">
+                <a:solidFill>
+                  <a:schemeClr val="tx1"/>
+                </a:solidFill>
+                <a:latin typeface="+mn-lt"/>
+                <a:ea typeface="+mn-ea"/>
+                <a:cs typeface="+mn-cs"/>
+              </a:defRPr>
+            </a:lvl6pPr>
+            <a:lvl7pPr marL="3017520" indent="0" algn="ctr" defTabSz="1005840" rtl="0" eaLnBrk="1" latinLnBrk="0" hangingPunct="1">
+              <a:lnSpc>
+                <a:spcPct val="90000"/>
+              </a:lnSpc>
+              <a:spcBef>
+                <a:spcPts val="550"/>
+              </a:spcBef>
+              <a:buFont typeface="Arial" panose="020B0604020202020204" pitchFamily="34" charset="0"/>
+              <a:buNone/>
+              <a:defRPr sz="1760" kern="1200">
+                <a:solidFill>
+                  <a:schemeClr val="tx1"/>
+                </a:solidFill>
+                <a:latin typeface="+mn-lt"/>
+                <a:ea typeface="+mn-ea"/>
+                <a:cs typeface="+mn-cs"/>
+              </a:defRPr>
+            </a:lvl7pPr>
+            <a:lvl8pPr marL="3520440" indent="0" algn="ctr" defTabSz="1005840" rtl="0" eaLnBrk="1" latinLnBrk="0" hangingPunct="1">
+              <a:lnSpc>
+                <a:spcPct val="90000"/>
+              </a:lnSpc>
+              <a:spcBef>
+                <a:spcPts val="550"/>
+              </a:spcBef>
+              <a:buFont typeface="Arial" panose="020B0604020202020204" pitchFamily="34" charset="0"/>
+              <a:buNone/>
+              <a:defRPr sz="1760" kern="1200">
+                <a:solidFill>
+                  <a:schemeClr val="tx1"/>
+                </a:solidFill>
+                <a:latin typeface="+mn-lt"/>
+                <a:ea typeface="+mn-ea"/>
+                <a:cs typeface="+mn-cs"/>
+              </a:defRPr>
+            </a:lvl8pPr>
+            <a:lvl9pPr marL="4023360" indent="0" algn="ctr" defTabSz="1005840" rtl="0" eaLnBrk="1" latinLnBrk="0" hangingPunct="1">
+              <a:lnSpc>
+                <a:spcPct val="90000"/>
+              </a:lnSpc>
+              <a:spcBef>
+                <a:spcPts val="550"/>
+              </a:spcBef>
+              <a:buFont typeface="Arial" panose="020B0604020202020204" pitchFamily="34" charset="0"/>
+              <a:buNone/>
+              <a:defRPr sz="1760" kern="1200">
+                <a:solidFill>
+                  <a:schemeClr val="tx1"/>
+                </a:solidFill>
+                <a:latin typeface="+mn-lt"/>
+                <a:ea typeface="+mn-ea"/>
+                <a:cs typeface="+mn-cs"/>
+              </a:defRPr>
+            </a:lvl9pPr>
+          </a:lstStyle>
+          <a:p>
+            <a:r>
+              <a:rPr lang="en-US" sz="2400"/>
+              <a:t>Interagency Ecological Program Status &amp; Trends 2017-2018 Winter Season Report</a:t>
+            </a:r>
+            <a:endParaRPr lang="en-US" sz="2400" dirty="0"/>
           </a:p>
         </p:txBody>
       </p:sp>
@@ -5672,8 +6909,8 @@
         </p:nvSpPr>
         <p:spPr>
           <a:xfrm>
-            <a:off x="492901" y="4067675"/>
-            <a:ext cx="6248370" cy="1113895"/>
+            <a:off x="304982" y="3574149"/>
+            <a:ext cx="3866179" cy="724557"/>
           </a:xfrm>
           <a:prstGeom prst="rect">
             <a:avLst/>
@@ -5687,82 +6924,12 @@
           <a:lstStyle/>
           <a:p>
             <a:r>
-              <a:rPr lang="en-US" sz="3319" b="1" dirty="0"/>
+              <a:rPr lang="en-US" sz="2054" b="1" dirty="0"/>
               <a:t>San Pablo Bay</a:t>
             </a:r>
           </a:p>
           <a:p>
-            <a:endParaRPr lang="en-US" sz="3319" b="1" dirty="0"/>
-          </a:p>
-        </p:txBody>
-      </p:sp>
-      <p:sp>
-        <p:nvSpPr>
-          <p:cNvPr id="2" name="Title 1">
-            <a:extLst>
-              <a:ext uri="{FF2B5EF4-FFF2-40B4-BE49-F238E27FC236}">
-                <a16:creationId xmlns:a16="http://schemas.microsoft.com/office/drawing/2014/main" id="{9684B250-0696-449F-B9C0-D5D3CDC312FF}"/>
-              </a:ext>
-            </a:extLst>
-          </p:cNvPr>
-          <p:cNvSpPr>
-            <a:spLocks noGrp="1"/>
-          </p:cNvSpPr>
-          <p:nvPr>
-            <p:ph type="ctrTitle"/>
-          </p:nvPr>
-        </p:nvSpPr>
-        <p:spPr>
-          <a:xfrm>
-            <a:off x="3359353" y="-316321"/>
-            <a:ext cx="8192171" cy="1951298"/>
-          </a:xfrm>
-        </p:spPr>
-        <p:txBody>
-          <a:bodyPr>
-            <a:normAutofit/>
-          </a:bodyPr>
-          <a:lstStyle/>
-          <a:p>
-            <a:r>
-              <a:rPr lang="en-US" sz="6600" dirty="0"/>
-              <a:t>Chlorophyll</a:t>
-            </a:r>
-          </a:p>
-        </p:txBody>
-      </p:sp>
-      <p:sp>
-        <p:nvSpPr>
-          <p:cNvPr id="3" name="Subtitle 2">
-            <a:extLst>
-              <a:ext uri="{FF2B5EF4-FFF2-40B4-BE49-F238E27FC236}">
-                <a16:creationId xmlns:a16="http://schemas.microsoft.com/office/drawing/2014/main" id="{61179B21-AFC1-4EF2-A5C6-8A63DE3DE438}"/>
-              </a:ext>
-            </a:extLst>
-          </p:cNvPr>
-          <p:cNvSpPr>
-            <a:spLocks noGrp="1"/>
-          </p:cNvSpPr>
-          <p:nvPr>
-            <p:ph type="subTitle" idx="1"/>
-          </p:nvPr>
-        </p:nvSpPr>
-        <p:spPr>
-          <a:xfrm>
-            <a:off x="1631507" y="57436"/>
-            <a:ext cx="12992986" cy="862278"/>
-          </a:xfrm>
-        </p:spPr>
-        <p:txBody>
-          <a:bodyPr>
-            <a:normAutofit/>
-          </a:bodyPr>
-          <a:lstStyle/>
-          <a:p>
-            <a:r>
-              <a:rPr lang="en-US" sz="2400" dirty="0"/>
-              <a:t>Interagency Ecological Program Status &amp; Trends 2017-2018 Winter Season Report</a:t>
-            </a:r>
+            <a:endParaRPr lang="en-US" sz="2054" b="1" dirty="0"/>
           </a:p>
         </p:txBody>
       </p:sp>
@@ -5780,8 +6947,8 @@
         </p:nvSpPr>
         <p:spPr>
           <a:xfrm>
-            <a:off x="900380" y="1690403"/>
-            <a:ext cx="8902839" cy="1938992"/>
+            <a:off x="862012" y="1464323"/>
+            <a:ext cx="5508632" cy="1815882"/>
           </a:xfrm>
           <a:prstGeom prst="rect">
             <a:avLst/>
@@ -5794,40 +6961,40 @@
           </a:bodyPr>
           <a:lstStyle/>
           <a:p>
-            <a:pPr marL="406405" indent="-406405">
+            <a:pPr marL="251483" indent="-251483">
               <a:buFont typeface="Arial" panose="020B0604020202020204" pitchFamily="34" charset="0"/>
               <a:buChar char="•"/>
             </a:pPr>
             <a:r>
-              <a:rPr lang="en-US" sz="2000" dirty="0"/>
+              <a:rPr lang="en-US" sz="1600" dirty="0"/>
               <a:t>Chlorophyll is an indicator of phytoplankton production, which tends to be low during the winter.</a:t>
             </a:r>
           </a:p>
           <a:p>
-            <a:pPr marL="406405" indent="-406405">
+            <a:pPr marL="251483" indent="-251483">
               <a:buFont typeface="Arial" panose="020B0604020202020204" pitchFamily="34" charset="0"/>
               <a:buChar char="•"/>
             </a:pPr>
             <a:r>
-              <a:rPr lang="en-US" sz="2000" dirty="0"/>
+              <a:rPr lang="en-US" sz="1600" dirty="0"/>
               <a:t>Phytoplankton are the base of the pelagic food web. It is sampled monthly by DWR’s Environmental Monitoring Program.</a:t>
             </a:r>
           </a:p>
           <a:p>
-            <a:pPr marL="406405" indent="-406405">
+            <a:pPr marL="251483" indent="-251483">
               <a:buFont typeface="Arial" panose="020B0604020202020204" pitchFamily="34" charset="0"/>
               <a:buChar char="•"/>
             </a:pPr>
             <a:r>
-              <a:rPr lang="en-US" sz="2000" dirty="0"/>
+              <a:rPr lang="en-US" sz="1600" dirty="0"/>
               <a:t>The invasive clam </a:t>
             </a:r>
             <a:r>
-              <a:rPr lang="en-US" sz="2000" i="1" dirty="0"/>
+              <a:rPr lang="en-US" sz="1600" i="1" dirty="0"/>
               <a:t>Potamocorbula amurensis </a:t>
             </a:r>
             <a:r>
-              <a:rPr lang="en-US" sz="2000" dirty="0"/>
+              <a:rPr lang="en-US" sz="1600" dirty="0"/>
               <a:t>caused a decline in phytoplankton and zooplankton – especially in Suisun Bay.</a:t>
             </a:r>
           </a:p>
@@ -5847,8 +7014,8 @@
         </p:nvSpPr>
         <p:spPr>
           <a:xfrm>
-            <a:off x="6468804" y="4067675"/>
-            <a:ext cx="6248370" cy="1113895"/>
+            <a:off x="4002572" y="3574149"/>
+            <a:ext cx="3866179" cy="724557"/>
           </a:xfrm>
           <a:prstGeom prst="rect">
             <a:avLst/>
@@ -5862,12 +7029,12 @@
           <a:lstStyle/>
           <a:p>
             <a:r>
-              <a:rPr lang="en-US" sz="3319" b="1" dirty="0"/>
+              <a:rPr lang="en-US" sz="2054" b="1" dirty="0"/>
               <a:t>Suisun Bay</a:t>
             </a:r>
           </a:p>
           <a:p>
-            <a:endParaRPr lang="en-US" sz="3319" b="1" dirty="0"/>
+            <a:endParaRPr lang="en-US" sz="2054" b="1" dirty="0"/>
           </a:p>
         </p:txBody>
       </p:sp>
@@ -5885,8 +7052,8 @@
         </p:nvSpPr>
         <p:spPr>
           <a:xfrm>
-            <a:off x="11648232" y="4018024"/>
-            <a:ext cx="6248370" cy="1113895"/>
+            <a:off x="7207344" y="3543427"/>
+            <a:ext cx="3866179" cy="724557"/>
           </a:xfrm>
           <a:prstGeom prst="rect">
             <a:avLst/>
@@ -5900,12 +7067,12 @@
           <a:lstStyle/>
           <a:p>
             <a:r>
-              <a:rPr lang="en-US" sz="3319" b="1" dirty="0"/>
+              <a:rPr lang="en-US" sz="2054" b="1" dirty="0"/>
               <a:t>The Delta</a:t>
             </a:r>
           </a:p>
           <a:p>
-            <a:endParaRPr lang="en-US" sz="3319" b="1" dirty="0"/>
+            <a:endParaRPr lang="en-US" sz="2054" b="1" dirty="0"/>
           </a:p>
         </p:txBody>
       </p:sp>
@@ -5923,8 +7090,8 @@
         </p:nvSpPr>
         <p:spPr>
           <a:xfrm>
-            <a:off x="11674648" y="7999727"/>
-            <a:ext cx="4331868" cy="1149995"/>
+            <a:off x="7223689" y="6007106"/>
+            <a:ext cx="2680343" cy="1077218"/>
           </a:xfrm>
           <a:prstGeom prst="rect">
             <a:avLst/>
@@ -5937,17 +7104,17 @@
           </a:bodyPr>
           <a:lstStyle/>
           <a:p>
-            <a:pPr marL="406405" indent="-406405">
+            <a:pPr marL="251483" indent="-251483">
               <a:buFont typeface="Arial" panose="020B0604020202020204" pitchFamily="34" charset="0"/>
               <a:buChar char="•"/>
             </a:pPr>
             <a:r>
-              <a:rPr lang="en-US" sz="2133" dirty="0"/>
+              <a:rPr lang="en-US" sz="1600" dirty="0"/>
               <a:t>Winter chlorophyll levels have been consistently low in the Delta</a:t>
             </a:r>
           </a:p>
           <a:p>
-            <a:endParaRPr lang="en-US" sz="2607" dirty="0"/>
+            <a:endParaRPr lang="en-US" sz="1600" dirty="0"/>
           </a:p>
         </p:txBody>
       </p:sp>
@@ -5965,8 +7132,8 @@
         </p:nvSpPr>
         <p:spPr>
           <a:xfrm>
-            <a:off x="6185245" y="7988465"/>
-            <a:ext cx="4626887" cy="1478225"/>
+            <a:off x="3827121" y="6000138"/>
+            <a:ext cx="2862886" cy="1077218"/>
           </a:xfrm>
           <a:prstGeom prst="rect">
             <a:avLst/>
@@ -5979,17 +7146,17 @@
           </a:bodyPr>
           <a:lstStyle/>
           <a:p>
-            <a:pPr marL="406405" indent="-406405">
+            <a:pPr marL="251483" indent="-251483">
               <a:buFont typeface="Arial" panose="020B0604020202020204" pitchFamily="34" charset="0"/>
               <a:buChar char="•"/>
             </a:pPr>
             <a:r>
-              <a:rPr lang="en-US" sz="2133" dirty="0"/>
+              <a:rPr lang="en-US" sz="1600" dirty="0"/>
               <a:t>The clam invasion lowered chlorophyll in Suisun more than other regions</a:t>
             </a:r>
           </a:p>
           <a:p>
-            <a:endParaRPr lang="en-US" sz="2607" dirty="0"/>
+            <a:endParaRPr lang="en-US" sz="1600" dirty="0"/>
           </a:p>
         </p:txBody>
       </p:sp>
@@ -6007,8 +7174,8 @@
         </p:nvSpPr>
         <p:spPr>
           <a:xfrm>
-            <a:off x="900380" y="7964167"/>
-            <a:ext cx="4543490" cy="1149995"/>
+            <a:off x="557110" y="5985104"/>
+            <a:ext cx="2811284" cy="1077218"/>
           </a:xfrm>
           <a:prstGeom prst="rect">
             <a:avLst/>
@@ -6021,17 +7188,17 @@
           </a:bodyPr>
           <a:lstStyle/>
           <a:p>
-            <a:pPr marL="406405" indent="-406405">
+            <a:pPr marL="251483" indent="-251483">
               <a:buFont typeface="Arial" panose="020B0604020202020204" pitchFamily="34" charset="0"/>
               <a:buChar char="•"/>
             </a:pPr>
             <a:r>
-              <a:rPr lang="en-US" sz="2133" dirty="0"/>
+              <a:rPr lang="en-US" sz="1600" dirty="0"/>
               <a:t>Winter chlorophyll has been consistently low in San Pablo Bay</a:t>
             </a:r>
           </a:p>
           <a:p>
-            <a:endParaRPr lang="en-US" sz="2607" dirty="0"/>
+            <a:endParaRPr lang="en-US" sz="1600" dirty="0"/>
           </a:p>
         </p:txBody>
       </p:sp>
@@ -6062,8 +7229,8 @@
         </p:blipFill>
         <p:spPr bwMode="auto">
           <a:xfrm>
-            <a:off x="11691147" y="1080141"/>
-            <a:ext cx="2052053" cy="2340961"/>
+            <a:off x="7538799" y="1086723"/>
+            <a:ext cx="1269708" cy="1448470"/>
           </a:xfrm>
           <a:prstGeom prst="rect">
             <a:avLst/>
@@ -6108,8 +7275,8 @@
         </p:blipFill>
         <p:spPr>
           <a:xfrm>
-            <a:off x="53188" y="4605987"/>
-            <a:ext cx="16157198" cy="3421594"/>
+            <a:off x="32910" y="3907230"/>
+            <a:ext cx="9997266" cy="2117111"/>
           </a:xfrm>
           <a:prstGeom prst="rect">
             <a:avLst/>
@@ -6130,8 +7297,8 @@
         </p:nvSpPr>
         <p:spPr>
           <a:xfrm rot="16200000" flipH="1">
-            <a:off x="2119744" y="5083045"/>
-            <a:ext cx="1193845" cy="276999"/>
+            <a:off x="1311592" y="4184776"/>
+            <a:ext cx="738692" cy="206660"/>
           </a:xfrm>
           <a:prstGeom prst="rect">
             <a:avLst/>
@@ -6145,7 +7312,7 @@
           <a:lstStyle/>
           <a:p>
             <a:r>
-              <a:rPr lang="en-US" sz="1200" dirty="0"/>
+              <a:rPr lang="en-US" sz="743" dirty="0"/>
               <a:t>clam invasion</a:t>
             </a:r>
           </a:p>
@@ -6165,8 +7332,8 @@
         </p:nvSpPr>
         <p:spPr>
           <a:xfrm rot="16200000" flipH="1">
-            <a:off x="7549639" y="5092721"/>
-            <a:ext cx="1193845" cy="276999"/>
+            <a:off x="4671339" y="4190763"/>
+            <a:ext cx="738692" cy="206660"/>
           </a:xfrm>
           <a:prstGeom prst="rect">
             <a:avLst/>
@@ -6180,7 +7347,7 @@
           <a:lstStyle/>
           <a:p>
             <a:r>
-              <a:rPr lang="en-US" sz="1200" dirty="0"/>
+              <a:rPr lang="en-US" sz="743" dirty="0"/>
               <a:t>clam invasion</a:t>
             </a:r>
           </a:p>
@@ -6200,8 +7367,8 @@
         </p:nvSpPr>
         <p:spPr>
           <a:xfrm rot="16200000" flipH="1">
-            <a:off x="12867567" y="5064410"/>
-            <a:ext cx="1193845" cy="276999"/>
+            <a:off x="7961807" y="4173245"/>
+            <a:ext cx="738692" cy="206660"/>
           </a:xfrm>
           <a:prstGeom prst="rect">
             <a:avLst/>
@@ -6215,9 +7382,244 @@
           <a:lstStyle/>
           <a:p>
             <a:r>
-              <a:rPr lang="en-US" sz="1200" dirty="0"/>
+              <a:rPr lang="en-US" sz="743" dirty="0"/>
               <a:t>clam invasion</a:t>
             </a:r>
+          </a:p>
+        </p:txBody>
+      </p:sp>
+      <p:sp>
+        <p:nvSpPr>
+          <p:cNvPr id="21" name="Title 1">
+            <a:extLst>
+              <a:ext uri="{FF2B5EF4-FFF2-40B4-BE49-F238E27FC236}">
+                <a16:creationId xmlns:a16="http://schemas.microsoft.com/office/drawing/2014/main" id="{D2015B4B-0802-4CA1-AFC8-3160D886DB95}"/>
+              </a:ext>
+            </a:extLst>
+          </p:cNvPr>
+          <p:cNvSpPr>
+            <a:spLocks noGrp="1"/>
+          </p:cNvSpPr>
+          <p:nvPr>
+            <p:ph type="ctrTitle"/>
+          </p:nvPr>
+        </p:nvSpPr>
+        <p:spPr>
+          <a:xfrm>
+            <a:off x="2238071" y="213475"/>
+            <a:ext cx="5068906" cy="1207366"/>
+          </a:xfrm>
+        </p:spPr>
+        <p:txBody>
+          <a:bodyPr>
+            <a:normAutofit/>
+          </a:bodyPr>
+          <a:lstStyle/>
+          <a:p>
+            <a:r>
+              <a:rPr lang="en-US" sz="5400" dirty="0"/>
+              <a:t>Chlorophyll</a:t>
+            </a:r>
+          </a:p>
+        </p:txBody>
+      </p:sp>
+      <p:sp>
+        <p:nvSpPr>
+          <p:cNvPr id="22" name="Subtitle 2">
+            <a:extLst>
+              <a:ext uri="{FF2B5EF4-FFF2-40B4-BE49-F238E27FC236}">
+                <a16:creationId xmlns:a16="http://schemas.microsoft.com/office/drawing/2014/main" id="{BBDF106C-EE77-4E45-A4FC-9A83B000C0A0}"/>
+              </a:ext>
+            </a:extLst>
+          </p:cNvPr>
+          <p:cNvSpPr txBox="1">
+            <a:spLocks/>
+          </p:cNvSpPr>
+          <p:nvPr/>
+        </p:nvSpPr>
+        <p:spPr>
+          <a:xfrm>
+            <a:off x="862012" y="130329"/>
+            <a:ext cx="8576956" cy="533535"/>
+          </a:xfrm>
+          <a:prstGeom prst="rect">
+            <a:avLst/>
+          </a:prstGeom>
+        </p:spPr>
+        <p:txBody>
+          <a:bodyPr vert="horz" lIns="91440" tIns="45720" rIns="91440" bIns="45720" rtlCol="0">
+            <a:normAutofit fontScale="85000" lnSpcReduction="10000"/>
+          </a:bodyPr>
+          <a:lstStyle>
+            <a:lvl1pPr marL="0" indent="0" algn="ctr" defTabSz="1005840" rtl="0" eaLnBrk="1" latinLnBrk="0" hangingPunct="1">
+              <a:lnSpc>
+                <a:spcPct val="90000"/>
+              </a:lnSpc>
+              <a:spcBef>
+                <a:spcPts val="1100"/>
+              </a:spcBef>
+              <a:buFont typeface="Arial" panose="020B0604020202020204" pitchFamily="34" charset="0"/>
+              <a:buNone/>
+              <a:defRPr sz="2640" kern="1200">
+                <a:solidFill>
+                  <a:schemeClr val="tx1"/>
+                </a:solidFill>
+                <a:latin typeface="+mn-lt"/>
+                <a:ea typeface="+mn-ea"/>
+                <a:cs typeface="+mn-cs"/>
+              </a:defRPr>
+            </a:lvl1pPr>
+            <a:lvl2pPr marL="502920" indent="0" algn="ctr" defTabSz="1005840" rtl="0" eaLnBrk="1" latinLnBrk="0" hangingPunct="1">
+              <a:lnSpc>
+                <a:spcPct val="90000"/>
+              </a:lnSpc>
+              <a:spcBef>
+                <a:spcPts val="550"/>
+              </a:spcBef>
+              <a:buFont typeface="Arial" panose="020B0604020202020204" pitchFamily="34" charset="0"/>
+              <a:buNone/>
+              <a:defRPr sz="2200" kern="1200">
+                <a:solidFill>
+                  <a:schemeClr val="tx1"/>
+                </a:solidFill>
+                <a:latin typeface="+mn-lt"/>
+                <a:ea typeface="+mn-ea"/>
+                <a:cs typeface="+mn-cs"/>
+              </a:defRPr>
+            </a:lvl2pPr>
+            <a:lvl3pPr marL="1005840" indent="0" algn="ctr" defTabSz="1005840" rtl="0" eaLnBrk="1" latinLnBrk="0" hangingPunct="1">
+              <a:lnSpc>
+                <a:spcPct val="90000"/>
+              </a:lnSpc>
+              <a:spcBef>
+                <a:spcPts val="550"/>
+              </a:spcBef>
+              <a:buFont typeface="Arial" panose="020B0604020202020204" pitchFamily="34" charset="0"/>
+              <a:buNone/>
+              <a:defRPr sz="1980" kern="1200">
+                <a:solidFill>
+                  <a:schemeClr val="tx1"/>
+                </a:solidFill>
+                <a:latin typeface="+mn-lt"/>
+                <a:ea typeface="+mn-ea"/>
+                <a:cs typeface="+mn-cs"/>
+              </a:defRPr>
+            </a:lvl3pPr>
+            <a:lvl4pPr marL="1508760" indent="0" algn="ctr" defTabSz="1005840" rtl="0" eaLnBrk="1" latinLnBrk="0" hangingPunct="1">
+              <a:lnSpc>
+                <a:spcPct val="90000"/>
+              </a:lnSpc>
+              <a:spcBef>
+                <a:spcPts val="550"/>
+              </a:spcBef>
+              <a:buFont typeface="Arial" panose="020B0604020202020204" pitchFamily="34" charset="0"/>
+              <a:buNone/>
+              <a:defRPr sz="1760" kern="1200">
+                <a:solidFill>
+                  <a:schemeClr val="tx1"/>
+                </a:solidFill>
+                <a:latin typeface="+mn-lt"/>
+                <a:ea typeface="+mn-ea"/>
+                <a:cs typeface="+mn-cs"/>
+              </a:defRPr>
+            </a:lvl4pPr>
+            <a:lvl5pPr marL="2011680" indent="0" algn="ctr" defTabSz="1005840" rtl="0" eaLnBrk="1" latinLnBrk="0" hangingPunct="1">
+              <a:lnSpc>
+                <a:spcPct val="90000"/>
+              </a:lnSpc>
+              <a:spcBef>
+                <a:spcPts val="550"/>
+              </a:spcBef>
+              <a:buFont typeface="Arial" panose="020B0604020202020204" pitchFamily="34" charset="0"/>
+              <a:buNone/>
+              <a:defRPr sz="1760" kern="1200">
+                <a:solidFill>
+                  <a:schemeClr val="tx1"/>
+                </a:solidFill>
+                <a:latin typeface="+mn-lt"/>
+                <a:ea typeface="+mn-ea"/>
+                <a:cs typeface="+mn-cs"/>
+              </a:defRPr>
+            </a:lvl5pPr>
+            <a:lvl6pPr marL="2514600" indent="0" algn="ctr" defTabSz="1005840" rtl="0" eaLnBrk="1" latinLnBrk="0" hangingPunct="1">
+              <a:lnSpc>
+                <a:spcPct val="90000"/>
+              </a:lnSpc>
+              <a:spcBef>
+                <a:spcPts val="550"/>
+              </a:spcBef>
+              <a:buFont typeface="Arial" panose="020B0604020202020204" pitchFamily="34" charset="0"/>
+              <a:buNone/>
+              <a:defRPr sz="1760" kern="1200">
+                <a:solidFill>
+                  <a:schemeClr val="tx1"/>
+                </a:solidFill>
+                <a:latin typeface="+mn-lt"/>
+                <a:ea typeface="+mn-ea"/>
+                <a:cs typeface="+mn-cs"/>
+              </a:defRPr>
+            </a:lvl6pPr>
+            <a:lvl7pPr marL="3017520" indent="0" algn="ctr" defTabSz="1005840" rtl="0" eaLnBrk="1" latinLnBrk="0" hangingPunct="1">
+              <a:lnSpc>
+                <a:spcPct val="90000"/>
+              </a:lnSpc>
+              <a:spcBef>
+                <a:spcPts val="550"/>
+              </a:spcBef>
+              <a:buFont typeface="Arial" panose="020B0604020202020204" pitchFamily="34" charset="0"/>
+              <a:buNone/>
+              <a:defRPr sz="1760" kern="1200">
+                <a:solidFill>
+                  <a:schemeClr val="tx1"/>
+                </a:solidFill>
+                <a:latin typeface="+mn-lt"/>
+                <a:ea typeface="+mn-ea"/>
+                <a:cs typeface="+mn-cs"/>
+              </a:defRPr>
+            </a:lvl7pPr>
+            <a:lvl8pPr marL="3520440" indent="0" algn="ctr" defTabSz="1005840" rtl="0" eaLnBrk="1" latinLnBrk="0" hangingPunct="1">
+              <a:lnSpc>
+                <a:spcPct val="90000"/>
+              </a:lnSpc>
+              <a:spcBef>
+                <a:spcPts val="550"/>
+              </a:spcBef>
+              <a:buFont typeface="Arial" panose="020B0604020202020204" pitchFamily="34" charset="0"/>
+              <a:buNone/>
+              <a:defRPr sz="1760" kern="1200">
+                <a:solidFill>
+                  <a:schemeClr val="tx1"/>
+                </a:solidFill>
+                <a:latin typeface="+mn-lt"/>
+                <a:ea typeface="+mn-ea"/>
+                <a:cs typeface="+mn-cs"/>
+              </a:defRPr>
+            </a:lvl8pPr>
+            <a:lvl9pPr marL="4023360" indent="0" algn="ctr" defTabSz="1005840" rtl="0" eaLnBrk="1" latinLnBrk="0" hangingPunct="1">
+              <a:lnSpc>
+                <a:spcPct val="90000"/>
+              </a:lnSpc>
+              <a:spcBef>
+                <a:spcPts val="550"/>
+              </a:spcBef>
+              <a:buFont typeface="Arial" panose="020B0604020202020204" pitchFamily="34" charset="0"/>
+              <a:buNone/>
+              <a:defRPr sz="1760" kern="1200">
+                <a:solidFill>
+                  <a:schemeClr val="tx1"/>
+                </a:solidFill>
+                <a:latin typeface="+mn-lt"/>
+                <a:ea typeface="+mn-ea"/>
+                <a:cs typeface="+mn-cs"/>
+              </a:defRPr>
+            </a:lvl9pPr>
+          </a:lstStyle>
+          <a:p>
+            <a:r>
+              <a:rPr lang="en-US" sz="2400"/>
+              <a:t>Interagency Ecological Program Status &amp; Trends 2017-2018 Winter Season Report</a:t>
+            </a:r>
+            <a:endParaRPr lang="en-US" sz="2400" dirty="0"/>
           </a:p>
         </p:txBody>
       </p:sp>
@@ -6265,8 +7667,8 @@
         </p:nvSpPr>
         <p:spPr>
           <a:xfrm>
-            <a:off x="2045173" y="3190700"/>
-            <a:ext cx="2696331" cy="603114"/>
+            <a:off x="747403" y="2910124"/>
+            <a:ext cx="2156080" cy="408445"/>
           </a:xfrm>
           <a:prstGeom prst="rect">
             <a:avLst/>
@@ -6280,78 +7682,8 @@
           <a:lstStyle/>
           <a:p>
             <a:r>
-              <a:rPr lang="en-US" sz="3319" b="1" dirty="0"/>
+              <a:rPr lang="en-US" sz="2054" b="1" dirty="0"/>
               <a:t>San Pablo Bay</a:t>
-            </a:r>
-          </a:p>
-        </p:txBody>
-      </p:sp>
-      <p:sp>
-        <p:nvSpPr>
-          <p:cNvPr id="2" name="Title 1">
-            <a:extLst>
-              <a:ext uri="{FF2B5EF4-FFF2-40B4-BE49-F238E27FC236}">
-                <a16:creationId xmlns:a16="http://schemas.microsoft.com/office/drawing/2014/main" id="{9684B250-0696-449F-B9C0-D5D3CDC312FF}"/>
-              </a:ext>
-            </a:extLst>
-          </p:cNvPr>
-          <p:cNvSpPr>
-            <a:spLocks noGrp="1"/>
-          </p:cNvSpPr>
-          <p:nvPr>
-            <p:ph type="ctrTitle"/>
-          </p:nvPr>
-        </p:nvSpPr>
-        <p:spPr>
-          <a:xfrm>
-            <a:off x="3344714" y="473975"/>
-            <a:ext cx="8192171" cy="1081969"/>
-          </a:xfrm>
-        </p:spPr>
-        <p:txBody>
-          <a:bodyPr>
-            <a:normAutofit/>
-          </a:bodyPr>
-          <a:lstStyle/>
-          <a:p>
-            <a:r>
-              <a:rPr lang="en-US" sz="6600" dirty="0"/>
-              <a:t>Zooplankton</a:t>
-            </a:r>
-          </a:p>
-        </p:txBody>
-      </p:sp>
-      <p:sp>
-        <p:nvSpPr>
-          <p:cNvPr id="3" name="Subtitle 2">
-            <a:extLst>
-              <a:ext uri="{FF2B5EF4-FFF2-40B4-BE49-F238E27FC236}">
-                <a16:creationId xmlns:a16="http://schemas.microsoft.com/office/drawing/2014/main" id="{61179B21-AFC1-4EF2-A5C6-8A63DE3DE438}"/>
-              </a:ext>
-            </a:extLst>
-          </p:cNvPr>
-          <p:cNvSpPr>
-            <a:spLocks noGrp="1"/>
-          </p:cNvSpPr>
-          <p:nvPr>
-            <p:ph type="subTitle" idx="1"/>
-          </p:nvPr>
-        </p:nvSpPr>
-        <p:spPr>
-          <a:xfrm>
-            <a:off x="1631507" y="57436"/>
-            <a:ext cx="12992986" cy="862278"/>
-          </a:xfrm>
-        </p:spPr>
-        <p:txBody>
-          <a:bodyPr>
-            <a:normAutofit/>
-          </a:bodyPr>
-          <a:lstStyle/>
-          <a:p>
-            <a:r>
-              <a:rPr lang="en-US" sz="2400" dirty="0"/>
-              <a:t>Interagency Ecological Program Status &amp; Trends 2017-2018 Winter Season Report</a:t>
             </a:r>
           </a:p>
         </p:txBody>
@@ -6370,8 +7702,8 @@
         </p:nvSpPr>
         <p:spPr>
           <a:xfrm>
-            <a:off x="1631507" y="1540160"/>
-            <a:ext cx="11121656" cy="1631216"/>
+            <a:off x="580967" y="1500808"/>
+            <a:ext cx="7186517" cy="1323439"/>
           </a:xfrm>
           <a:prstGeom prst="rect">
             <a:avLst/>
@@ -6384,32 +7716,32 @@
           </a:bodyPr>
           <a:lstStyle/>
           <a:p>
-            <a:pPr marL="406405" indent="-406405">
+            <a:pPr marL="251483" indent="-251483">
               <a:buFont typeface="Arial" panose="020B0604020202020204" pitchFamily="34" charset="0"/>
               <a:buChar char="•"/>
             </a:pPr>
             <a:r>
-              <a:rPr lang="en-US" sz="2000" dirty="0"/>
+              <a:rPr lang="en-US" sz="1600" dirty="0"/>
               <a:t>Zooplankton is sampled monthly by the CDFW/DWR Environmental Monitoring Program, but sampling in winter did not begin until 1995. </a:t>
             </a:r>
           </a:p>
           <a:p>
-            <a:pPr marL="406405" indent="-406405">
+            <a:pPr marL="251483" indent="-251483">
               <a:buFont typeface="Arial" panose="020B0604020202020204" pitchFamily="34" charset="0"/>
               <a:buChar char="•"/>
             </a:pPr>
             <a:r>
-              <a:rPr lang="en-US" sz="2000" dirty="0"/>
+              <a:rPr lang="en-US" sz="1600" dirty="0"/>
               <a:t>Zooplankton are an important food source for pelagic fish. Calanoid copepods and mysids are good fish food. Cyclopoid copepods are not as good for fish food.</a:t>
             </a:r>
           </a:p>
           <a:p>
-            <a:pPr marL="406405" indent="-406405">
+            <a:pPr marL="251483" indent="-251483">
               <a:buFont typeface="Arial" panose="020B0604020202020204" pitchFamily="34" charset="0"/>
               <a:buChar char="•"/>
             </a:pPr>
             <a:r>
-              <a:rPr lang="en-US" sz="2000" dirty="0"/>
+              <a:rPr lang="en-US" sz="1600" dirty="0"/>
               <a:t>Biomass tends to be low in the winter. </a:t>
             </a:r>
           </a:p>
@@ -6429,8 +7761,8 @@
         </p:nvSpPr>
         <p:spPr>
           <a:xfrm>
-            <a:off x="5784717" y="3190700"/>
-            <a:ext cx="2343283" cy="603114"/>
+            <a:off x="3977550" y="2910124"/>
+            <a:ext cx="1449906" cy="408445"/>
           </a:xfrm>
           <a:prstGeom prst="rect">
             <a:avLst/>
@@ -6444,7 +7776,7 @@
           <a:lstStyle/>
           <a:p>
             <a:r>
-              <a:rPr lang="en-US" sz="3319" b="1" dirty="0"/>
+              <a:rPr lang="en-US" sz="2054" b="1" dirty="0"/>
               <a:t>Suisun Bay</a:t>
             </a:r>
           </a:p>
@@ -6464,8 +7796,8 @@
         </p:nvSpPr>
         <p:spPr>
           <a:xfrm>
-            <a:off x="8933394" y="3190700"/>
-            <a:ext cx="2603491" cy="603114"/>
+            <a:off x="6501522" y="2910124"/>
+            <a:ext cx="1610910" cy="408445"/>
           </a:xfrm>
           <a:prstGeom prst="rect">
             <a:avLst/>
@@ -6479,7 +7811,7 @@
           <a:lstStyle/>
           <a:p>
             <a:r>
-              <a:rPr lang="en-US" sz="3319" b="1" dirty="0"/>
+              <a:rPr lang="en-US" sz="2054" b="1" dirty="0"/>
               <a:t>The Delta</a:t>
             </a:r>
           </a:p>
@@ -6499,8 +7831,8 @@
         </p:nvSpPr>
         <p:spPr>
           <a:xfrm>
-            <a:off x="5285278" y="7795101"/>
-            <a:ext cx="2767369" cy="1149995"/>
+            <a:off x="3420832" y="6709025"/>
+            <a:ext cx="2472625" cy="830997"/>
           </a:xfrm>
           <a:prstGeom prst="rect">
             <a:avLst/>
@@ -6513,17 +7845,17 @@
           </a:bodyPr>
           <a:lstStyle/>
           <a:p>
-            <a:pPr marL="406405" indent="-406405">
+            <a:pPr marL="251483" indent="-251483">
               <a:buFont typeface="Arial" panose="020B0604020202020204" pitchFamily="34" charset="0"/>
               <a:buChar char="•"/>
             </a:pPr>
             <a:r>
-              <a:rPr lang="en-US" sz="2133" dirty="0"/>
+              <a:rPr lang="en-US" sz="1600" dirty="0"/>
               <a:t>Suisun has a lot of cyclopoid copepods</a:t>
             </a:r>
           </a:p>
           <a:p>
-            <a:endParaRPr lang="en-US" sz="2607" dirty="0"/>
+            <a:endParaRPr lang="en-US" sz="1600" dirty="0"/>
           </a:p>
         </p:txBody>
       </p:sp>
@@ -6541,8 +7873,8 @@
         </p:nvSpPr>
         <p:spPr>
           <a:xfrm>
-            <a:off x="1800705" y="7795034"/>
-            <a:ext cx="2888252" cy="1077026"/>
+            <a:off x="786836" y="6709025"/>
+            <a:ext cx="2205653" cy="830997"/>
           </a:xfrm>
           <a:prstGeom prst="rect">
             <a:avLst/>
@@ -6555,12 +7887,12 @@
           </a:bodyPr>
           <a:lstStyle/>
           <a:p>
-            <a:pPr marL="406405" indent="-406405">
+            <a:pPr marL="251483" indent="-251483">
               <a:buFont typeface="Arial" panose="020B0604020202020204" pitchFamily="34" charset="0"/>
               <a:buChar char="•"/>
             </a:pPr>
             <a:r>
-              <a:rPr lang="en-US" sz="2133" dirty="0"/>
+              <a:rPr lang="en-US" sz="1600" dirty="0"/>
               <a:t>San Pablo Bay is dominated by calanoid copepods</a:t>
             </a:r>
           </a:p>
@@ -6594,8 +7926,8 @@
         </p:blipFill>
         <p:spPr>
           <a:xfrm>
-            <a:off x="12892415" y="2551140"/>
-            <a:ext cx="2931188" cy="1346346"/>
+            <a:off x="8051479" y="2407721"/>
+            <a:ext cx="1813673" cy="833052"/>
           </a:xfrm>
           <a:prstGeom prst="rect">
             <a:avLst/>
@@ -6630,8 +7962,8 @@
         </p:blipFill>
         <p:spPr>
           <a:xfrm rot="16200000">
-            <a:off x="13638715" y="164385"/>
-            <a:ext cx="1598075" cy="2375322"/>
+            <a:off x="8291939" y="795895"/>
+            <a:ext cx="988809" cy="1469730"/>
           </a:xfrm>
           <a:prstGeom prst="rect">
             <a:avLst/>
@@ -6640,10 +7972,10 @@
       </p:pic>
       <p:pic>
         <p:nvPicPr>
-          <p:cNvPr id="11" name="Picture 10">
+          <p:cNvPr id="15" name="Picture 14">
             <a:extLst>
               <a:ext uri="{FF2B5EF4-FFF2-40B4-BE49-F238E27FC236}">
-                <a16:creationId xmlns:a16="http://schemas.microsoft.com/office/drawing/2014/main" id="{995E6C15-2E49-4229-A5F8-8036334A8E4C}"/>
+                <a16:creationId xmlns:a16="http://schemas.microsoft.com/office/drawing/2014/main" id="{D569397F-D5DC-433F-A7B3-6080D2A7B7FC}"/>
               </a:ext>
             </a:extLst>
           </p:cNvPr>
@@ -6666,50 +7998,14 @@
         </p:blipFill>
         <p:spPr>
           <a:xfrm>
-            <a:off x="13448098" y="4522368"/>
-            <a:ext cx="2168371" cy="2852476"/>
+            <a:off x="395709" y="3555102"/>
+            <a:ext cx="8263114" cy="3026546"/>
           </a:xfrm>
           <a:prstGeom prst="rect">
             <a:avLst/>
           </a:prstGeom>
         </p:spPr>
       </p:pic>
-      <p:pic>
-        <p:nvPicPr>
-          <p:cNvPr id="15" name="Picture 14">
-            <a:extLst>
-              <a:ext uri="{FF2B5EF4-FFF2-40B4-BE49-F238E27FC236}">
-                <a16:creationId xmlns:a16="http://schemas.microsoft.com/office/drawing/2014/main" id="{D569397F-D5DC-433F-A7B3-6080D2A7B7FC}"/>
-              </a:ext>
-            </a:extLst>
-          </p:cNvPr>
-          <p:cNvPicPr>
-            <a:picLocks noChangeAspect="1"/>
-          </p:cNvPicPr>
-          <p:nvPr/>
-        </p:nvPicPr>
-        <p:blipFill>
-          <a:blip r:embed="rId6">
-            <a:extLst>
-              <a:ext uri="{28A0092B-C50C-407E-A947-70E740481C1C}">
-                <a14:useLocalDpi xmlns:a14="http://schemas.microsoft.com/office/drawing/2010/main" val="0"/>
-              </a:ext>
-            </a:extLst>
-          </a:blip>
-          <a:stretch>
-            <a:fillRect/>
-          </a:stretch>
-        </p:blipFill>
-        <p:spPr>
-          <a:xfrm>
-            <a:off x="1433845" y="3960081"/>
-            <a:ext cx="10470236" cy="3834953"/>
-          </a:xfrm>
-          <a:prstGeom prst="rect">
-            <a:avLst/>
-          </a:prstGeom>
-        </p:spPr>
-      </p:pic>
       <p:sp>
         <p:nvSpPr>
           <p:cNvPr id="22" name="TextBox 21">
@@ -6724,8 +8020,8 @@
         </p:nvSpPr>
         <p:spPr>
           <a:xfrm>
-            <a:off x="8911599" y="7795034"/>
-            <a:ext cx="3359342" cy="1478225"/>
+            <a:off x="6321801" y="6709025"/>
+            <a:ext cx="2603930" cy="1077218"/>
           </a:xfrm>
           <a:prstGeom prst="rect">
             <a:avLst/>
@@ -6738,17 +8034,252 @@
           </a:bodyPr>
           <a:lstStyle/>
           <a:p>
-            <a:pPr marL="406405" indent="-406405">
+            <a:pPr marL="251483" indent="-251483">
               <a:buFont typeface="Arial" panose="020B0604020202020204" pitchFamily="34" charset="0"/>
               <a:buChar char="•"/>
             </a:pPr>
             <a:r>
-              <a:rPr lang="en-US" sz="2133" dirty="0"/>
+              <a:rPr lang="en-US" sz="1600" dirty="0"/>
               <a:t>The Delta has low zooplankton abundance during the winter.</a:t>
             </a:r>
           </a:p>
           <a:p>
-            <a:endParaRPr lang="en-US" sz="2607" dirty="0"/>
+            <a:endParaRPr lang="en-US" sz="1600" dirty="0"/>
+          </a:p>
+        </p:txBody>
+      </p:sp>
+      <p:sp>
+        <p:nvSpPr>
+          <p:cNvPr id="19" name="Title 1">
+            <a:extLst>
+              <a:ext uri="{FF2B5EF4-FFF2-40B4-BE49-F238E27FC236}">
+                <a16:creationId xmlns:a16="http://schemas.microsoft.com/office/drawing/2014/main" id="{EE131A9A-FBEC-4437-8F83-F0505C8C1EB0}"/>
+              </a:ext>
+            </a:extLst>
+          </p:cNvPr>
+          <p:cNvSpPr>
+            <a:spLocks noGrp="1"/>
+          </p:cNvSpPr>
+          <p:nvPr>
+            <p:ph type="ctrTitle"/>
+          </p:nvPr>
+        </p:nvSpPr>
+        <p:spPr>
+          <a:xfrm>
+            <a:off x="2238071" y="213475"/>
+            <a:ext cx="5068906" cy="1207366"/>
+          </a:xfrm>
+        </p:spPr>
+        <p:txBody>
+          <a:bodyPr>
+            <a:normAutofit/>
+          </a:bodyPr>
+          <a:lstStyle/>
+          <a:p>
+            <a:r>
+              <a:rPr lang="en-US" sz="5400" dirty="0"/>
+              <a:t>Zooplankton</a:t>
+            </a:r>
+          </a:p>
+        </p:txBody>
+      </p:sp>
+      <p:sp>
+        <p:nvSpPr>
+          <p:cNvPr id="20" name="Subtitle 2">
+            <a:extLst>
+              <a:ext uri="{FF2B5EF4-FFF2-40B4-BE49-F238E27FC236}">
+                <a16:creationId xmlns:a16="http://schemas.microsoft.com/office/drawing/2014/main" id="{03F007B3-B35E-4131-84C8-7478F77DA534}"/>
+              </a:ext>
+            </a:extLst>
+          </p:cNvPr>
+          <p:cNvSpPr txBox="1">
+            <a:spLocks/>
+          </p:cNvSpPr>
+          <p:nvPr/>
+        </p:nvSpPr>
+        <p:spPr>
+          <a:xfrm>
+            <a:off x="862012" y="130329"/>
+            <a:ext cx="8576956" cy="533535"/>
+          </a:xfrm>
+          <a:prstGeom prst="rect">
+            <a:avLst/>
+          </a:prstGeom>
+        </p:spPr>
+        <p:txBody>
+          <a:bodyPr vert="horz" lIns="91440" tIns="45720" rIns="91440" bIns="45720" rtlCol="0">
+            <a:normAutofit fontScale="85000" lnSpcReduction="10000"/>
+          </a:bodyPr>
+          <a:lstStyle>
+            <a:lvl1pPr marL="0" indent="0" algn="ctr" defTabSz="1005840" rtl="0" eaLnBrk="1" latinLnBrk="0" hangingPunct="1">
+              <a:lnSpc>
+                <a:spcPct val="90000"/>
+              </a:lnSpc>
+              <a:spcBef>
+                <a:spcPts val="1100"/>
+              </a:spcBef>
+              <a:buFont typeface="Arial" panose="020B0604020202020204" pitchFamily="34" charset="0"/>
+              <a:buNone/>
+              <a:defRPr sz="2640" kern="1200">
+                <a:solidFill>
+                  <a:schemeClr val="tx1"/>
+                </a:solidFill>
+                <a:latin typeface="+mn-lt"/>
+                <a:ea typeface="+mn-ea"/>
+                <a:cs typeface="+mn-cs"/>
+              </a:defRPr>
+            </a:lvl1pPr>
+            <a:lvl2pPr marL="502920" indent="0" algn="ctr" defTabSz="1005840" rtl="0" eaLnBrk="1" latinLnBrk="0" hangingPunct="1">
+              <a:lnSpc>
+                <a:spcPct val="90000"/>
+              </a:lnSpc>
+              <a:spcBef>
+                <a:spcPts val="550"/>
+              </a:spcBef>
+              <a:buFont typeface="Arial" panose="020B0604020202020204" pitchFamily="34" charset="0"/>
+              <a:buNone/>
+              <a:defRPr sz="2200" kern="1200">
+                <a:solidFill>
+                  <a:schemeClr val="tx1"/>
+                </a:solidFill>
+                <a:latin typeface="+mn-lt"/>
+                <a:ea typeface="+mn-ea"/>
+                <a:cs typeface="+mn-cs"/>
+              </a:defRPr>
+            </a:lvl2pPr>
+            <a:lvl3pPr marL="1005840" indent="0" algn="ctr" defTabSz="1005840" rtl="0" eaLnBrk="1" latinLnBrk="0" hangingPunct="1">
+              <a:lnSpc>
+                <a:spcPct val="90000"/>
+              </a:lnSpc>
+              <a:spcBef>
+                <a:spcPts val="550"/>
+              </a:spcBef>
+              <a:buFont typeface="Arial" panose="020B0604020202020204" pitchFamily="34" charset="0"/>
+              <a:buNone/>
+              <a:defRPr sz="1980" kern="1200">
+                <a:solidFill>
+                  <a:schemeClr val="tx1"/>
+                </a:solidFill>
+                <a:latin typeface="+mn-lt"/>
+                <a:ea typeface="+mn-ea"/>
+                <a:cs typeface="+mn-cs"/>
+              </a:defRPr>
+            </a:lvl3pPr>
+            <a:lvl4pPr marL="1508760" indent="0" algn="ctr" defTabSz="1005840" rtl="0" eaLnBrk="1" latinLnBrk="0" hangingPunct="1">
+              <a:lnSpc>
+                <a:spcPct val="90000"/>
+              </a:lnSpc>
+              <a:spcBef>
+                <a:spcPts val="550"/>
+              </a:spcBef>
+              <a:buFont typeface="Arial" panose="020B0604020202020204" pitchFamily="34" charset="0"/>
+              <a:buNone/>
+              <a:defRPr sz="1760" kern="1200">
+                <a:solidFill>
+                  <a:schemeClr val="tx1"/>
+                </a:solidFill>
+                <a:latin typeface="+mn-lt"/>
+                <a:ea typeface="+mn-ea"/>
+                <a:cs typeface="+mn-cs"/>
+              </a:defRPr>
+            </a:lvl4pPr>
+            <a:lvl5pPr marL="2011680" indent="0" algn="ctr" defTabSz="1005840" rtl="0" eaLnBrk="1" latinLnBrk="0" hangingPunct="1">
+              <a:lnSpc>
+                <a:spcPct val="90000"/>
+              </a:lnSpc>
+              <a:spcBef>
+                <a:spcPts val="550"/>
+              </a:spcBef>
+              <a:buFont typeface="Arial" panose="020B0604020202020204" pitchFamily="34" charset="0"/>
+              <a:buNone/>
+              <a:defRPr sz="1760" kern="1200">
+                <a:solidFill>
+                  <a:schemeClr val="tx1"/>
+                </a:solidFill>
+                <a:latin typeface="+mn-lt"/>
+                <a:ea typeface="+mn-ea"/>
+                <a:cs typeface="+mn-cs"/>
+              </a:defRPr>
+            </a:lvl5pPr>
+            <a:lvl6pPr marL="2514600" indent="0" algn="ctr" defTabSz="1005840" rtl="0" eaLnBrk="1" latinLnBrk="0" hangingPunct="1">
+              <a:lnSpc>
+                <a:spcPct val="90000"/>
+              </a:lnSpc>
+              <a:spcBef>
+                <a:spcPts val="550"/>
+              </a:spcBef>
+              <a:buFont typeface="Arial" panose="020B0604020202020204" pitchFamily="34" charset="0"/>
+              <a:buNone/>
+              <a:defRPr sz="1760" kern="1200">
+                <a:solidFill>
+                  <a:schemeClr val="tx1"/>
+                </a:solidFill>
+                <a:latin typeface="+mn-lt"/>
+                <a:ea typeface="+mn-ea"/>
+                <a:cs typeface="+mn-cs"/>
+              </a:defRPr>
+            </a:lvl6pPr>
+            <a:lvl7pPr marL="3017520" indent="0" algn="ctr" defTabSz="1005840" rtl="0" eaLnBrk="1" latinLnBrk="0" hangingPunct="1">
+              <a:lnSpc>
+                <a:spcPct val="90000"/>
+              </a:lnSpc>
+              <a:spcBef>
+                <a:spcPts val="550"/>
+              </a:spcBef>
+              <a:buFont typeface="Arial" panose="020B0604020202020204" pitchFamily="34" charset="0"/>
+              <a:buNone/>
+              <a:defRPr sz="1760" kern="1200">
+                <a:solidFill>
+                  <a:schemeClr val="tx1"/>
+                </a:solidFill>
+                <a:latin typeface="+mn-lt"/>
+                <a:ea typeface="+mn-ea"/>
+                <a:cs typeface="+mn-cs"/>
+              </a:defRPr>
+            </a:lvl7pPr>
+            <a:lvl8pPr marL="3520440" indent="0" algn="ctr" defTabSz="1005840" rtl="0" eaLnBrk="1" latinLnBrk="0" hangingPunct="1">
+              <a:lnSpc>
+                <a:spcPct val="90000"/>
+              </a:lnSpc>
+              <a:spcBef>
+                <a:spcPts val="550"/>
+              </a:spcBef>
+              <a:buFont typeface="Arial" panose="020B0604020202020204" pitchFamily="34" charset="0"/>
+              <a:buNone/>
+              <a:defRPr sz="1760" kern="1200">
+                <a:solidFill>
+                  <a:schemeClr val="tx1"/>
+                </a:solidFill>
+                <a:latin typeface="+mn-lt"/>
+                <a:ea typeface="+mn-ea"/>
+                <a:cs typeface="+mn-cs"/>
+              </a:defRPr>
+            </a:lvl8pPr>
+            <a:lvl9pPr marL="4023360" indent="0" algn="ctr" defTabSz="1005840" rtl="0" eaLnBrk="1" latinLnBrk="0" hangingPunct="1">
+              <a:lnSpc>
+                <a:spcPct val="90000"/>
+              </a:lnSpc>
+              <a:spcBef>
+                <a:spcPts val="550"/>
+              </a:spcBef>
+              <a:buFont typeface="Arial" panose="020B0604020202020204" pitchFamily="34" charset="0"/>
+              <a:buNone/>
+              <a:defRPr sz="1760" kern="1200">
+                <a:solidFill>
+                  <a:schemeClr val="tx1"/>
+                </a:solidFill>
+                <a:latin typeface="+mn-lt"/>
+                <a:ea typeface="+mn-ea"/>
+                <a:cs typeface="+mn-cs"/>
+              </a:defRPr>
+            </a:lvl9pPr>
+          </a:lstStyle>
+          <a:p>
+            <a:r>
+              <a:rPr lang="en-US" sz="2400"/>
+              <a:t>Interagency Ecological Program Status &amp; Trends 2017-2018 Winter Season Report</a:t>
+            </a:r>
+            <a:endParaRPr lang="en-US" sz="2400" dirty="0"/>
           </a:p>
         </p:txBody>
       </p:sp>
@@ -6782,76 +8313,6 @@
           <a:chExt cx="0" cy="0"/>
         </a:xfrm>
       </p:grpSpPr>
-      <p:sp>
-        <p:nvSpPr>
-          <p:cNvPr id="2" name="Title 1">
-            <a:extLst>
-              <a:ext uri="{FF2B5EF4-FFF2-40B4-BE49-F238E27FC236}">
-                <a16:creationId xmlns:a16="http://schemas.microsoft.com/office/drawing/2014/main" id="{9684B250-0696-449F-B9C0-D5D3CDC312FF}"/>
-              </a:ext>
-            </a:extLst>
-          </p:cNvPr>
-          <p:cNvSpPr>
-            <a:spLocks noGrp="1"/>
-          </p:cNvSpPr>
-          <p:nvPr>
-            <p:ph type="ctrTitle"/>
-          </p:nvPr>
-        </p:nvSpPr>
-        <p:spPr>
-          <a:xfrm>
-            <a:off x="3359353" y="-316321"/>
-            <a:ext cx="8192171" cy="1951298"/>
-          </a:xfrm>
-        </p:spPr>
-        <p:txBody>
-          <a:bodyPr>
-            <a:normAutofit/>
-          </a:bodyPr>
-          <a:lstStyle/>
-          <a:p>
-            <a:r>
-              <a:rPr lang="en-US" sz="6600" dirty="0"/>
-              <a:t>FISH</a:t>
-            </a:r>
-          </a:p>
-        </p:txBody>
-      </p:sp>
-      <p:sp>
-        <p:nvSpPr>
-          <p:cNvPr id="3" name="Subtitle 2">
-            <a:extLst>
-              <a:ext uri="{FF2B5EF4-FFF2-40B4-BE49-F238E27FC236}">
-                <a16:creationId xmlns:a16="http://schemas.microsoft.com/office/drawing/2014/main" id="{61179B21-AFC1-4EF2-A5C6-8A63DE3DE438}"/>
-              </a:ext>
-            </a:extLst>
-          </p:cNvPr>
-          <p:cNvSpPr>
-            <a:spLocks noGrp="1"/>
-          </p:cNvSpPr>
-          <p:nvPr>
-            <p:ph type="subTitle" idx="1"/>
-          </p:nvPr>
-        </p:nvSpPr>
-        <p:spPr>
-          <a:xfrm>
-            <a:off x="1631507" y="57436"/>
-            <a:ext cx="12992986" cy="862278"/>
-          </a:xfrm>
-        </p:spPr>
-        <p:txBody>
-          <a:bodyPr>
-            <a:normAutofit/>
-          </a:bodyPr>
-          <a:lstStyle/>
-          <a:p>
-            <a:r>
-              <a:rPr lang="en-US" sz="2400" dirty="0"/>
-              <a:t>Interagency Ecological Program Status &amp; Trends 2017-2018 Winter Season Report</a:t>
-            </a:r>
-          </a:p>
-        </p:txBody>
-      </p:sp>
       <p:pic>
         <p:nvPicPr>
           <p:cNvPr id="7" name="Picture 6">
@@ -6873,8 +8334,8 @@
         </p:blipFill>
         <p:spPr>
           <a:xfrm>
-            <a:off x="7455438" y="2913471"/>
-            <a:ext cx="5281155" cy="3317057"/>
+            <a:off x="4613052" y="2859986"/>
+            <a:ext cx="4854923" cy="3049343"/>
           </a:xfrm>
           <a:prstGeom prst="rect">
             <a:avLst/>
@@ -6895,8 +8356,8 @@
         </p:nvSpPr>
         <p:spPr>
           <a:xfrm>
-            <a:off x="8321978" y="2198208"/>
-            <a:ext cx="4704593" cy="603114"/>
+            <a:off x="5149224" y="2417417"/>
+            <a:ext cx="3817795" cy="408445"/>
           </a:xfrm>
           <a:prstGeom prst="rect">
             <a:avLst/>
@@ -6910,7 +8371,7 @@
           <a:lstStyle/>
           <a:p>
             <a:r>
-              <a:rPr lang="en-US" sz="3319" b="1" dirty="0"/>
+              <a:rPr lang="en-US" sz="2054" b="1" dirty="0"/>
               <a:t>Longfin Smelt – Bay study</a:t>
             </a:r>
           </a:p>
@@ -6930,8 +8391,8 @@
         </p:nvSpPr>
         <p:spPr>
           <a:xfrm>
-            <a:off x="8119185" y="6522791"/>
-            <a:ext cx="4433115" cy="2246769"/>
+            <a:off x="5137776" y="5909329"/>
+            <a:ext cx="4296723" cy="1323439"/>
           </a:xfrm>
           <a:prstGeom prst="rect">
             <a:avLst/>
@@ -6944,22 +8405,22 @@
           </a:bodyPr>
           <a:lstStyle/>
           <a:p>
-            <a:pPr marL="406405" indent="-406405">
+            <a:pPr marL="251483" indent="-251483">
               <a:buFont typeface="Arial" panose="020B0604020202020204" pitchFamily="34" charset="0"/>
               <a:buChar char="•"/>
             </a:pPr>
             <a:r>
-              <a:rPr lang="en-US" sz="2000" dirty="0"/>
+              <a:rPr lang="en-US" sz="1600" dirty="0"/>
               <a:t>Longfin Smelt are listed as Threatened under CESA and have been in decline since the early 2000s. </a:t>
             </a:r>
           </a:p>
           <a:p>
-            <a:pPr marL="406405" indent="-406405">
+            <a:pPr marL="251483" indent="-251483">
               <a:buFont typeface="Arial" panose="020B0604020202020204" pitchFamily="34" charset="0"/>
               <a:buChar char="•"/>
             </a:pPr>
             <a:r>
-              <a:rPr lang="en-US" sz="2000" dirty="0"/>
+              <a:rPr lang="en-US" sz="1600" dirty="0"/>
               <a:t>Longfin Smelt are sampled by CDFW’s San Francisco Bay Study’s midwater trawl.</a:t>
             </a:r>
           </a:p>
@@ -6986,8 +8447,8 @@
         </p:blipFill>
         <p:spPr>
           <a:xfrm>
-            <a:off x="9737200" y="1475346"/>
-            <a:ext cx="1447946" cy="603114"/>
+            <a:off x="6024892" y="1757641"/>
+            <a:ext cx="1406093" cy="585681"/>
           </a:xfrm>
           <a:prstGeom prst="rect">
             <a:avLst/>
@@ -7008,8 +8469,8 @@
         </p:nvSpPr>
         <p:spPr>
           <a:xfrm>
-            <a:off x="966566" y="2283740"/>
-            <a:ext cx="5342902" cy="603114"/>
+            <a:off x="598063" y="2470340"/>
+            <a:ext cx="3305921" cy="408445"/>
           </a:xfrm>
           <a:prstGeom prst="rect">
             <a:avLst/>
@@ -7023,7 +8484,7 @@
           <a:lstStyle/>
           <a:p>
             <a:r>
-              <a:rPr lang="en-US" sz="3319" b="1" dirty="0"/>
+              <a:rPr lang="en-US" sz="2054" b="1" dirty="0"/>
               <a:t>White Sturgeon – Bay Study</a:t>
             </a:r>
           </a:p>
@@ -7043,8 +8504,8 @@
         </p:nvSpPr>
         <p:spPr>
           <a:xfrm>
-            <a:off x="1201915" y="6365823"/>
-            <a:ext cx="3613154" cy="1846659"/>
+            <a:off x="598063" y="5966589"/>
+            <a:ext cx="3501989" cy="1569660"/>
           </a:xfrm>
           <a:prstGeom prst="rect">
             <a:avLst/>
@@ -7057,27 +8518,27 @@
           </a:bodyPr>
           <a:lstStyle/>
           <a:p>
-            <a:pPr marL="406405" indent="-406405">
+            <a:pPr marL="251483" indent="-251483">
               <a:buFont typeface="Arial" panose="020B0604020202020204" pitchFamily="34" charset="0"/>
               <a:buChar char="•"/>
             </a:pPr>
             <a:r>
-              <a:rPr lang="en-US" sz="2000" dirty="0"/>
+              <a:rPr lang="en-US" sz="1600" dirty="0"/>
               <a:t>White sturgeon support a recreational fishery</a:t>
             </a:r>
           </a:p>
           <a:p>
-            <a:pPr marL="406405" indent="-406405">
+            <a:pPr marL="251483" indent="-251483">
               <a:buFont typeface="Arial" panose="020B0604020202020204" pitchFamily="34" charset="0"/>
               <a:buChar char="•"/>
             </a:pPr>
             <a:r>
-              <a:rPr lang="en-US" sz="2000" dirty="0"/>
+              <a:rPr lang="en-US" sz="1600" dirty="0"/>
               <a:t>Juvenile sturgeon are caught in CDFW’s San Francisco Bay Study’s otter trawl.</a:t>
             </a:r>
           </a:p>
           <a:p>
-            <a:endParaRPr lang="en-US" sz="1400" dirty="0"/>
+            <a:endParaRPr lang="en-US" sz="1600" dirty="0"/>
           </a:p>
         </p:txBody>
       </p:sp>
@@ -7103,8 +8564,8 @@
         </p:blipFill>
         <p:spPr>
           <a:xfrm>
-            <a:off x="966566" y="2771487"/>
-            <a:ext cx="4258170" cy="3296494"/>
+            <a:off x="375494" y="2833269"/>
+            <a:ext cx="4014989" cy="3108234"/>
           </a:xfrm>
           <a:prstGeom prst="rect">
             <a:avLst/>
@@ -7155,8 +8616,8 @@
         </p:blipFill>
         <p:spPr bwMode="auto">
           <a:xfrm>
-            <a:off x="1622895" y="1277029"/>
-            <a:ext cx="2228400" cy="946554"/>
+            <a:off x="1004166" y="1503987"/>
+            <a:ext cx="2187382" cy="929130"/>
           </a:xfrm>
           <a:prstGeom prst="rect">
             <a:avLst/>
@@ -7173,6 +8634,241 @@
           </a:extLst>
         </p:spPr>
       </p:pic>
+      <p:sp>
+        <p:nvSpPr>
+          <p:cNvPr id="18" name="Title 1">
+            <a:extLst>
+              <a:ext uri="{FF2B5EF4-FFF2-40B4-BE49-F238E27FC236}">
+                <a16:creationId xmlns:a16="http://schemas.microsoft.com/office/drawing/2014/main" id="{4C602100-4414-42BE-8791-672767ADEBA7}"/>
+              </a:ext>
+            </a:extLst>
+          </p:cNvPr>
+          <p:cNvSpPr>
+            <a:spLocks noGrp="1"/>
+          </p:cNvSpPr>
+          <p:nvPr>
+            <p:ph type="ctrTitle"/>
+          </p:nvPr>
+        </p:nvSpPr>
+        <p:spPr>
+          <a:xfrm>
+            <a:off x="2238071" y="213475"/>
+            <a:ext cx="5068906" cy="1207366"/>
+          </a:xfrm>
+        </p:spPr>
+        <p:txBody>
+          <a:bodyPr>
+            <a:normAutofit/>
+          </a:bodyPr>
+          <a:lstStyle/>
+          <a:p>
+            <a:r>
+              <a:rPr lang="en-US" sz="5400" dirty="0"/>
+              <a:t>Fish</a:t>
+            </a:r>
+          </a:p>
+        </p:txBody>
+      </p:sp>
+      <p:sp>
+        <p:nvSpPr>
+          <p:cNvPr id="20" name="Subtitle 2">
+            <a:extLst>
+              <a:ext uri="{FF2B5EF4-FFF2-40B4-BE49-F238E27FC236}">
+                <a16:creationId xmlns:a16="http://schemas.microsoft.com/office/drawing/2014/main" id="{EFE3599B-82CA-478B-BE6F-B13B54FFA065}"/>
+              </a:ext>
+            </a:extLst>
+          </p:cNvPr>
+          <p:cNvSpPr txBox="1">
+            <a:spLocks/>
+          </p:cNvSpPr>
+          <p:nvPr/>
+        </p:nvSpPr>
+        <p:spPr>
+          <a:xfrm>
+            <a:off x="862012" y="130329"/>
+            <a:ext cx="8576956" cy="533535"/>
+          </a:xfrm>
+          <a:prstGeom prst="rect">
+            <a:avLst/>
+          </a:prstGeom>
+        </p:spPr>
+        <p:txBody>
+          <a:bodyPr vert="horz" lIns="91440" tIns="45720" rIns="91440" bIns="45720" rtlCol="0">
+            <a:normAutofit fontScale="85000" lnSpcReduction="10000"/>
+          </a:bodyPr>
+          <a:lstStyle>
+            <a:lvl1pPr marL="0" indent="0" algn="ctr" defTabSz="1005840" rtl="0" eaLnBrk="1" latinLnBrk="0" hangingPunct="1">
+              <a:lnSpc>
+                <a:spcPct val="90000"/>
+              </a:lnSpc>
+              <a:spcBef>
+                <a:spcPts val="1100"/>
+              </a:spcBef>
+              <a:buFont typeface="Arial" panose="020B0604020202020204" pitchFamily="34" charset="0"/>
+              <a:buNone/>
+              <a:defRPr sz="2640" kern="1200">
+                <a:solidFill>
+                  <a:schemeClr val="tx1"/>
+                </a:solidFill>
+                <a:latin typeface="+mn-lt"/>
+                <a:ea typeface="+mn-ea"/>
+                <a:cs typeface="+mn-cs"/>
+              </a:defRPr>
+            </a:lvl1pPr>
+            <a:lvl2pPr marL="502920" indent="0" algn="ctr" defTabSz="1005840" rtl="0" eaLnBrk="1" latinLnBrk="0" hangingPunct="1">
+              <a:lnSpc>
+                <a:spcPct val="90000"/>
+              </a:lnSpc>
+              <a:spcBef>
+                <a:spcPts val="550"/>
+              </a:spcBef>
+              <a:buFont typeface="Arial" panose="020B0604020202020204" pitchFamily="34" charset="0"/>
+              <a:buNone/>
+              <a:defRPr sz="2200" kern="1200">
+                <a:solidFill>
+                  <a:schemeClr val="tx1"/>
+                </a:solidFill>
+                <a:latin typeface="+mn-lt"/>
+                <a:ea typeface="+mn-ea"/>
+                <a:cs typeface="+mn-cs"/>
+              </a:defRPr>
+            </a:lvl2pPr>
+            <a:lvl3pPr marL="1005840" indent="0" algn="ctr" defTabSz="1005840" rtl="0" eaLnBrk="1" latinLnBrk="0" hangingPunct="1">
+              <a:lnSpc>
+                <a:spcPct val="90000"/>
+              </a:lnSpc>
+              <a:spcBef>
+                <a:spcPts val="550"/>
+              </a:spcBef>
+              <a:buFont typeface="Arial" panose="020B0604020202020204" pitchFamily="34" charset="0"/>
+              <a:buNone/>
+              <a:defRPr sz="1980" kern="1200">
+                <a:solidFill>
+                  <a:schemeClr val="tx1"/>
+                </a:solidFill>
+                <a:latin typeface="+mn-lt"/>
+                <a:ea typeface="+mn-ea"/>
+                <a:cs typeface="+mn-cs"/>
+              </a:defRPr>
+            </a:lvl3pPr>
+            <a:lvl4pPr marL="1508760" indent="0" algn="ctr" defTabSz="1005840" rtl="0" eaLnBrk="1" latinLnBrk="0" hangingPunct="1">
+              <a:lnSpc>
+                <a:spcPct val="90000"/>
+              </a:lnSpc>
+              <a:spcBef>
+                <a:spcPts val="550"/>
+              </a:spcBef>
+              <a:buFont typeface="Arial" panose="020B0604020202020204" pitchFamily="34" charset="0"/>
+              <a:buNone/>
+              <a:defRPr sz="1760" kern="1200">
+                <a:solidFill>
+                  <a:schemeClr val="tx1"/>
+                </a:solidFill>
+                <a:latin typeface="+mn-lt"/>
+                <a:ea typeface="+mn-ea"/>
+                <a:cs typeface="+mn-cs"/>
+              </a:defRPr>
+            </a:lvl4pPr>
+            <a:lvl5pPr marL="2011680" indent="0" algn="ctr" defTabSz="1005840" rtl="0" eaLnBrk="1" latinLnBrk="0" hangingPunct="1">
+              <a:lnSpc>
+                <a:spcPct val="90000"/>
+              </a:lnSpc>
+              <a:spcBef>
+                <a:spcPts val="550"/>
+              </a:spcBef>
+              <a:buFont typeface="Arial" panose="020B0604020202020204" pitchFamily="34" charset="0"/>
+              <a:buNone/>
+              <a:defRPr sz="1760" kern="1200">
+                <a:solidFill>
+                  <a:schemeClr val="tx1"/>
+                </a:solidFill>
+                <a:latin typeface="+mn-lt"/>
+                <a:ea typeface="+mn-ea"/>
+                <a:cs typeface="+mn-cs"/>
+              </a:defRPr>
+            </a:lvl5pPr>
+            <a:lvl6pPr marL="2514600" indent="0" algn="ctr" defTabSz="1005840" rtl="0" eaLnBrk="1" latinLnBrk="0" hangingPunct="1">
+              <a:lnSpc>
+                <a:spcPct val="90000"/>
+              </a:lnSpc>
+              <a:spcBef>
+                <a:spcPts val="550"/>
+              </a:spcBef>
+              <a:buFont typeface="Arial" panose="020B0604020202020204" pitchFamily="34" charset="0"/>
+              <a:buNone/>
+              <a:defRPr sz="1760" kern="1200">
+                <a:solidFill>
+                  <a:schemeClr val="tx1"/>
+                </a:solidFill>
+                <a:latin typeface="+mn-lt"/>
+                <a:ea typeface="+mn-ea"/>
+                <a:cs typeface="+mn-cs"/>
+              </a:defRPr>
+            </a:lvl6pPr>
+            <a:lvl7pPr marL="3017520" indent="0" algn="ctr" defTabSz="1005840" rtl="0" eaLnBrk="1" latinLnBrk="0" hangingPunct="1">
+              <a:lnSpc>
+                <a:spcPct val="90000"/>
+              </a:lnSpc>
+              <a:spcBef>
+                <a:spcPts val="550"/>
+              </a:spcBef>
+              <a:buFont typeface="Arial" panose="020B0604020202020204" pitchFamily="34" charset="0"/>
+              <a:buNone/>
+              <a:defRPr sz="1760" kern="1200">
+                <a:solidFill>
+                  <a:schemeClr val="tx1"/>
+                </a:solidFill>
+                <a:latin typeface="+mn-lt"/>
+                <a:ea typeface="+mn-ea"/>
+                <a:cs typeface="+mn-cs"/>
+              </a:defRPr>
+            </a:lvl7pPr>
+            <a:lvl8pPr marL="3520440" indent="0" algn="ctr" defTabSz="1005840" rtl="0" eaLnBrk="1" latinLnBrk="0" hangingPunct="1">
+              <a:lnSpc>
+                <a:spcPct val="90000"/>
+              </a:lnSpc>
+              <a:spcBef>
+                <a:spcPts val="550"/>
+              </a:spcBef>
+              <a:buFont typeface="Arial" panose="020B0604020202020204" pitchFamily="34" charset="0"/>
+              <a:buNone/>
+              <a:defRPr sz="1760" kern="1200">
+                <a:solidFill>
+                  <a:schemeClr val="tx1"/>
+                </a:solidFill>
+                <a:latin typeface="+mn-lt"/>
+                <a:ea typeface="+mn-ea"/>
+                <a:cs typeface="+mn-cs"/>
+              </a:defRPr>
+            </a:lvl8pPr>
+            <a:lvl9pPr marL="4023360" indent="0" algn="ctr" defTabSz="1005840" rtl="0" eaLnBrk="1" latinLnBrk="0" hangingPunct="1">
+              <a:lnSpc>
+                <a:spcPct val="90000"/>
+              </a:lnSpc>
+              <a:spcBef>
+                <a:spcPts val="550"/>
+              </a:spcBef>
+              <a:buFont typeface="Arial" panose="020B0604020202020204" pitchFamily="34" charset="0"/>
+              <a:buNone/>
+              <a:defRPr sz="1760" kern="1200">
+                <a:solidFill>
+                  <a:schemeClr val="tx1"/>
+                </a:solidFill>
+                <a:latin typeface="+mn-lt"/>
+                <a:ea typeface="+mn-ea"/>
+                <a:cs typeface="+mn-cs"/>
+              </a:defRPr>
+            </a:lvl9pPr>
+          </a:lstStyle>
+          <a:p>
+            <a:r>
+              <a:rPr lang="en-US" sz="2400"/>
+              <a:t>Interagency Ecological Program Status &amp; Trends 2017-2018 Winter Season Report</a:t>
+            </a:r>
+            <a:endParaRPr lang="en-US" sz="2400" dirty="0"/>
+          </a:p>
+        </p:txBody>
+      </p:sp>
     </p:spTree>
     <p:extLst>
       <p:ext uri="{BB962C8B-B14F-4D97-AF65-F5344CB8AC3E}">
@@ -7203,76 +8899,6 @@
           <a:chExt cx="0" cy="0"/>
         </a:xfrm>
       </p:grpSpPr>
-      <p:sp>
-        <p:nvSpPr>
-          <p:cNvPr id="2" name="Title 1">
-            <a:extLst>
-              <a:ext uri="{FF2B5EF4-FFF2-40B4-BE49-F238E27FC236}">
-                <a16:creationId xmlns:a16="http://schemas.microsoft.com/office/drawing/2014/main" id="{9684B250-0696-449F-B9C0-D5D3CDC312FF}"/>
-              </a:ext>
-            </a:extLst>
-          </p:cNvPr>
-          <p:cNvSpPr>
-            <a:spLocks noGrp="1"/>
-          </p:cNvSpPr>
-          <p:nvPr>
-            <p:ph type="ctrTitle"/>
-          </p:nvPr>
-        </p:nvSpPr>
-        <p:spPr>
-          <a:xfrm>
-            <a:off x="3359353" y="-316321"/>
-            <a:ext cx="8192171" cy="1951298"/>
-          </a:xfrm>
-        </p:spPr>
-        <p:txBody>
-          <a:bodyPr>
-            <a:normAutofit/>
-          </a:bodyPr>
-          <a:lstStyle/>
-          <a:p>
-            <a:r>
-              <a:rPr lang="en-US" sz="6600" dirty="0"/>
-              <a:t>Recent Trends</a:t>
-            </a:r>
-          </a:p>
-        </p:txBody>
-      </p:sp>
-      <p:sp>
-        <p:nvSpPr>
-          <p:cNvPr id="3" name="Subtitle 2">
-            <a:extLst>
-              <a:ext uri="{FF2B5EF4-FFF2-40B4-BE49-F238E27FC236}">
-                <a16:creationId xmlns:a16="http://schemas.microsoft.com/office/drawing/2014/main" id="{61179B21-AFC1-4EF2-A5C6-8A63DE3DE438}"/>
-              </a:ext>
-            </a:extLst>
-          </p:cNvPr>
-          <p:cNvSpPr>
-            <a:spLocks noGrp="1"/>
-          </p:cNvSpPr>
-          <p:nvPr>
-            <p:ph type="subTitle" idx="1"/>
-          </p:nvPr>
-        </p:nvSpPr>
-        <p:spPr>
-          <a:xfrm>
-            <a:off x="1631507" y="57436"/>
-            <a:ext cx="12992986" cy="862278"/>
-          </a:xfrm>
-        </p:spPr>
-        <p:txBody>
-          <a:bodyPr>
-            <a:normAutofit/>
-          </a:bodyPr>
-          <a:lstStyle/>
-          <a:p>
-            <a:r>
-              <a:rPr lang="en-US" sz="2400" dirty="0"/>
-              <a:t>Interagency Ecological Program Status &amp; Trends 2017-2018 Winter Season Report</a:t>
-            </a:r>
-          </a:p>
-        </p:txBody>
-      </p:sp>
       <p:pic>
         <p:nvPicPr>
           <p:cNvPr id="5" name="Picture 4">
@@ -7301,8 +8927,8 @@
         </p:blipFill>
         <p:spPr>
           <a:xfrm>
-            <a:off x="627707" y="2915136"/>
-            <a:ext cx="4164248" cy="2643369"/>
+            <a:off x="67228" y="2691610"/>
+            <a:ext cx="3345334" cy="2123542"/>
           </a:xfrm>
           <a:prstGeom prst="rect">
             <a:avLst/>
@@ -7323,8 +8949,8 @@
         </p:nvSpPr>
         <p:spPr>
           <a:xfrm>
-            <a:off x="1151750" y="2312022"/>
-            <a:ext cx="3711098" cy="603114"/>
+            <a:off x="719871" y="2190720"/>
+            <a:ext cx="2296242" cy="408445"/>
           </a:xfrm>
           <a:prstGeom prst="rect">
             <a:avLst/>
@@ -7338,7 +8964,7 @@
           <a:lstStyle/>
           <a:p>
             <a:r>
-              <a:rPr lang="en-US" sz="3319" b="1" dirty="0"/>
+              <a:rPr lang="en-US" sz="2054" b="1" dirty="0"/>
               <a:t>Delta Smelt - SKT</a:t>
             </a:r>
           </a:p>
@@ -7358,8 +8984,8 @@
         </p:nvSpPr>
         <p:spPr>
           <a:xfrm>
-            <a:off x="800591" y="5542810"/>
-            <a:ext cx="3765867" cy="2554545"/>
+            <a:off x="317657" y="5054869"/>
+            <a:ext cx="2860420" cy="2308324"/>
           </a:xfrm>
           <a:prstGeom prst="rect">
             <a:avLst/>
@@ -7372,22 +8998,22 @@
           </a:bodyPr>
           <a:lstStyle/>
           <a:p>
-            <a:pPr marL="406405" indent="-406405">
+            <a:pPr marL="251483" indent="-251483">
               <a:buFont typeface="Arial" panose="020B0604020202020204" pitchFamily="34" charset="0"/>
               <a:buChar char="•"/>
             </a:pPr>
             <a:r>
-              <a:rPr lang="en-US" sz="2000" dirty="0"/>
+              <a:rPr lang="en-US" sz="1600" dirty="0"/>
               <a:t>Delta Smelt are ESA listed as Threatened, CESA listed as Endangered and have been in decline since the early 2000s</a:t>
             </a:r>
           </a:p>
           <a:p>
-            <a:pPr marL="406405" indent="-406405">
+            <a:pPr marL="251483" indent="-251483">
               <a:buFont typeface="Arial" panose="020B0604020202020204" pitchFamily="34" charset="0"/>
               <a:buChar char="•"/>
             </a:pPr>
             <a:r>
-              <a:rPr lang="en-US" sz="2000" dirty="0"/>
+              <a:rPr lang="en-US" sz="1600" dirty="0"/>
               <a:t>CDFW’s Spring Kodiak Trawl is designed to monitor adult Delta Smelt from January-March.</a:t>
             </a:r>
           </a:p>
@@ -7415,8 +9041,8 @@
         </p:blipFill>
         <p:spPr>
           <a:xfrm>
-            <a:off x="1872946" y="1578444"/>
-            <a:ext cx="1621159" cy="645139"/>
+            <a:off x="1195609" y="1501307"/>
+            <a:ext cx="1517356" cy="603831"/>
           </a:xfrm>
           <a:prstGeom prst="rect">
             <a:avLst/>
@@ -7437,8 +9063,8 @@
         </p:nvSpPr>
         <p:spPr>
           <a:xfrm>
-            <a:off x="9721477" y="1666635"/>
-            <a:ext cx="3271481" cy="1113895"/>
+            <a:off x="6759165" y="2245442"/>
+            <a:ext cx="3020681" cy="408445"/>
           </a:xfrm>
           <a:prstGeom prst="rect">
             <a:avLst/>
@@ -7452,7 +9078,7 @@
           <a:lstStyle/>
           <a:p>
             <a:r>
-              <a:rPr lang="en-US" sz="3319" b="1" dirty="0"/>
+              <a:rPr lang="en-US" sz="2054" b="1" dirty="0"/>
               <a:t>Juvenile Chinook - DJFMP</a:t>
             </a:r>
           </a:p>
@@ -7472,8 +9098,8 @@
         </p:nvSpPr>
         <p:spPr>
           <a:xfrm>
-            <a:off x="5315998" y="1873388"/>
-            <a:ext cx="3711098" cy="1113895"/>
+            <a:off x="3355897" y="2245442"/>
+            <a:ext cx="3294279" cy="408445"/>
           </a:xfrm>
           <a:prstGeom prst="rect">
             <a:avLst/>
@@ -7487,7 +9113,7 @@
           <a:lstStyle/>
           <a:p>
             <a:r>
-              <a:rPr lang="en-US" sz="3319" b="1" dirty="0"/>
+              <a:rPr lang="en-US" sz="2054" b="1" dirty="0"/>
               <a:t>Winter-Run Chinook - RBDD</a:t>
             </a:r>
           </a:p>
@@ -7507,8 +9133,8 @@
         </p:nvSpPr>
         <p:spPr>
           <a:xfrm>
-            <a:off x="9721477" y="5884768"/>
-            <a:ext cx="3897914" cy="2554545"/>
+            <a:off x="6412155" y="5054869"/>
+            <a:ext cx="3196293" cy="2062103"/>
           </a:xfrm>
           <a:prstGeom prst="rect">
             <a:avLst/>
@@ -7521,25 +9147,24 @@
           </a:bodyPr>
           <a:lstStyle/>
           <a:p>
-            <a:pPr marL="406405" indent="-406405">
+            <a:pPr marL="251483" indent="-251483">
               <a:buFont typeface="Arial" panose="020B0604020202020204" pitchFamily="34" charset="0"/>
               <a:buChar char="•"/>
             </a:pPr>
             <a:r>
-              <a:rPr lang="en-US" sz="2000" dirty="0"/>
+              <a:rPr lang="en-US" sz="1600" dirty="0"/>
               <a:t>USFWS’s Delta Juvenile Fish Monitoring Program runs beach seines to show landscape patterns of juvenile Chinook Salmon.</a:t>
             </a:r>
           </a:p>
           <a:p>
-            <a:pPr marL="406405" indent="-406405">
+            <a:pPr marL="251483" indent="-251483">
               <a:buFont typeface="Arial" panose="020B0604020202020204" pitchFamily="34" charset="0"/>
               <a:buChar char="•"/>
             </a:pPr>
             <a:r>
-              <a:rPr lang="en-US" sz="2000" dirty="0"/>
+              <a:rPr lang="en-US" sz="1600" dirty="0"/>
               <a:t>Researchers use these patterns to determine differences in salmon life-history.</a:t>
             </a:r>
-            <a:endParaRPr lang="en-US" sz="1400" dirty="0"/>
           </a:p>
         </p:txBody>
       </p:sp>
@@ -7557,8 +9182,8 @@
         </p:nvSpPr>
         <p:spPr>
           <a:xfrm>
-            <a:off x="5067956" y="5735645"/>
-            <a:ext cx="3897914" cy="2246769"/>
+            <a:off x="3483721" y="5054869"/>
+            <a:ext cx="2960718" cy="1815882"/>
           </a:xfrm>
           <a:prstGeom prst="rect">
             <a:avLst/>
@@ -7571,25 +9196,24 @@
           </a:bodyPr>
           <a:lstStyle/>
           <a:p>
-            <a:pPr marL="406405" indent="-406405">
+            <a:pPr marL="251483" indent="-251483">
               <a:buFont typeface="Arial" panose="020B0604020202020204" pitchFamily="34" charset="0"/>
               <a:buChar char="•"/>
             </a:pPr>
             <a:r>
-              <a:rPr lang="en-US" sz="2000" dirty="0"/>
+              <a:rPr lang="en-US" sz="1600" dirty="0"/>
               <a:t>Juvenile Chinook pass Red Bluff Diversion Dam as they migrate from spawning grounds to the ocean.</a:t>
             </a:r>
           </a:p>
           <a:p>
-            <a:pPr marL="406405" indent="-406405">
+            <a:pPr marL="251483" indent="-251483">
               <a:buFont typeface="Arial" panose="020B0604020202020204" pitchFamily="34" charset="0"/>
               <a:buChar char="•"/>
             </a:pPr>
             <a:r>
-              <a:rPr lang="en-US" sz="2000" dirty="0"/>
+              <a:rPr lang="en-US" sz="1600" dirty="0"/>
               <a:t>Sampling at the dam provides an estimate of production in the upper watershed.</a:t>
             </a:r>
-            <a:endParaRPr lang="en-US" sz="1400" dirty="0"/>
           </a:p>
         </p:txBody>
       </p:sp>
@@ -7621,8 +9245,8 @@
         </p:blipFill>
         <p:spPr>
           <a:xfrm>
-            <a:off x="9327646" y="2882194"/>
-            <a:ext cx="4447756" cy="2878742"/>
+            <a:off x="6670036" y="2651649"/>
+            <a:ext cx="3196293" cy="2068752"/>
           </a:xfrm>
           <a:prstGeom prst="rect">
             <a:avLst/>
@@ -7631,10 +9255,10 @@
       </p:pic>
       <p:pic>
         <p:nvPicPr>
-          <p:cNvPr id="26" name="Picture 25">
+          <p:cNvPr id="28" name="Picture 27">
             <a:extLst>
               <a:ext uri="{FF2B5EF4-FFF2-40B4-BE49-F238E27FC236}">
-                <a16:creationId xmlns:a16="http://schemas.microsoft.com/office/drawing/2014/main" id="{96423E21-8229-4C54-96FC-7632C92550A1}"/>
+                <a16:creationId xmlns:a16="http://schemas.microsoft.com/office/drawing/2014/main" id="{AAE4D102-3A88-4232-9826-92273C624518}"/>
               </a:ext>
             </a:extLst>
           </p:cNvPr>
@@ -7651,20 +9275,255 @@
         </p:blipFill>
         <p:spPr>
           <a:xfrm>
-            <a:off x="5251317" y="2988265"/>
-            <a:ext cx="3529467" cy="2554545"/>
+            <a:off x="7319201" y="1644435"/>
+            <a:ext cx="1666239" cy="422808"/>
           </a:xfrm>
           <a:prstGeom prst="rect">
             <a:avLst/>
           </a:prstGeom>
         </p:spPr>
       </p:pic>
+      <p:sp>
+        <p:nvSpPr>
+          <p:cNvPr id="19" name="Title 1">
+            <a:extLst>
+              <a:ext uri="{FF2B5EF4-FFF2-40B4-BE49-F238E27FC236}">
+                <a16:creationId xmlns:a16="http://schemas.microsoft.com/office/drawing/2014/main" id="{04BF57BC-6BB5-4635-A92E-6FB734DBC818}"/>
+              </a:ext>
+            </a:extLst>
+          </p:cNvPr>
+          <p:cNvSpPr>
+            <a:spLocks noGrp="1"/>
+          </p:cNvSpPr>
+          <p:nvPr>
+            <p:ph type="ctrTitle"/>
+          </p:nvPr>
+        </p:nvSpPr>
+        <p:spPr>
+          <a:xfrm>
+            <a:off x="2238071" y="213475"/>
+            <a:ext cx="5068906" cy="1207366"/>
+          </a:xfrm>
+        </p:spPr>
+        <p:txBody>
+          <a:bodyPr>
+            <a:normAutofit/>
+          </a:bodyPr>
+          <a:lstStyle/>
+          <a:p>
+            <a:r>
+              <a:rPr lang="en-US" sz="5400" dirty="0"/>
+              <a:t>Recent Trends</a:t>
+            </a:r>
+          </a:p>
+        </p:txBody>
+      </p:sp>
+      <p:sp>
+        <p:nvSpPr>
+          <p:cNvPr id="20" name="Subtitle 2">
+            <a:extLst>
+              <a:ext uri="{FF2B5EF4-FFF2-40B4-BE49-F238E27FC236}">
+                <a16:creationId xmlns:a16="http://schemas.microsoft.com/office/drawing/2014/main" id="{DF6E8E3A-B2E7-470B-80B1-D25504F42C8D}"/>
+              </a:ext>
+            </a:extLst>
+          </p:cNvPr>
+          <p:cNvSpPr txBox="1">
+            <a:spLocks/>
+          </p:cNvSpPr>
+          <p:nvPr/>
+        </p:nvSpPr>
+        <p:spPr>
+          <a:xfrm>
+            <a:off x="862012" y="130329"/>
+            <a:ext cx="8576956" cy="533535"/>
+          </a:xfrm>
+          <a:prstGeom prst="rect">
+            <a:avLst/>
+          </a:prstGeom>
+        </p:spPr>
+        <p:txBody>
+          <a:bodyPr vert="horz" lIns="91440" tIns="45720" rIns="91440" bIns="45720" rtlCol="0">
+            <a:normAutofit fontScale="85000" lnSpcReduction="10000"/>
+          </a:bodyPr>
+          <a:lstStyle>
+            <a:lvl1pPr marL="0" indent="0" algn="ctr" defTabSz="1005840" rtl="0" eaLnBrk="1" latinLnBrk="0" hangingPunct="1">
+              <a:lnSpc>
+                <a:spcPct val="90000"/>
+              </a:lnSpc>
+              <a:spcBef>
+                <a:spcPts val="1100"/>
+              </a:spcBef>
+              <a:buFont typeface="Arial" panose="020B0604020202020204" pitchFamily="34" charset="0"/>
+              <a:buNone/>
+              <a:defRPr sz="2640" kern="1200">
+                <a:solidFill>
+                  <a:schemeClr val="tx1"/>
+                </a:solidFill>
+                <a:latin typeface="+mn-lt"/>
+                <a:ea typeface="+mn-ea"/>
+                <a:cs typeface="+mn-cs"/>
+              </a:defRPr>
+            </a:lvl1pPr>
+            <a:lvl2pPr marL="502920" indent="0" algn="ctr" defTabSz="1005840" rtl="0" eaLnBrk="1" latinLnBrk="0" hangingPunct="1">
+              <a:lnSpc>
+                <a:spcPct val="90000"/>
+              </a:lnSpc>
+              <a:spcBef>
+                <a:spcPts val="550"/>
+              </a:spcBef>
+              <a:buFont typeface="Arial" panose="020B0604020202020204" pitchFamily="34" charset="0"/>
+              <a:buNone/>
+              <a:defRPr sz="2200" kern="1200">
+                <a:solidFill>
+                  <a:schemeClr val="tx1"/>
+                </a:solidFill>
+                <a:latin typeface="+mn-lt"/>
+                <a:ea typeface="+mn-ea"/>
+                <a:cs typeface="+mn-cs"/>
+              </a:defRPr>
+            </a:lvl2pPr>
+            <a:lvl3pPr marL="1005840" indent="0" algn="ctr" defTabSz="1005840" rtl="0" eaLnBrk="1" latinLnBrk="0" hangingPunct="1">
+              <a:lnSpc>
+                <a:spcPct val="90000"/>
+              </a:lnSpc>
+              <a:spcBef>
+                <a:spcPts val="550"/>
+              </a:spcBef>
+              <a:buFont typeface="Arial" panose="020B0604020202020204" pitchFamily="34" charset="0"/>
+              <a:buNone/>
+              <a:defRPr sz="1980" kern="1200">
+                <a:solidFill>
+                  <a:schemeClr val="tx1"/>
+                </a:solidFill>
+                <a:latin typeface="+mn-lt"/>
+                <a:ea typeface="+mn-ea"/>
+                <a:cs typeface="+mn-cs"/>
+              </a:defRPr>
+            </a:lvl3pPr>
+            <a:lvl4pPr marL="1508760" indent="0" algn="ctr" defTabSz="1005840" rtl="0" eaLnBrk="1" latinLnBrk="0" hangingPunct="1">
+              <a:lnSpc>
+                <a:spcPct val="90000"/>
+              </a:lnSpc>
+              <a:spcBef>
+                <a:spcPts val="550"/>
+              </a:spcBef>
+              <a:buFont typeface="Arial" panose="020B0604020202020204" pitchFamily="34" charset="0"/>
+              <a:buNone/>
+              <a:defRPr sz="1760" kern="1200">
+                <a:solidFill>
+                  <a:schemeClr val="tx1"/>
+                </a:solidFill>
+                <a:latin typeface="+mn-lt"/>
+                <a:ea typeface="+mn-ea"/>
+                <a:cs typeface="+mn-cs"/>
+              </a:defRPr>
+            </a:lvl4pPr>
+            <a:lvl5pPr marL="2011680" indent="0" algn="ctr" defTabSz="1005840" rtl="0" eaLnBrk="1" latinLnBrk="0" hangingPunct="1">
+              <a:lnSpc>
+                <a:spcPct val="90000"/>
+              </a:lnSpc>
+              <a:spcBef>
+                <a:spcPts val="550"/>
+              </a:spcBef>
+              <a:buFont typeface="Arial" panose="020B0604020202020204" pitchFamily="34" charset="0"/>
+              <a:buNone/>
+              <a:defRPr sz="1760" kern="1200">
+                <a:solidFill>
+                  <a:schemeClr val="tx1"/>
+                </a:solidFill>
+                <a:latin typeface="+mn-lt"/>
+                <a:ea typeface="+mn-ea"/>
+                <a:cs typeface="+mn-cs"/>
+              </a:defRPr>
+            </a:lvl5pPr>
+            <a:lvl6pPr marL="2514600" indent="0" algn="ctr" defTabSz="1005840" rtl="0" eaLnBrk="1" latinLnBrk="0" hangingPunct="1">
+              <a:lnSpc>
+                <a:spcPct val="90000"/>
+              </a:lnSpc>
+              <a:spcBef>
+                <a:spcPts val="550"/>
+              </a:spcBef>
+              <a:buFont typeface="Arial" panose="020B0604020202020204" pitchFamily="34" charset="0"/>
+              <a:buNone/>
+              <a:defRPr sz="1760" kern="1200">
+                <a:solidFill>
+                  <a:schemeClr val="tx1"/>
+                </a:solidFill>
+                <a:latin typeface="+mn-lt"/>
+                <a:ea typeface="+mn-ea"/>
+                <a:cs typeface="+mn-cs"/>
+              </a:defRPr>
+            </a:lvl6pPr>
+            <a:lvl7pPr marL="3017520" indent="0" algn="ctr" defTabSz="1005840" rtl="0" eaLnBrk="1" latinLnBrk="0" hangingPunct="1">
+              <a:lnSpc>
+                <a:spcPct val="90000"/>
+              </a:lnSpc>
+              <a:spcBef>
+                <a:spcPts val="550"/>
+              </a:spcBef>
+              <a:buFont typeface="Arial" panose="020B0604020202020204" pitchFamily="34" charset="0"/>
+              <a:buNone/>
+              <a:defRPr sz="1760" kern="1200">
+                <a:solidFill>
+                  <a:schemeClr val="tx1"/>
+                </a:solidFill>
+                <a:latin typeface="+mn-lt"/>
+                <a:ea typeface="+mn-ea"/>
+                <a:cs typeface="+mn-cs"/>
+              </a:defRPr>
+            </a:lvl7pPr>
+            <a:lvl8pPr marL="3520440" indent="0" algn="ctr" defTabSz="1005840" rtl="0" eaLnBrk="1" latinLnBrk="0" hangingPunct="1">
+              <a:lnSpc>
+                <a:spcPct val="90000"/>
+              </a:lnSpc>
+              <a:spcBef>
+                <a:spcPts val="550"/>
+              </a:spcBef>
+              <a:buFont typeface="Arial" panose="020B0604020202020204" pitchFamily="34" charset="0"/>
+              <a:buNone/>
+              <a:defRPr sz="1760" kern="1200">
+                <a:solidFill>
+                  <a:schemeClr val="tx1"/>
+                </a:solidFill>
+                <a:latin typeface="+mn-lt"/>
+                <a:ea typeface="+mn-ea"/>
+                <a:cs typeface="+mn-cs"/>
+              </a:defRPr>
+            </a:lvl8pPr>
+            <a:lvl9pPr marL="4023360" indent="0" algn="ctr" defTabSz="1005840" rtl="0" eaLnBrk="1" latinLnBrk="0" hangingPunct="1">
+              <a:lnSpc>
+                <a:spcPct val="90000"/>
+              </a:lnSpc>
+              <a:spcBef>
+                <a:spcPts val="550"/>
+              </a:spcBef>
+              <a:buFont typeface="Arial" panose="020B0604020202020204" pitchFamily="34" charset="0"/>
+              <a:buNone/>
+              <a:defRPr sz="1760" kern="1200">
+                <a:solidFill>
+                  <a:schemeClr val="tx1"/>
+                </a:solidFill>
+                <a:latin typeface="+mn-lt"/>
+                <a:ea typeface="+mn-ea"/>
+                <a:cs typeface="+mn-cs"/>
+              </a:defRPr>
+            </a:lvl9pPr>
+          </a:lstStyle>
+          <a:p>
+            <a:r>
+              <a:rPr lang="en-US" sz="2400"/>
+              <a:t>Interagency Ecological Program Status &amp; Trends 2017-2018 Winter Season Report</a:t>
+            </a:r>
+            <a:endParaRPr lang="en-US" sz="2400" dirty="0"/>
+          </a:p>
+        </p:txBody>
+      </p:sp>
       <p:pic>
         <p:nvPicPr>
-          <p:cNvPr id="28" name="Picture 27">
+          <p:cNvPr id="12" name="Picture 11">
             <a:extLst>
               <a:ext uri="{FF2B5EF4-FFF2-40B4-BE49-F238E27FC236}">
-                <a16:creationId xmlns:a16="http://schemas.microsoft.com/office/drawing/2014/main" id="{AAE4D102-3A88-4232-9826-92273C624518}"/>
+                <a16:creationId xmlns:a16="http://schemas.microsoft.com/office/drawing/2014/main" id="{8DC26D53-D548-42A8-8AB8-E2D34C667F2D}"/>
               </a:ext>
             </a:extLst>
           </p:cNvPr>
@@ -7674,15 +9533,21 @@
           <p:nvPr/>
         </p:nvPicPr>
         <p:blipFill>
-          <a:blip r:embed="rId7"/>
+          <a:blip r:embed="rId7">
+            <a:extLst>
+              <a:ext uri="{28A0092B-C50C-407E-A947-70E740481C1C}">
+                <a14:useLocalDpi xmlns:a14="http://schemas.microsoft.com/office/drawing/2010/main" val="0"/>
+              </a:ext>
+            </a:extLst>
+          </a:blip>
           <a:stretch>
             <a:fillRect/>
           </a:stretch>
         </p:blipFill>
         <p:spPr>
           <a:xfrm>
-            <a:off x="11670434" y="2312022"/>
-            <a:ext cx="1552515" cy="393951"/>
+            <a:off x="3313395" y="2630604"/>
+            <a:ext cx="3346711" cy="2447549"/>
           </a:xfrm>
           <a:prstGeom prst="rect">
             <a:avLst/>
@@ -8466,16 +10331,16 @@
 <file path=customXml/itemProps1.xml><?xml version="1.0" encoding="utf-8"?>
 <ds:datastoreItem xmlns:ds="http://schemas.openxmlformats.org/officeDocument/2006/customXml" ds:itemID="{C10BEF59-2155-4487-981E-A05FB8C22B37}">
   <ds:schemaRefs>
+    <ds:schemaRef ds:uri="http://purl.org/dc/dcmitype/"/>
     <ds:schemaRef ds:uri="http://purl.org/dc/elements/1.1/"/>
     <ds:schemaRef ds:uri="http://schemas.microsoft.com/office/2006/metadata/properties"/>
+    <ds:schemaRef ds:uri="http://schemas.microsoft.com/sharepoint/v3"/>
+    <ds:schemaRef ds:uri="http://schemas.microsoft.com/office/2006/documentManagement/types"/>
+    <ds:schemaRef ds:uri="http://schemas.openxmlformats.org/package/2006/metadata/core-properties"/>
+    <ds:schemaRef ds:uri="http://purl.org/dc/terms/"/>
+    <ds:schemaRef ds:uri="http://schemas.microsoft.com/office/infopath/2007/PartnerControls"/>
     <ds:schemaRef ds:uri="d8e3e477-4a6b-4f2c-bc61-5e11693be0f9"/>
-    <ds:schemaRef ds:uri="http://schemas.microsoft.com/sharepoint/v3"/>
-    <ds:schemaRef ds:uri="http://purl.org/dc/terms/"/>
-    <ds:schemaRef ds:uri="http://schemas.openxmlformats.org/package/2006/metadata/core-properties"/>
-    <ds:schemaRef ds:uri="http://schemas.microsoft.com/office/2006/documentManagement/types"/>
-    <ds:schemaRef ds:uri="http://schemas.microsoft.com/office/infopath/2007/PartnerControls"/>
     <ds:schemaRef ds:uri="http://www.w3.org/XML/1998/namespace"/>
-    <ds:schemaRef ds:uri="http://purl.org/dc/dcmitype/"/>
   </ds:schemaRefs>
 </ds:datastoreItem>
 </file>
